--- a/像榮美川流.pptx
+++ b/像榮美川流.pptx
@@ -2,20 +2,21 @@
 <file path=ppt/presentation.xml><?xml version="1.0" encoding="utf-8"?>
 <p:presentation xmlns:a="http://schemas.openxmlformats.org/drawingml/2006/main" xmlns:r="http://schemas.openxmlformats.org/officeDocument/2006/relationships" xmlns:p="http://schemas.openxmlformats.org/presentationml/2006/main" saveSubsetFonts="1">
   <p:sldMasterIdLst>
-    <p:sldMasterId id="2147483660" r:id="rId1"/>
+    <p:sldMasterId id="2147483672" r:id="rId1"/>
   </p:sldMasterIdLst>
   <p:sldIdLst>
-    <p:sldId id="256" r:id="rId2"/>
-    <p:sldId id="257" r:id="rId3"/>
-    <p:sldId id="258" r:id="rId4"/>
-    <p:sldId id="259" r:id="rId5"/>
-    <p:sldId id="260" r:id="rId6"/>
-    <p:sldId id="261" r:id="rId7"/>
-    <p:sldId id="262" r:id="rId8"/>
-    <p:sldId id="263" r:id="rId9"/>
-    <p:sldId id="264" r:id="rId10"/>
+    <p:sldId id="353" r:id="rId2"/>
+    <p:sldId id="390" r:id="rId3"/>
+    <p:sldId id="391" r:id="rId4"/>
+    <p:sldId id="392" r:id="rId5"/>
+    <p:sldId id="393" r:id="rId6"/>
+    <p:sldId id="394" r:id="rId7"/>
+    <p:sldId id="395" r:id="rId8"/>
+    <p:sldId id="396" r:id="rId9"/>
+    <p:sldId id="397" r:id="rId10"/>
+    <p:sldId id="398" r:id="rId11"/>
   </p:sldIdLst>
-  <p:sldSz cx="9144000" cy="6858000" type="screen4x3"/>
+  <p:sldSz cx="12192000" cy="6858000"/>
   <p:notesSz cx="6858000" cy="9144000"/>
   <p:defaultTextStyle>
     <a:defPPr>
@@ -112,6 +113,22 @@
       </a:defRPr>
     </a:lvl9pPr>
   </p:defaultTextStyle>
+  <p:extLst>
+    <p:ext uri="{EFAFB233-063F-42B5-8137-9DF3F51BA10A}">
+      <p15:sldGuideLst xmlns:p15="http://schemas.microsoft.com/office/powerpoint/2012/main">
+        <p15:guide id="1" orient="horz" pos="2160" userDrawn="1">
+          <p15:clr>
+            <a:srgbClr val="A4A3A4"/>
+          </p15:clr>
+        </p15:guide>
+        <p15:guide id="2" pos="3840" userDrawn="1">
+          <p15:clr>
+            <a:srgbClr val="A4A3A4"/>
+          </p15:clr>
+        </p15:guide>
+      </p15:sldGuideLst>
+    </p:ext>
+  </p:extLst>
 </p:presentation>
 </file>
 
@@ -134,322 +151,7 @@
       </p:grpSpPr>
       <p:sp>
         <p:nvSpPr>
-          <p:cNvPr id="7" name="Flowchart: Document 6"/>
-          <p:cNvSpPr/>
-          <p:nvPr/>
-        </p:nvSpPr>
-        <p:spPr>
-          <a:xfrm rot="10800000">
-            <a:off x="1" y="1520731"/>
-            <a:ext cx="9144000" cy="3435579"/>
-          </a:xfrm>
-          <a:custGeom>
-            <a:avLst/>
-            <a:gdLst>
-              <a:gd name="connsiteX0" fmla="*/ 0 w 21600"/>
-              <a:gd name="connsiteY0" fmla="*/ 0 h 18805"/>
-              <a:gd name="connsiteX1" fmla="*/ 21600 w 21600"/>
-              <a:gd name="connsiteY1" fmla="*/ 0 h 18805"/>
-              <a:gd name="connsiteX2" fmla="*/ 21600 w 21600"/>
-              <a:gd name="connsiteY2" fmla="*/ 17322 h 18805"/>
-              <a:gd name="connsiteX3" fmla="*/ 0 w 21600"/>
-              <a:gd name="connsiteY3" fmla="*/ 18805 h 18805"/>
-              <a:gd name="connsiteX4" fmla="*/ 0 w 21600"/>
-              <a:gd name="connsiteY4" fmla="*/ 0 h 18805"/>
-              <a:gd name="connsiteX0" fmla="*/ 0 w 21600"/>
-              <a:gd name="connsiteY0" fmla="*/ 0 h 18805"/>
-              <a:gd name="connsiteX1" fmla="*/ 21600 w 21600"/>
-              <a:gd name="connsiteY1" fmla="*/ 0 h 18805"/>
-              <a:gd name="connsiteX2" fmla="*/ 21600 w 21600"/>
-              <a:gd name="connsiteY2" fmla="*/ 17322 h 18805"/>
-              <a:gd name="connsiteX3" fmla="*/ 0 w 21600"/>
-              <a:gd name="connsiteY3" fmla="*/ 18805 h 18805"/>
-              <a:gd name="connsiteX4" fmla="*/ 0 w 21600"/>
-              <a:gd name="connsiteY4" fmla="*/ 0 h 18805"/>
-              <a:gd name="connsiteX0" fmla="*/ 0 w 21600"/>
-              <a:gd name="connsiteY0" fmla="*/ 0 h 18916"/>
-              <a:gd name="connsiteX1" fmla="*/ 21600 w 21600"/>
-              <a:gd name="connsiteY1" fmla="*/ 0 h 18916"/>
-              <a:gd name="connsiteX2" fmla="*/ 21600 w 21600"/>
-              <a:gd name="connsiteY2" fmla="*/ 17322 h 18916"/>
-              <a:gd name="connsiteX3" fmla="*/ 0 w 21600"/>
-              <a:gd name="connsiteY3" fmla="*/ 18916 h 18916"/>
-              <a:gd name="connsiteX4" fmla="*/ 0 w 21600"/>
-              <a:gd name="connsiteY4" fmla="*/ 0 h 18916"/>
-              <a:gd name="connsiteX0" fmla="*/ 0 w 21600"/>
-              <a:gd name="connsiteY0" fmla="*/ 0 h 18916"/>
-              <a:gd name="connsiteX1" fmla="*/ 21600 w 21600"/>
-              <a:gd name="connsiteY1" fmla="*/ 0 h 18916"/>
-              <a:gd name="connsiteX2" fmla="*/ 21600 w 21600"/>
-              <a:gd name="connsiteY2" fmla="*/ 17322 h 18916"/>
-              <a:gd name="connsiteX3" fmla="*/ 0 w 21600"/>
-              <a:gd name="connsiteY3" fmla="*/ 18916 h 18916"/>
-              <a:gd name="connsiteX4" fmla="*/ 0 w 21600"/>
-              <a:gd name="connsiteY4" fmla="*/ 0 h 18916"/>
-              <a:gd name="connsiteX0" fmla="*/ 0 w 21600"/>
-              <a:gd name="connsiteY0" fmla="*/ 0 h 18916"/>
-              <a:gd name="connsiteX1" fmla="*/ 21600 w 21600"/>
-              <a:gd name="connsiteY1" fmla="*/ 0 h 18916"/>
-              <a:gd name="connsiteX2" fmla="*/ 21600 w 21600"/>
-              <a:gd name="connsiteY2" fmla="*/ 17322 h 18916"/>
-              <a:gd name="connsiteX3" fmla="*/ 0 w 21600"/>
-              <a:gd name="connsiteY3" fmla="*/ 18916 h 18916"/>
-              <a:gd name="connsiteX4" fmla="*/ 0 w 21600"/>
-              <a:gd name="connsiteY4" fmla="*/ 0 h 18916"/>
-              <a:gd name="connsiteX0" fmla="*/ 0 w 21600"/>
-              <a:gd name="connsiteY0" fmla="*/ 0 h 19355"/>
-              <a:gd name="connsiteX1" fmla="*/ 21600 w 21600"/>
-              <a:gd name="connsiteY1" fmla="*/ 0 h 19355"/>
-              <a:gd name="connsiteX2" fmla="*/ 21600 w 21600"/>
-              <a:gd name="connsiteY2" fmla="*/ 17322 h 19355"/>
-              <a:gd name="connsiteX3" fmla="*/ 0 w 21600"/>
-              <a:gd name="connsiteY3" fmla="*/ 19355 h 19355"/>
-              <a:gd name="connsiteX4" fmla="*/ 0 w 21600"/>
-              <a:gd name="connsiteY4" fmla="*/ 0 h 19355"/>
-              <a:gd name="connsiteX0" fmla="*/ 0 w 21600"/>
-              <a:gd name="connsiteY0" fmla="*/ 0 h 19355"/>
-              <a:gd name="connsiteX1" fmla="*/ 21600 w 21600"/>
-              <a:gd name="connsiteY1" fmla="*/ 0 h 19355"/>
-              <a:gd name="connsiteX2" fmla="*/ 21600 w 21600"/>
-              <a:gd name="connsiteY2" fmla="*/ 17322 h 19355"/>
-              <a:gd name="connsiteX3" fmla="*/ 0 w 21600"/>
-              <a:gd name="connsiteY3" fmla="*/ 19355 h 19355"/>
-              <a:gd name="connsiteX4" fmla="*/ 0 w 21600"/>
-              <a:gd name="connsiteY4" fmla="*/ 0 h 19355"/>
-              <a:gd name="connsiteX0" fmla="*/ 0 w 21600"/>
-              <a:gd name="connsiteY0" fmla="*/ 0 h 19794"/>
-              <a:gd name="connsiteX1" fmla="*/ 21600 w 21600"/>
-              <a:gd name="connsiteY1" fmla="*/ 0 h 19794"/>
-              <a:gd name="connsiteX2" fmla="*/ 21600 w 21600"/>
-              <a:gd name="connsiteY2" fmla="*/ 17322 h 19794"/>
-              <a:gd name="connsiteX3" fmla="*/ 0 w 21600"/>
-              <a:gd name="connsiteY3" fmla="*/ 19794 h 19794"/>
-              <a:gd name="connsiteX4" fmla="*/ 0 w 21600"/>
-              <a:gd name="connsiteY4" fmla="*/ 0 h 19794"/>
-              <a:gd name="connsiteX0" fmla="*/ 0 w 21600"/>
-              <a:gd name="connsiteY0" fmla="*/ 0 h 19794"/>
-              <a:gd name="connsiteX1" fmla="*/ 21600 w 21600"/>
-              <a:gd name="connsiteY1" fmla="*/ 0 h 19794"/>
-              <a:gd name="connsiteX2" fmla="*/ 21600 w 21600"/>
-              <a:gd name="connsiteY2" fmla="*/ 17322 h 19794"/>
-              <a:gd name="connsiteX3" fmla="*/ 0 w 21600"/>
-              <a:gd name="connsiteY3" fmla="*/ 19794 h 19794"/>
-              <a:gd name="connsiteX4" fmla="*/ 0 w 21600"/>
-              <a:gd name="connsiteY4" fmla="*/ 0 h 19794"/>
-            </a:gdLst>
-            <a:ahLst/>
-            <a:cxnLst>
-              <a:cxn ang="0">
-                <a:pos x="connsiteX0" y="connsiteY0"/>
-              </a:cxn>
-              <a:cxn ang="0">
-                <a:pos x="connsiteX1" y="connsiteY1"/>
-              </a:cxn>
-              <a:cxn ang="0">
-                <a:pos x="connsiteX2" y="connsiteY2"/>
-              </a:cxn>
-              <a:cxn ang="0">
-                <a:pos x="connsiteX3" y="connsiteY3"/>
-              </a:cxn>
-              <a:cxn ang="0">
-                <a:pos x="connsiteX4" y="connsiteY4"/>
-              </a:cxn>
-              <a:cxn ang="0">
-                <a:pos x="connsiteX0" y="connsiteY0"/>
-              </a:cxn>
-              <a:cxn ang="0">
-                <a:pos x="connsiteX1" y="connsiteY1"/>
-              </a:cxn>
-              <a:cxn ang="0">
-                <a:pos x="connsiteX2" y="connsiteY2"/>
-              </a:cxn>
-              <a:cxn ang="0">
-                <a:pos x="connsiteX3" y="connsiteY3"/>
-              </a:cxn>
-              <a:cxn ang="0">
-                <a:pos x="connsiteX4" y="connsiteY4"/>
-              </a:cxn>
-              <a:cxn ang="0">
-                <a:pos x="connsiteX0" y="connsiteY0"/>
-              </a:cxn>
-              <a:cxn ang="0">
-                <a:pos x="connsiteX1" y="connsiteY1"/>
-              </a:cxn>
-              <a:cxn ang="0">
-                <a:pos x="connsiteX2" y="connsiteY2"/>
-              </a:cxn>
-              <a:cxn ang="0">
-                <a:pos x="connsiteX3" y="connsiteY3"/>
-              </a:cxn>
-              <a:cxn ang="0">
-                <a:pos x="connsiteX4" y="connsiteY4"/>
-              </a:cxn>
-              <a:cxn ang="0">
-                <a:pos x="connsiteX0" y="connsiteY0"/>
-              </a:cxn>
-              <a:cxn ang="0">
-                <a:pos x="connsiteX1" y="connsiteY1"/>
-              </a:cxn>
-              <a:cxn ang="0">
-                <a:pos x="connsiteX2" y="connsiteY2"/>
-              </a:cxn>
-              <a:cxn ang="0">
-                <a:pos x="connsiteX3" y="connsiteY3"/>
-              </a:cxn>
-              <a:cxn ang="0">
-                <a:pos x="connsiteX4" y="connsiteY4"/>
-              </a:cxn>
-              <a:cxn ang="0">
-                <a:pos x="connsiteX0" y="connsiteY0"/>
-              </a:cxn>
-              <a:cxn ang="0">
-                <a:pos x="connsiteX1" y="connsiteY1"/>
-              </a:cxn>
-              <a:cxn ang="0">
-                <a:pos x="connsiteX2" y="connsiteY2"/>
-              </a:cxn>
-              <a:cxn ang="0">
-                <a:pos x="connsiteX3" y="connsiteY3"/>
-              </a:cxn>
-              <a:cxn ang="0">
-                <a:pos x="connsiteX4" y="connsiteY4"/>
-              </a:cxn>
-              <a:cxn ang="0">
-                <a:pos x="connsiteX0" y="connsiteY0"/>
-              </a:cxn>
-              <a:cxn ang="0">
-                <a:pos x="connsiteX1" y="connsiteY1"/>
-              </a:cxn>
-              <a:cxn ang="0">
-                <a:pos x="connsiteX2" y="connsiteY2"/>
-              </a:cxn>
-              <a:cxn ang="0">
-                <a:pos x="connsiteX3" y="connsiteY3"/>
-              </a:cxn>
-              <a:cxn ang="0">
-                <a:pos x="connsiteX4" y="connsiteY4"/>
-              </a:cxn>
-              <a:cxn ang="0">
-                <a:pos x="connsiteX0" y="connsiteY0"/>
-              </a:cxn>
-              <a:cxn ang="0">
-                <a:pos x="connsiteX1" y="connsiteY1"/>
-              </a:cxn>
-              <a:cxn ang="0">
-                <a:pos x="connsiteX2" y="connsiteY2"/>
-              </a:cxn>
-              <a:cxn ang="0">
-                <a:pos x="connsiteX3" y="connsiteY3"/>
-              </a:cxn>
-              <a:cxn ang="0">
-                <a:pos x="connsiteX4" y="connsiteY4"/>
-              </a:cxn>
-              <a:cxn ang="0">
-                <a:pos x="connsiteX0" y="connsiteY0"/>
-              </a:cxn>
-              <a:cxn ang="0">
-                <a:pos x="connsiteX1" y="connsiteY1"/>
-              </a:cxn>
-              <a:cxn ang="0">
-                <a:pos x="connsiteX2" y="connsiteY2"/>
-              </a:cxn>
-              <a:cxn ang="0">
-                <a:pos x="connsiteX3" y="connsiteY3"/>
-              </a:cxn>
-              <a:cxn ang="0">
-                <a:pos x="connsiteX4" y="connsiteY4"/>
-              </a:cxn>
-              <a:cxn ang="0">
-                <a:pos x="connsiteX0" y="connsiteY0"/>
-              </a:cxn>
-              <a:cxn ang="0">
-                <a:pos x="connsiteX1" y="connsiteY1"/>
-              </a:cxn>
-              <a:cxn ang="0">
-                <a:pos x="connsiteX2" y="connsiteY2"/>
-              </a:cxn>
-              <a:cxn ang="0">
-                <a:pos x="connsiteX3" y="connsiteY3"/>
-              </a:cxn>
-              <a:cxn ang="0">
-                <a:pos x="connsiteX4" y="connsiteY4"/>
-              </a:cxn>
-            </a:cxnLst>
-            <a:rect l="l" t="t" r="r" b="b"/>
-            <a:pathLst>
-              <a:path w="21600" h="19794">
-                <a:moveTo>
-                  <a:pt x="0" y="0"/>
-                </a:moveTo>
-                <a:lnTo>
-                  <a:pt x="21600" y="0"/>
-                </a:lnTo>
-                <a:lnTo>
-                  <a:pt x="21600" y="17322"/>
-                </a:lnTo>
-                <a:cubicBezTo>
-                  <a:pt x="10800" y="17322"/>
-                  <a:pt x="7466" y="25350"/>
-                  <a:pt x="0" y="19794"/>
-                </a:cubicBezTo>
-                <a:lnTo>
-                  <a:pt x="0" y="0"/>
-                </a:lnTo>
-                <a:close/>
-              </a:path>
-            </a:pathLst>
-          </a:custGeom>
-          <a:gradFill>
-            <a:gsLst>
-              <a:gs pos="100000">
-                <a:schemeClr val="bg2">
-                  <a:tint val="28000"/>
-                  <a:satMod val="2000000"/>
-                  <a:alpha val="30000"/>
-                </a:schemeClr>
-              </a:gs>
-              <a:gs pos="35000">
-                <a:schemeClr val="bg2">
-                  <a:shade val="100000"/>
-                  <a:satMod val="600000"/>
-                  <a:alpha val="0"/>
-                </a:schemeClr>
-              </a:gs>
-            </a:gsLst>
-            <a:lin ang="5400000" scaled="1"/>
-          </a:gradFill>
-          <a:ln w="31750" cap="sq" cmpd="sng" algn="ctr">
-            <a:noFill/>
-            <a:prstDash val="solid"/>
-          </a:ln>
-          <a:effectLst/>
-        </p:spPr>
-        <p:style>
-          <a:lnRef idx="3">
-            <a:schemeClr val="lt1"/>
-          </a:lnRef>
-          <a:fillRef idx="1">
-            <a:schemeClr val="accent1"/>
-          </a:fillRef>
-          <a:effectRef idx="1">
-            <a:schemeClr val="accent1"/>
-          </a:effectRef>
-          <a:fontRef idx="minor">
-            <a:schemeClr val="lt1"/>
-          </a:fontRef>
-        </p:style>
-        <p:txBody>
-          <a:bodyPr anchor="ctr"/>
-          <a:lstStyle/>
-          <a:p>
-            <a:pPr algn="ctr"/>
-            <a:endParaRPr lang="en-US"/>
-          </a:p>
-        </p:txBody>
-      </p:sp>
-      <p:sp>
-        <p:nvSpPr>
-          <p:cNvPr id="9" name="Title 8"/>
+          <p:cNvPr id="2" name="標題 1"/>
           <p:cNvSpPr>
             <a:spLocks noGrp="1"/>
           </p:cNvSpPr>
@@ -459,40 +161,25 @@
         </p:nvSpPr>
         <p:spPr>
           <a:xfrm>
-            <a:off x="502920" y="2775745"/>
-            <a:ext cx="8229600" cy="2167128"/>
+            <a:off x="914400" y="2130429"/>
+            <a:ext cx="10363200" cy="1470025"/>
           </a:xfrm>
         </p:spPr>
         <p:txBody>
-          <a:bodyPr tIns="0" bIns="0" anchor="t"/>
-          <a:lstStyle>
-            <a:lvl1pPr>
-              <a:defRPr sz="5000" cap="all" baseline="0">
-                <a:effectLst>
-                  <a:outerShdw blurRad="30000" dist="30000" dir="2700000" algn="tl" rotWithShape="0">
-                    <a:schemeClr val="bg2">
-                      <a:shade val="45000"/>
-                      <a:satMod val="150000"/>
-                      <a:alpha val="90000"/>
-                    </a:schemeClr>
-                  </a:outerShdw>
-                  <a:reflection blurRad="12000" stA="25000" endPos="49000" dist="5000" dir="5400000" sy="-100000" algn="bl" rotWithShape="0"/>
-                </a:effectLst>
-              </a:defRPr>
-            </a:lvl1pPr>
-          </a:lstStyle>
-          <a:p>
-            <a:r>
-              <a:rPr lang="zh-TW" altLang="en-US" smtClean="0"/>
-              <a:t>按一下以編輯母片標題樣式</a:t>
-            </a:r>
-            <a:endParaRPr lang="en-US" dirty="0"/>
-          </a:p>
-        </p:txBody>
-      </p:sp>
-      <p:sp>
-        <p:nvSpPr>
-          <p:cNvPr id="17" name="Subtitle 16"/>
+          <a:bodyPr/>
+          <a:lstStyle/>
+          <a:p>
+            <a:r>
+              <a:rPr lang="en-US" altLang="zh-TW"/>
+              <a:t>Click to edit Master title style</a:t>
+            </a:r>
+            <a:endParaRPr lang="zh-TW" altLang="en-US"/>
+          </a:p>
+        </p:txBody>
+      </p:sp>
+      <p:sp>
+        <p:nvSpPr>
+          <p:cNvPr id="3" name="副標題 2"/>
           <p:cNvSpPr>
             <a:spLocks noGrp="1"/>
           </p:cNvSpPr>
@@ -502,58 +189,116 @@
         </p:nvSpPr>
         <p:spPr>
           <a:xfrm>
-            <a:off x="500064" y="1559720"/>
-            <a:ext cx="5105400" cy="1219200"/>
+            <a:off x="1828800" y="3886200"/>
+            <a:ext cx="8534400" cy="1752600"/>
           </a:xfrm>
         </p:spPr>
         <p:txBody>
-          <a:bodyPr lIns="0" tIns="0" rIns="0" bIns="0" anchor="b"/>
+          <a:bodyPr/>
           <a:lstStyle>
-            <a:lvl1pPr marL="0" indent="0" algn="l">
-              <a:buNone/>
-              <a:defRPr sz="1900">
-                <a:solidFill>
-                  <a:schemeClr val="tx1"/>
+            <a:lvl1pPr marL="0" indent="0" algn="ctr">
+              <a:buNone/>
+              <a:defRPr>
+                <a:solidFill>
+                  <a:schemeClr val="tx1">
+                    <a:tint val="75000"/>
+                  </a:schemeClr>
                 </a:solidFill>
               </a:defRPr>
             </a:lvl1pPr>
             <a:lvl2pPr marL="457200" indent="0" algn="ctr">
               <a:buNone/>
+              <a:defRPr>
+                <a:solidFill>
+                  <a:schemeClr val="tx1">
+                    <a:tint val="75000"/>
+                  </a:schemeClr>
+                </a:solidFill>
+              </a:defRPr>
             </a:lvl2pPr>
             <a:lvl3pPr marL="914400" indent="0" algn="ctr">
               <a:buNone/>
+              <a:defRPr>
+                <a:solidFill>
+                  <a:schemeClr val="tx1">
+                    <a:tint val="75000"/>
+                  </a:schemeClr>
+                </a:solidFill>
+              </a:defRPr>
             </a:lvl3pPr>
             <a:lvl4pPr marL="1371600" indent="0" algn="ctr">
               <a:buNone/>
+              <a:defRPr>
+                <a:solidFill>
+                  <a:schemeClr val="tx1">
+                    <a:tint val="75000"/>
+                  </a:schemeClr>
+                </a:solidFill>
+              </a:defRPr>
             </a:lvl4pPr>
             <a:lvl5pPr marL="1828800" indent="0" algn="ctr">
               <a:buNone/>
+              <a:defRPr>
+                <a:solidFill>
+                  <a:schemeClr val="tx1">
+                    <a:tint val="75000"/>
+                  </a:schemeClr>
+                </a:solidFill>
+              </a:defRPr>
             </a:lvl5pPr>
             <a:lvl6pPr marL="2286000" indent="0" algn="ctr">
               <a:buNone/>
+              <a:defRPr>
+                <a:solidFill>
+                  <a:schemeClr val="tx1">
+                    <a:tint val="75000"/>
+                  </a:schemeClr>
+                </a:solidFill>
+              </a:defRPr>
             </a:lvl6pPr>
             <a:lvl7pPr marL="2743200" indent="0" algn="ctr">
               <a:buNone/>
+              <a:defRPr>
+                <a:solidFill>
+                  <a:schemeClr val="tx1">
+                    <a:tint val="75000"/>
+                  </a:schemeClr>
+                </a:solidFill>
+              </a:defRPr>
             </a:lvl7pPr>
             <a:lvl8pPr marL="3200400" indent="0" algn="ctr">
               <a:buNone/>
+              <a:defRPr>
+                <a:solidFill>
+                  <a:schemeClr val="tx1">
+                    <a:tint val="75000"/>
+                  </a:schemeClr>
+                </a:solidFill>
+              </a:defRPr>
             </a:lvl8pPr>
             <a:lvl9pPr marL="3657600" indent="0" algn="ctr">
               <a:buNone/>
+              <a:defRPr>
+                <a:solidFill>
+                  <a:schemeClr val="tx1">
+                    <a:tint val="75000"/>
+                  </a:schemeClr>
+                </a:solidFill>
+              </a:defRPr>
             </a:lvl9pPr>
           </a:lstStyle>
           <a:p>
             <a:r>
-              <a:rPr lang="zh-TW" altLang="en-US" smtClean="0"/>
-              <a:t>按一下以編輯母片副標題樣式</a:t>
-            </a:r>
-            <a:endParaRPr lang="en-US" dirty="0"/>
-          </a:p>
-        </p:txBody>
-      </p:sp>
-      <p:sp>
-        <p:nvSpPr>
-          <p:cNvPr id="30" name="Date Placeholder 29"/>
+              <a:rPr lang="en-US" altLang="zh-TW"/>
+              <a:t>Click to edit Master subtitle style</a:t>
+            </a:r>
+            <a:endParaRPr lang="zh-TW" altLang="en-US"/>
+          </a:p>
+        </p:txBody>
+      </p:sp>
+      <p:sp>
+        <p:nvSpPr>
+          <p:cNvPr id="4" name="日期版面配置區 3"/>
           <p:cNvSpPr>
             <a:spLocks noGrp="1"/>
           </p:cNvSpPr>
@@ -568,7 +313,7 @@
           <a:p>
             <a:fld id="{4CA65DC9-25DB-4D45-A2C5-A87C7239C765}" type="datetimeFigureOut">
               <a:rPr lang="zh-TW" altLang="en-US" smtClean="0"/>
-              <a:t>2016/1/9</a:t>
+              <a:t>2026/4/24</a:t>
             </a:fld>
             <a:endParaRPr lang="zh-TW" altLang="en-US"/>
           </a:p>
@@ -576,7 +321,7 @@
       </p:sp>
       <p:sp>
         <p:nvSpPr>
-          <p:cNvPr id="19" name="Footer Placeholder 18"/>
+          <p:cNvPr id="5" name="頁尾版面配置區 4"/>
           <p:cNvSpPr>
             <a:spLocks noGrp="1"/>
           </p:cNvSpPr>
@@ -595,7 +340,7 @@
       </p:sp>
       <p:sp>
         <p:nvSpPr>
-          <p:cNvPr id="27" name="Slide Number Placeholder 26"/>
+          <p:cNvPr id="6" name="投影片編號版面配置區 5"/>
           <p:cNvSpPr>
             <a:spLocks noGrp="1"/>
           </p:cNvSpPr>
@@ -617,6 +362,11 @@
         </p:txBody>
       </p:sp>
     </p:spTree>
+    <p:extLst>
+      <p:ext uri="{BB962C8B-B14F-4D97-AF65-F5344CB8AC3E}">
+        <p14:creationId xmlns:p14="http://schemas.microsoft.com/office/powerpoint/2010/main" val="3994192528"/>
+      </p:ext>
+    </p:extLst>
   </p:cSld>
   <p:clrMapOvr>
     <a:masterClrMapping/>
@@ -643,7 +393,7 @@
       </p:grpSpPr>
       <p:sp>
         <p:nvSpPr>
-          <p:cNvPr id="2" name="Title 1"/>
+          <p:cNvPr id="2" name="標題 1"/>
           <p:cNvSpPr>
             <a:spLocks noGrp="1"/>
           </p:cNvSpPr>
@@ -657,16 +407,16 @@
           <a:lstStyle/>
           <a:p>
             <a:r>
-              <a:rPr lang="zh-TW" altLang="en-US" smtClean="0"/>
-              <a:t>按一下以編輯母片標題樣式</a:t>
-            </a:r>
-            <a:endParaRPr lang="en-US"/>
-          </a:p>
-        </p:txBody>
-      </p:sp>
-      <p:sp>
-        <p:nvSpPr>
-          <p:cNvPr id="3" name="Vertical Text Placeholder 2"/>
+              <a:rPr lang="en-US" altLang="zh-TW"/>
+              <a:t>Click to edit Master title style</a:t>
+            </a:r>
+            <a:endParaRPr lang="zh-TW" altLang="en-US"/>
+          </a:p>
+        </p:txBody>
+      </p:sp>
+      <p:sp>
+        <p:nvSpPr>
+          <p:cNvPr id="3" name="直排文字版面配置區 2"/>
           <p:cNvSpPr>
             <a:spLocks noGrp="1"/>
           </p:cNvSpPr>
@@ -681,44 +431,44 @@
           <a:p>
             <a:pPr lvl="0"/>
             <a:r>
-              <a:rPr lang="zh-TW" altLang="en-US" smtClean="0"/>
-              <a:t>按一下以編輯母片文字樣式</a:t>
+              <a:rPr lang="en-US" altLang="zh-TW"/>
+              <a:t>Click to edit Master text styles</a:t>
             </a:r>
           </a:p>
           <a:p>
             <a:pPr lvl="1"/>
             <a:r>
-              <a:rPr lang="zh-TW" altLang="en-US" smtClean="0"/>
-              <a:t>第二層</a:t>
+              <a:rPr lang="en-US" altLang="zh-TW"/>
+              <a:t>Second level</a:t>
             </a:r>
           </a:p>
           <a:p>
             <a:pPr lvl="2"/>
             <a:r>
-              <a:rPr lang="zh-TW" altLang="en-US" smtClean="0"/>
-              <a:t>第三層</a:t>
+              <a:rPr lang="en-US" altLang="zh-TW"/>
+              <a:t>Third level</a:t>
             </a:r>
           </a:p>
           <a:p>
             <a:pPr lvl="3"/>
             <a:r>
-              <a:rPr lang="zh-TW" altLang="en-US" smtClean="0"/>
-              <a:t>第四層</a:t>
+              <a:rPr lang="en-US" altLang="zh-TW"/>
+              <a:t>Fourth level</a:t>
             </a:r>
           </a:p>
           <a:p>
             <a:pPr lvl="4"/>
             <a:r>
-              <a:rPr lang="zh-TW" altLang="en-US" smtClean="0"/>
-              <a:t>第五層</a:t>
-            </a:r>
-            <a:endParaRPr lang="en-US"/>
-          </a:p>
-        </p:txBody>
-      </p:sp>
-      <p:sp>
-        <p:nvSpPr>
-          <p:cNvPr id="4" name="Date Placeholder 3"/>
+              <a:rPr lang="en-US" altLang="zh-TW"/>
+              <a:t>Fifth level</a:t>
+            </a:r>
+            <a:endParaRPr lang="zh-TW" altLang="en-US"/>
+          </a:p>
+        </p:txBody>
+      </p:sp>
+      <p:sp>
+        <p:nvSpPr>
+          <p:cNvPr id="4" name="日期版面配置區 3"/>
           <p:cNvSpPr>
             <a:spLocks noGrp="1"/>
           </p:cNvSpPr>
@@ -733,7 +483,7 @@
           <a:p>
             <a:fld id="{4CA65DC9-25DB-4D45-A2C5-A87C7239C765}" type="datetimeFigureOut">
               <a:rPr lang="zh-TW" altLang="en-US" smtClean="0"/>
-              <a:t>2016/1/9</a:t>
+              <a:t>2026/4/24</a:t>
             </a:fld>
             <a:endParaRPr lang="zh-TW" altLang="en-US"/>
           </a:p>
@@ -741,7 +491,7 @@
       </p:sp>
       <p:sp>
         <p:nvSpPr>
-          <p:cNvPr id="5" name="Footer Placeholder 4"/>
+          <p:cNvPr id="5" name="頁尾版面配置區 4"/>
           <p:cNvSpPr>
             <a:spLocks noGrp="1"/>
           </p:cNvSpPr>
@@ -760,7 +510,7 @@
       </p:sp>
       <p:sp>
         <p:nvSpPr>
-          <p:cNvPr id="6" name="Slide Number Placeholder 5"/>
+          <p:cNvPr id="6" name="投影片編號版面配置區 5"/>
           <p:cNvSpPr>
             <a:spLocks noGrp="1"/>
           </p:cNvSpPr>
@@ -782,6 +532,11 @@
         </p:txBody>
       </p:sp>
     </p:spTree>
+    <p:extLst>
+      <p:ext uri="{BB962C8B-B14F-4D97-AF65-F5344CB8AC3E}">
+        <p14:creationId xmlns:p14="http://schemas.microsoft.com/office/powerpoint/2010/main" val="1002772265"/>
+      </p:ext>
+    </p:extLst>
   </p:cSld>
   <p:clrMapOvr>
     <a:masterClrMapping/>
@@ -808,7 +563,7 @@
       </p:grpSpPr>
       <p:sp>
         <p:nvSpPr>
-          <p:cNvPr id="2" name="Vertical Title 1"/>
+          <p:cNvPr id="2" name="直排標題 1"/>
           <p:cNvSpPr>
             <a:spLocks noGrp="1"/>
           </p:cNvSpPr>
@@ -818,8 +573,8 @@
         </p:nvSpPr>
         <p:spPr>
           <a:xfrm>
-            <a:off x="6629400" y="274638"/>
-            <a:ext cx="2057400" cy="5851525"/>
+            <a:off x="8839200" y="274640"/>
+            <a:ext cx="2743200" cy="5851525"/>
           </a:xfrm>
         </p:spPr>
         <p:txBody>
@@ -827,16 +582,16 @@
           <a:lstStyle/>
           <a:p>
             <a:r>
-              <a:rPr lang="zh-TW" altLang="en-US" smtClean="0"/>
-              <a:t>按一下以編輯母片標題樣式</a:t>
-            </a:r>
-            <a:endParaRPr lang="en-US"/>
-          </a:p>
-        </p:txBody>
-      </p:sp>
-      <p:sp>
-        <p:nvSpPr>
-          <p:cNvPr id="3" name="Vertical Text Placeholder 2"/>
+              <a:rPr lang="en-US" altLang="zh-TW"/>
+              <a:t>Click to edit Master title style</a:t>
+            </a:r>
+            <a:endParaRPr lang="zh-TW" altLang="en-US"/>
+          </a:p>
+        </p:txBody>
+      </p:sp>
+      <p:sp>
+        <p:nvSpPr>
+          <p:cNvPr id="3" name="直排文字版面配置區 2"/>
           <p:cNvSpPr>
             <a:spLocks noGrp="1"/>
           </p:cNvSpPr>
@@ -846,8 +601,8 @@
         </p:nvSpPr>
         <p:spPr>
           <a:xfrm>
-            <a:off x="457200" y="274638"/>
-            <a:ext cx="6019800" cy="5851525"/>
+            <a:off x="609600" y="274640"/>
+            <a:ext cx="8026400" cy="5851525"/>
           </a:xfrm>
         </p:spPr>
         <p:txBody>
@@ -856,44 +611,44 @@
           <a:p>
             <a:pPr lvl="0"/>
             <a:r>
-              <a:rPr lang="zh-TW" altLang="en-US" smtClean="0"/>
-              <a:t>按一下以編輯母片文字樣式</a:t>
+              <a:rPr lang="en-US" altLang="zh-TW"/>
+              <a:t>Click to edit Master text styles</a:t>
             </a:r>
           </a:p>
           <a:p>
             <a:pPr lvl="1"/>
             <a:r>
-              <a:rPr lang="zh-TW" altLang="en-US" smtClean="0"/>
-              <a:t>第二層</a:t>
+              <a:rPr lang="en-US" altLang="zh-TW"/>
+              <a:t>Second level</a:t>
             </a:r>
           </a:p>
           <a:p>
             <a:pPr lvl="2"/>
             <a:r>
-              <a:rPr lang="zh-TW" altLang="en-US" smtClean="0"/>
-              <a:t>第三層</a:t>
+              <a:rPr lang="en-US" altLang="zh-TW"/>
+              <a:t>Third level</a:t>
             </a:r>
           </a:p>
           <a:p>
             <a:pPr lvl="3"/>
             <a:r>
-              <a:rPr lang="zh-TW" altLang="en-US" smtClean="0"/>
-              <a:t>第四層</a:t>
+              <a:rPr lang="en-US" altLang="zh-TW"/>
+              <a:t>Fourth level</a:t>
             </a:r>
           </a:p>
           <a:p>
             <a:pPr lvl="4"/>
             <a:r>
-              <a:rPr lang="zh-TW" altLang="en-US" smtClean="0"/>
-              <a:t>第五層</a:t>
-            </a:r>
-            <a:endParaRPr lang="en-US"/>
-          </a:p>
-        </p:txBody>
-      </p:sp>
-      <p:sp>
-        <p:nvSpPr>
-          <p:cNvPr id="4" name="Date Placeholder 3"/>
+              <a:rPr lang="en-US" altLang="zh-TW"/>
+              <a:t>Fifth level</a:t>
+            </a:r>
+            <a:endParaRPr lang="zh-TW" altLang="en-US"/>
+          </a:p>
+        </p:txBody>
+      </p:sp>
+      <p:sp>
+        <p:nvSpPr>
+          <p:cNvPr id="4" name="日期版面配置區 3"/>
           <p:cNvSpPr>
             <a:spLocks noGrp="1"/>
           </p:cNvSpPr>
@@ -908,7 +663,7 @@
           <a:p>
             <a:fld id="{4CA65DC9-25DB-4D45-A2C5-A87C7239C765}" type="datetimeFigureOut">
               <a:rPr lang="zh-TW" altLang="en-US" smtClean="0"/>
-              <a:t>2016/1/9</a:t>
+              <a:t>2026/4/24</a:t>
             </a:fld>
             <a:endParaRPr lang="zh-TW" altLang="en-US"/>
           </a:p>
@@ -916,7 +671,7 @@
       </p:sp>
       <p:sp>
         <p:nvSpPr>
-          <p:cNvPr id="5" name="Footer Placeholder 4"/>
+          <p:cNvPr id="5" name="頁尾版面配置區 4"/>
           <p:cNvSpPr>
             <a:spLocks noGrp="1"/>
           </p:cNvSpPr>
@@ -935,7 +690,7 @@
       </p:sp>
       <p:sp>
         <p:nvSpPr>
-          <p:cNvPr id="6" name="Slide Number Placeholder 5"/>
+          <p:cNvPr id="6" name="投影片編號版面配置區 5"/>
           <p:cNvSpPr>
             <a:spLocks noGrp="1"/>
           </p:cNvSpPr>
@@ -957,6 +712,11 @@
         </p:txBody>
       </p:sp>
     </p:spTree>
+    <p:extLst>
+      <p:ext uri="{BB962C8B-B14F-4D97-AF65-F5344CB8AC3E}">
+        <p14:creationId xmlns:p14="http://schemas.microsoft.com/office/powerpoint/2010/main" val="2418672174"/>
+      </p:ext>
+    </p:extLst>
   </p:cSld>
   <p:clrMapOvr>
     <a:masterClrMapping/>
@@ -983,7 +743,7 @@
       </p:grpSpPr>
       <p:sp>
         <p:nvSpPr>
-          <p:cNvPr id="2" name="Title 1"/>
+          <p:cNvPr id="2" name="標題 1"/>
           <p:cNvSpPr>
             <a:spLocks noGrp="1"/>
           </p:cNvSpPr>
@@ -997,16 +757,16 @@
           <a:lstStyle/>
           <a:p>
             <a:r>
-              <a:rPr lang="zh-TW" altLang="en-US" smtClean="0"/>
-              <a:t>按一下以編輯母片標題樣式</a:t>
-            </a:r>
-            <a:endParaRPr lang="en-US" dirty="0"/>
-          </a:p>
-        </p:txBody>
-      </p:sp>
-      <p:sp>
-        <p:nvSpPr>
-          <p:cNvPr id="3" name="Content Placeholder 2"/>
+              <a:rPr lang="en-US" altLang="zh-TW"/>
+              <a:t>Click to edit Master title style</a:t>
+            </a:r>
+            <a:endParaRPr lang="zh-TW" altLang="en-US"/>
+          </a:p>
+        </p:txBody>
+      </p:sp>
+      <p:sp>
+        <p:nvSpPr>
+          <p:cNvPr id="3" name="內容版面配置區 2"/>
           <p:cNvSpPr>
             <a:spLocks noGrp="1"/>
           </p:cNvSpPr>
@@ -1021,44 +781,44 @@
           <a:p>
             <a:pPr lvl="0"/>
             <a:r>
-              <a:rPr lang="zh-TW" altLang="en-US" smtClean="0"/>
-              <a:t>按一下以編輯母片文字樣式</a:t>
+              <a:rPr lang="en-US" altLang="zh-TW"/>
+              <a:t>Click to edit Master text styles</a:t>
             </a:r>
           </a:p>
           <a:p>
             <a:pPr lvl="1"/>
             <a:r>
-              <a:rPr lang="zh-TW" altLang="en-US" smtClean="0"/>
-              <a:t>第二層</a:t>
+              <a:rPr lang="en-US" altLang="zh-TW"/>
+              <a:t>Second level</a:t>
             </a:r>
           </a:p>
           <a:p>
             <a:pPr lvl="2"/>
             <a:r>
-              <a:rPr lang="zh-TW" altLang="en-US" smtClean="0"/>
-              <a:t>第三層</a:t>
+              <a:rPr lang="en-US" altLang="zh-TW"/>
+              <a:t>Third level</a:t>
             </a:r>
           </a:p>
           <a:p>
             <a:pPr lvl="3"/>
             <a:r>
-              <a:rPr lang="zh-TW" altLang="en-US" smtClean="0"/>
-              <a:t>第四層</a:t>
+              <a:rPr lang="en-US" altLang="zh-TW"/>
+              <a:t>Fourth level</a:t>
             </a:r>
           </a:p>
           <a:p>
             <a:pPr lvl="4"/>
             <a:r>
-              <a:rPr lang="zh-TW" altLang="en-US" smtClean="0"/>
-              <a:t>第五層</a:t>
-            </a:r>
-            <a:endParaRPr lang="en-US" dirty="0"/>
-          </a:p>
-        </p:txBody>
-      </p:sp>
-      <p:sp>
-        <p:nvSpPr>
-          <p:cNvPr id="4" name="Date Placeholder 3"/>
+              <a:rPr lang="en-US" altLang="zh-TW"/>
+              <a:t>Fifth level</a:t>
+            </a:r>
+            <a:endParaRPr lang="zh-TW" altLang="en-US"/>
+          </a:p>
+        </p:txBody>
+      </p:sp>
+      <p:sp>
+        <p:nvSpPr>
+          <p:cNvPr id="4" name="日期版面配置區 3"/>
           <p:cNvSpPr>
             <a:spLocks noGrp="1"/>
           </p:cNvSpPr>
@@ -1073,7 +833,7 @@
           <a:p>
             <a:fld id="{4CA65DC9-25DB-4D45-A2C5-A87C7239C765}" type="datetimeFigureOut">
               <a:rPr lang="zh-TW" altLang="en-US" smtClean="0"/>
-              <a:t>2016/1/9</a:t>
+              <a:t>2026/4/24</a:t>
             </a:fld>
             <a:endParaRPr lang="zh-TW" altLang="en-US"/>
           </a:p>
@@ -1081,7 +841,7 @@
       </p:sp>
       <p:sp>
         <p:nvSpPr>
-          <p:cNvPr id="5" name="Footer Placeholder 4"/>
+          <p:cNvPr id="5" name="頁尾版面配置區 4"/>
           <p:cNvSpPr>
             <a:spLocks noGrp="1"/>
           </p:cNvSpPr>
@@ -1100,7 +860,7 @@
       </p:sp>
       <p:sp>
         <p:nvSpPr>
-          <p:cNvPr id="6" name="Slide Number Placeholder 5"/>
+          <p:cNvPr id="6" name="投影片編號版面配置區 5"/>
           <p:cNvSpPr>
             <a:spLocks noGrp="1"/>
           </p:cNvSpPr>
@@ -1122,6 +882,11 @@
         </p:txBody>
       </p:sp>
     </p:spTree>
+    <p:extLst>
+      <p:ext uri="{BB962C8B-B14F-4D97-AF65-F5344CB8AC3E}">
+        <p14:creationId xmlns:p14="http://schemas.microsoft.com/office/powerpoint/2010/main" val="65118292"/>
+      </p:ext>
+    </p:extLst>
   </p:cSld>
   <p:clrMapOvr>
     <a:masterClrMapping/>
@@ -1130,7 +895,7 @@
 </file>
 
 <file path=ppt/slideLayouts/slideLayout3.xml><?xml version="1.0" encoding="utf-8"?>
-<p:sldLayout xmlns:a="http://schemas.openxmlformats.org/drawingml/2006/main" xmlns:r="http://schemas.openxmlformats.org/officeDocument/2006/relationships" xmlns:p="http://schemas.openxmlformats.org/presentationml/2006/main" showMasterSp="0" type="secHead" preserve="1">
+<p:sldLayout xmlns:a="http://schemas.openxmlformats.org/drawingml/2006/main" xmlns:r="http://schemas.openxmlformats.org/officeDocument/2006/relationships" xmlns:p="http://schemas.openxmlformats.org/presentationml/2006/main" type="secHead" preserve="1">
   <p:cSld name="區段標題">
     <p:spTree>
       <p:nvGrpSpPr>
@@ -1148,7 +913,7 @@
       </p:grpSpPr>
       <p:sp>
         <p:nvSpPr>
-          <p:cNvPr id="2" name="Title 1"/>
+          <p:cNvPr id="2" name="標題 1"/>
           <p:cNvSpPr>
             <a:spLocks noGrp="1"/>
           </p:cNvSpPr>
@@ -1158,32 +923,29 @@
         </p:nvSpPr>
         <p:spPr>
           <a:xfrm>
-            <a:off x="722376" y="990600"/>
-            <a:ext cx="7772400" cy="1362456"/>
+            <a:off x="963084" y="4406902"/>
+            <a:ext cx="10363200" cy="1362075"/>
           </a:xfrm>
         </p:spPr>
         <p:txBody>
-          <a:bodyPr>
-            <a:noAutofit/>
-          </a:bodyPr>
+          <a:bodyPr anchor="t"/>
           <a:lstStyle>
             <a:lvl1pPr algn="l">
-              <a:buNone/>
-              <a:defRPr sz="4800" b="1" cap="none" baseline="0"/>
+              <a:defRPr sz="4000" b="1" cap="all"/>
             </a:lvl1pPr>
           </a:lstStyle>
           <a:p>
             <a:r>
-              <a:rPr lang="zh-TW" altLang="en-US" smtClean="0"/>
-              <a:t>按一下以編輯母片標題樣式</a:t>
-            </a:r>
-            <a:endParaRPr lang="en-US" dirty="0"/>
-          </a:p>
-        </p:txBody>
-      </p:sp>
-      <p:sp>
-        <p:nvSpPr>
-          <p:cNvPr id="3" name="Text Placeholder 2"/>
+              <a:rPr lang="en-US" altLang="zh-TW"/>
+              <a:t>Click to edit Master title style</a:t>
+            </a:r>
+            <a:endParaRPr lang="zh-TW" altLang="en-US"/>
+          </a:p>
+        </p:txBody>
+      </p:sp>
+      <p:sp>
+        <p:nvSpPr>
+          <p:cNvPr id="3" name="文字版面配置區 2"/>
           <p:cNvSpPr>
             <a:spLocks noGrp="1"/>
           </p:cNvSpPr>
@@ -1193,52 +955,44 @@
         </p:nvSpPr>
         <p:spPr>
           <a:xfrm>
-            <a:off x="722313" y="2352677"/>
-            <a:ext cx="7772400" cy="1509712"/>
+            <a:off x="963084" y="2906713"/>
+            <a:ext cx="10363200" cy="1500187"/>
           </a:xfrm>
         </p:spPr>
         <p:txBody>
-          <a:bodyPr anchor="t"/>
+          <a:bodyPr anchor="b"/>
           <a:lstStyle>
-            <a:lvl1pPr>
+            <a:lvl1pPr marL="0" indent="0">
               <a:buNone/>
               <a:defRPr sz="2000">
-                <a:solidFill>
-                  <a:schemeClr val="tx1"/>
-                </a:solidFill>
-              </a:defRPr>
-            </a:lvl1pPr>
-            <a:lvl2pPr>
-              <a:buNone/>
-              <a:defRPr sz="1800">
                 <a:solidFill>
                   <a:schemeClr val="tx1">
                     <a:tint val="75000"/>
                   </a:schemeClr>
                 </a:solidFill>
               </a:defRPr>
-            </a:lvl2pPr>
-            <a:lvl3pPr>
-              <a:buNone/>
-              <a:defRPr sz="1600">
+            </a:lvl1pPr>
+            <a:lvl2pPr marL="457200" indent="0">
+              <a:buNone/>
+              <a:defRPr sz="1800">
                 <a:solidFill>
                   <a:schemeClr val="tx1">
                     <a:tint val="75000"/>
                   </a:schemeClr>
                 </a:solidFill>
               </a:defRPr>
-            </a:lvl3pPr>
-            <a:lvl4pPr>
-              <a:buNone/>
-              <a:defRPr sz="1400">
+            </a:lvl2pPr>
+            <a:lvl3pPr marL="914400" indent="0">
+              <a:buNone/>
+              <a:defRPr sz="1600">
                 <a:solidFill>
                   <a:schemeClr val="tx1">
                     <a:tint val="75000"/>
                   </a:schemeClr>
                 </a:solidFill>
               </a:defRPr>
-            </a:lvl4pPr>
-            <a:lvl5pPr>
+            </a:lvl3pPr>
+            <a:lvl4pPr marL="1371600" indent="0">
               <a:buNone/>
               <a:defRPr sz="1400">
                 <a:solidFill>
@@ -1247,20 +1001,70 @@
                   </a:schemeClr>
                 </a:solidFill>
               </a:defRPr>
+            </a:lvl4pPr>
+            <a:lvl5pPr marL="1828800" indent="0">
+              <a:buNone/>
+              <a:defRPr sz="1400">
+                <a:solidFill>
+                  <a:schemeClr val="tx1">
+                    <a:tint val="75000"/>
+                  </a:schemeClr>
+                </a:solidFill>
+              </a:defRPr>
             </a:lvl5pPr>
+            <a:lvl6pPr marL="2286000" indent="0">
+              <a:buNone/>
+              <a:defRPr sz="1400">
+                <a:solidFill>
+                  <a:schemeClr val="tx1">
+                    <a:tint val="75000"/>
+                  </a:schemeClr>
+                </a:solidFill>
+              </a:defRPr>
+            </a:lvl6pPr>
+            <a:lvl7pPr marL="2743200" indent="0">
+              <a:buNone/>
+              <a:defRPr sz="1400">
+                <a:solidFill>
+                  <a:schemeClr val="tx1">
+                    <a:tint val="75000"/>
+                  </a:schemeClr>
+                </a:solidFill>
+              </a:defRPr>
+            </a:lvl7pPr>
+            <a:lvl8pPr marL="3200400" indent="0">
+              <a:buNone/>
+              <a:defRPr sz="1400">
+                <a:solidFill>
+                  <a:schemeClr val="tx1">
+                    <a:tint val="75000"/>
+                  </a:schemeClr>
+                </a:solidFill>
+              </a:defRPr>
+            </a:lvl8pPr>
+            <a:lvl9pPr marL="3657600" indent="0">
+              <a:buNone/>
+              <a:defRPr sz="1400">
+                <a:solidFill>
+                  <a:schemeClr val="tx1">
+                    <a:tint val="75000"/>
+                  </a:schemeClr>
+                </a:solidFill>
+              </a:defRPr>
+            </a:lvl9pPr>
           </a:lstStyle>
           <a:p>
             <a:pPr lvl="0"/>
             <a:r>
-              <a:rPr lang="zh-TW" altLang="en-US" smtClean="0"/>
-              <a:t>按一下以編輯母片文字樣式</a:t>
-            </a:r>
-          </a:p>
-        </p:txBody>
-      </p:sp>
-      <p:sp>
-        <p:nvSpPr>
-          <p:cNvPr id="4" name="Date Placeholder 3"/>
+              <a:rPr lang="en-US" altLang="zh-TW"/>
+              <a:t>Click to edit Master text styles</a:t>
+            </a:r>
+          </a:p>
+        </p:txBody>
+      </p:sp>
+      <p:sp>
+        <p:nvSpPr>
+          <p:cNvPr id="4" name="日期版面配置區 3"/>
           <p:cNvSpPr>
             <a:spLocks noGrp="1"/>
           </p:cNvSpPr>
@@ -1275,7 +1079,7 @@
           <a:p>
             <a:fld id="{4CA65DC9-25DB-4D45-A2C5-A87C7239C765}" type="datetimeFigureOut">
               <a:rPr lang="zh-TW" altLang="en-US" smtClean="0"/>
-              <a:t>2016/1/9</a:t>
+              <a:t>2026/4/24</a:t>
             </a:fld>
             <a:endParaRPr lang="zh-TW" altLang="en-US"/>
           </a:p>
@@ -1283,7 +1087,7 @@
       </p:sp>
       <p:sp>
         <p:nvSpPr>
-          <p:cNvPr id="5" name="Footer Placeholder 4"/>
+          <p:cNvPr id="5" name="頁尾版面配置區 4"/>
           <p:cNvSpPr>
             <a:spLocks noGrp="1"/>
           </p:cNvSpPr>
@@ -1302,7 +1106,7 @@
       </p:sp>
       <p:sp>
         <p:nvSpPr>
-          <p:cNvPr id="6" name="Slide Number Placeholder 5"/>
+          <p:cNvPr id="6" name="投影片編號版面配置區 5"/>
           <p:cNvSpPr>
             <a:spLocks noGrp="1"/>
           </p:cNvSpPr>
@@ -1324,6 +1128,11 @@
         </p:txBody>
       </p:sp>
     </p:spTree>
+    <p:extLst>
+      <p:ext uri="{BB962C8B-B14F-4D97-AF65-F5344CB8AC3E}">
+        <p14:creationId xmlns:p14="http://schemas.microsoft.com/office/powerpoint/2010/main" val="702034290"/>
+      </p:ext>
+    </p:extLst>
   </p:cSld>
   <p:clrMapOvr>
     <a:masterClrMapping/>
@@ -1350,46 +1159,41 @@
       </p:grpSpPr>
       <p:sp>
         <p:nvSpPr>
-          <p:cNvPr id="2" name="Title 1"/>
+          <p:cNvPr id="2" name="標題 1"/>
           <p:cNvSpPr>
             <a:spLocks noGrp="1"/>
           </p:cNvSpPr>
           <p:nvPr>
             <p:ph type="title"/>
+          </p:nvPr>
+        </p:nvSpPr>
+        <p:spPr/>
+        <p:txBody>
+          <a:bodyPr/>
+          <a:lstStyle/>
+          <a:p>
+            <a:r>
+              <a:rPr lang="en-US" altLang="zh-TW"/>
+              <a:t>Click to edit Master title style</a:t>
+            </a:r>
+            <a:endParaRPr lang="zh-TW" altLang="en-US"/>
+          </a:p>
+        </p:txBody>
+      </p:sp>
+      <p:sp>
+        <p:nvSpPr>
+          <p:cNvPr id="3" name="內容版面配置區 2"/>
+          <p:cNvSpPr>
+            <a:spLocks noGrp="1"/>
+          </p:cNvSpPr>
+          <p:nvPr>
+            <p:ph sz="half" idx="1"/>
           </p:nvPr>
         </p:nvSpPr>
         <p:spPr>
           <a:xfrm>
-            <a:off x="457200" y="914400"/>
-            <a:ext cx="8229600" cy="1143000"/>
-          </a:xfrm>
-        </p:spPr>
-        <p:txBody>
-          <a:bodyPr tIns="9144" bIns="9144"/>
-          <a:lstStyle/>
-          <a:p>
-            <a:r>
-              <a:rPr lang="zh-TW" altLang="en-US" smtClean="0"/>
-              <a:t>按一下以編輯母片標題樣式</a:t>
-            </a:r>
-            <a:endParaRPr lang="en-US" dirty="0"/>
-          </a:p>
-        </p:txBody>
-      </p:sp>
-      <p:sp>
-        <p:nvSpPr>
-          <p:cNvPr id="3" name="Content Placeholder 2"/>
-          <p:cNvSpPr>
-            <a:spLocks noGrp="1"/>
-          </p:cNvSpPr>
-          <p:nvPr>
-            <p:ph sz="half" idx="1"/>
-          </p:nvPr>
-        </p:nvSpPr>
-        <p:spPr>
-          <a:xfrm>
-            <a:off x="457200" y="2199800"/>
-            <a:ext cx="4038600" cy="4160520"/>
+            <a:off x="609600" y="1600202"/>
+            <a:ext cx="5384800" cy="4525963"/>
           </a:xfrm>
         </p:spPr>
         <p:txBody>
@@ -1410,48 +1214,60 @@
             <a:lvl5pPr>
               <a:defRPr sz="1800"/>
             </a:lvl5pPr>
+            <a:lvl6pPr>
+              <a:defRPr sz="1800"/>
+            </a:lvl6pPr>
+            <a:lvl7pPr>
+              <a:defRPr sz="1800"/>
+            </a:lvl7pPr>
+            <a:lvl8pPr>
+              <a:defRPr sz="1800"/>
+            </a:lvl8pPr>
+            <a:lvl9pPr>
+              <a:defRPr sz="1800"/>
+            </a:lvl9pPr>
           </a:lstStyle>
           <a:p>
             <a:pPr lvl="0"/>
             <a:r>
-              <a:rPr lang="zh-TW" altLang="en-US" smtClean="0"/>
-              <a:t>按一下以編輯母片文字樣式</a:t>
+              <a:rPr lang="en-US" altLang="zh-TW"/>
+              <a:t>Click to edit Master text styles</a:t>
             </a:r>
           </a:p>
           <a:p>
             <a:pPr lvl="1"/>
             <a:r>
-              <a:rPr lang="zh-TW" altLang="en-US" smtClean="0"/>
-              <a:t>第二層</a:t>
+              <a:rPr lang="en-US" altLang="zh-TW"/>
+              <a:t>Second level</a:t>
             </a:r>
           </a:p>
           <a:p>
             <a:pPr lvl="2"/>
             <a:r>
-              <a:rPr lang="zh-TW" altLang="en-US" smtClean="0"/>
-              <a:t>第三層</a:t>
+              <a:rPr lang="en-US" altLang="zh-TW"/>
+              <a:t>Third level</a:t>
             </a:r>
           </a:p>
           <a:p>
             <a:pPr lvl="3"/>
             <a:r>
-              <a:rPr lang="zh-TW" altLang="en-US" smtClean="0"/>
-              <a:t>第四層</a:t>
+              <a:rPr lang="en-US" altLang="zh-TW"/>
+              <a:t>Fourth level</a:t>
             </a:r>
           </a:p>
           <a:p>
             <a:pPr lvl="4"/>
             <a:r>
-              <a:rPr lang="zh-TW" altLang="en-US" smtClean="0"/>
-              <a:t>第五層</a:t>
-            </a:r>
-            <a:endParaRPr lang="en-US" dirty="0"/>
-          </a:p>
-        </p:txBody>
-      </p:sp>
-      <p:sp>
-        <p:nvSpPr>
-          <p:cNvPr id="4" name="Content Placeholder 3"/>
+              <a:rPr lang="en-US" altLang="zh-TW"/>
+              <a:t>Fifth level</a:t>
+            </a:r>
+            <a:endParaRPr lang="zh-TW" altLang="en-US"/>
+          </a:p>
+        </p:txBody>
+      </p:sp>
+      <p:sp>
+        <p:nvSpPr>
+          <p:cNvPr id="4" name="內容版面配置區 3"/>
           <p:cNvSpPr>
             <a:spLocks noGrp="1"/>
           </p:cNvSpPr>
@@ -1461,8 +1277,8 @@
         </p:nvSpPr>
         <p:spPr>
           <a:xfrm>
-            <a:off x="4648200" y="2199800"/>
-            <a:ext cx="4038600" cy="4160520"/>
+            <a:off x="6197600" y="1600202"/>
+            <a:ext cx="5384800" cy="4525963"/>
           </a:xfrm>
         </p:spPr>
         <p:txBody>
@@ -1483,48 +1299,60 @@
             <a:lvl5pPr>
               <a:defRPr sz="1800"/>
             </a:lvl5pPr>
+            <a:lvl6pPr>
+              <a:defRPr sz="1800"/>
+            </a:lvl6pPr>
+            <a:lvl7pPr>
+              <a:defRPr sz="1800"/>
+            </a:lvl7pPr>
+            <a:lvl8pPr>
+              <a:defRPr sz="1800"/>
+            </a:lvl8pPr>
+            <a:lvl9pPr>
+              <a:defRPr sz="1800"/>
+            </a:lvl9pPr>
           </a:lstStyle>
           <a:p>
             <a:pPr lvl="0"/>
             <a:r>
-              <a:rPr lang="zh-TW" altLang="en-US" smtClean="0"/>
-              <a:t>按一下以編輯母片文字樣式</a:t>
+              <a:rPr lang="en-US" altLang="zh-TW"/>
+              <a:t>Click to edit Master text styles</a:t>
             </a:r>
           </a:p>
           <a:p>
             <a:pPr lvl="1"/>
             <a:r>
-              <a:rPr lang="zh-TW" altLang="en-US" smtClean="0"/>
-              <a:t>第二層</a:t>
+              <a:rPr lang="en-US" altLang="zh-TW"/>
+              <a:t>Second level</a:t>
             </a:r>
           </a:p>
           <a:p>
             <a:pPr lvl="2"/>
             <a:r>
-              <a:rPr lang="zh-TW" altLang="en-US" smtClean="0"/>
-              <a:t>第三層</a:t>
+              <a:rPr lang="en-US" altLang="zh-TW"/>
+              <a:t>Third level</a:t>
             </a:r>
           </a:p>
           <a:p>
             <a:pPr lvl="3"/>
             <a:r>
-              <a:rPr lang="zh-TW" altLang="en-US" smtClean="0"/>
-              <a:t>第四層</a:t>
+              <a:rPr lang="en-US" altLang="zh-TW"/>
+              <a:t>Fourth level</a:t>
             </a:r>
           </a:p>
           <a:p>
             <a:pPr lvl="4"/>
             <a:r>
-              <a:rPr lang="zh-TW" altLang="en-US" smtClean="0"/>
-              <a:t>第五層</a:t>
-            </a:r>
-            <a:endParaRPr lang="en-US" dirty="0"/>
-          </a:p>
-        </p:txBody>
-      </p:sp>
-      <p:sp>
-        <p:nvSpPr>
-          <p:cNvPr id="5" name="Date Placeholder 4"/>
+              <a:rPr lang="en-US" altLang="zh-TW"/>
+              <a:t>Fifth level</a:t>
+            </a:r>
+            <a:endParaRPr lang="zh-TW" altLang="en-US"/>
+          </a:p>
+        </p:txBody>
+      </p:sp>
+      <p:sp>
+        <p:nvSpPr>
+          <p:cNvPr id="5" name="日期版面配置區 4"/>
           <p:cNvSpPr>
             <a:spLocks noGrp="1"/>
           </p:cNvSpPr>
@@ -1539,7 +1367,7 @@
           <a:p>
             <a:fld id="{4CA65DC9-25DB-4D45-A2C5-A87C7239C765}" type="datetimeFigureOut">
               <a:rPr lang="zh-TW" altLang="en-US" smtClean="0"/>
-              <a:t>2016/1/9</a:t>
+              <a:t>2026/4/24</a:t>
             </a:fld>
             <a:endParaRPr lang="zh-TW" altLang="en-US"/>
           </a:p>
@@ -1547,7 +1375,7 @@
       </p:sp>
       <p:sp>
         <p:nvSpPr>
-          <p:cNvPr id="6" name="Footer Placeholder 5"/>
+          <p:cNvPr id="6" name="頁尾版面配置區 5"/>
           <p:cNvSpPr>
             <a:spLocks noGrp="1"/>
           </p:cNvSpPr>
@@ -1566,7 +1394,7 @@
       </p:sp>
       <p:sp>
         <p:nvSpPr>
-          <p:cNvPr id="7" name="Slide Number Placeholder 6"/>
+          <p:cNvPr id="7" name="投影片編號版面配置區 6"/>
           <p:cNvSpPr>
             <a:spLocks noGrp="1"/>
           </p:cNvSpPr>
@@ -1588,6 +1416,11 @@
         </p:txBody>
       </p:sp>
     </p:spTree>
+    <p:extLst>
+      <p:ext uri="{BB962C8B-B14F-4D97-AF65-F5344CB8AC3E}">
+        <p14:creationId xmlns:p14="http://schemas.microsoft.com/office/powerpoint/2010/main" val="2897457706"/>
+      </p:ext>
+    </p:extLst>
   </p:cSld>
   <p:clrMapOvr>
     <a:masterClrMapping/>
@@ -1614,7 +1447,7 @@
       </p:grpSpPr>
       <p:sp>
         <p:nvSpPr>
-          <p:cNvPr id="2" name="Title 1"/>
+          <p:cNvPr id="2" name="標題 1"/>
           <p:cNvSpPr>
             <a:spLocks noGrp="1"/>
           </p:cNvSpPr>
@@ -1622,14 +1455,9 @@
             <p:ph type="title"/>
           </p:nvPr>
         </p:nvSpPr>
-        <p:spPr>
-          <a:xfrm>
-            <a:off x="457200" y="914400"/>
-            <a:ext cx="8229600" cy="1143000"/>
-          </a:xfrm>
-        </p:spPr>
-        <p:txBody>
-          <a:bodyPr tIns="9144" bIns="9144" anchor="b"/>
+        <p:spPr/>
+        <p:txBody>
+          <a:bodyPr/>
           <a:lstStyle>
             <a:lvl1pPr>
               <a:defRPr/>
@@ -1637,16 +1465,16 @@
           </a:lstStyle>
           <a:p>
             <a:r>
-              <a:rPr lang="zh-TW" altLang="en-US" smtClean="0"/>
-              <a:t>按一下以編輯母片標題樣式</a:t>
-            </a:r>
-            <a:endParaRPr lang="en-US" dirty="0"/>
-          </a:p>
-        </p:txBody>
-      </p:sp>
-      <p:sp>
-        <p:nvSpPr>
-          <p:cNvPr id="3" name="Text Placeholder 2"/>
+              <a:rPr lang="en-US" altLang="zh-TW"/>
+              <a:t>Click to edit Master title style</a:t>
+            </a:r>
+            <a:endParaRPr lang="zh-TW" altLang="en-US"/>
+          </a:p>
+        </p:txBody>
+      </p:sp>
+      <p:sp>
+        <p:nvSpPr>
+          <p:cNvPr id="3" name="文字版面配置區 2"/>
           <p:cNvSpPr>
             <a:spLocks noGrp="1"/>
           </p:cNvSpPr>
@@ -1656,137 +1484,80 @@
         </p:nvSpPr>
         <p:spPr>
           <a:xfrm>
-            <a:off x="457200" y="2112168"/>
-            <a:ext cx="4040188" cy="502920"/>
+            <a:off x="609600" y="1535114"/>
+            <a:ext cx="5386917" cy="639763"/>
           </a:xfrm>
         </p:spPr>
         <p:txBody>
-          <a:bodyPr anchor="b">
-            <a:noAutofit/>
-          </a:bodyPr>
+          <a:bodyPr anchor="b"/>
           <a:lstStyle>
-            <a:lvl1pPr>
-              <a:buNone/>
-              <a:defRPr sz="2200" b="1">
-                <a:effectLst>
-                  <a:outerShdw blurRad="38000" dist="38000" dir="2700000" algn="tl" rotWithShape="0">
-                    <a:schemeClr val="bg2">
-                      <a:shade val="45000"/>
-                      <a:satMod val="150000"/>
-                      <a:alpha val="90000"/>
-                    </a:schemeClr>
-                  </a:outerShdw>
-                </a:effectLst>
-              </a:defRPr>
+            <a:lvl1pPr marL="0" indent="0">
+              <a:buNone/>
+              <a:defRPr sz="2400" b="1"/>
             </a:lvl1pPr>
-            <a:lvl2pPr>
+            <a:lvl2pPr marL="457200" indent="0">
               <a:buNone/>
               <a:defRPr sz="2000" b="1"/>
             </a:lvl2pPr>
-            <a:lvl3pPr>
+            <a:lvl3pPr marL="914400" indent="0">
               <a:buNone/>
               <a:defRPr sz="1800" b="1"/>
             </a:lvl3pPr>
-            <a:lvl4pPr>
+            <a:lvl4pPr marL="1371600" indent="0">
               <a:buNone/>
               <a:defRPr sz="1600" b="1"/>
             </a:lvl4pPr>
-            <a:lvl5pPr>
+            <a:lvl5pPr marL="1828800" indent="0">
               <a:buNone/>
               <a:defRPr sz="1600" b="1"/>
             </a:lvl5pPr>
+            <a:lvl6pPr marL="2286000" indent="0">
+              <a:buNone/>
+              <a:defRPr sz="1600" b="1"/>
+            </a:lvl6pPr>
+            <a:lvl7pPr marL="2743200" indent="0">
+              <a:buNone/>
+              <a:defRPr sz="1600" b="1"/>
+            </a:lvl7pPr>
+            <a:lvl8pPr marL="3200400" indent="0">
+              <a:buNone/>
+              <a:defRPr sz="1600" b="1"/>
+            </a:lvl8pPr>
+            <a:lvl9pPr marL="3657600" indent="0">
+              <a:buNone/>
+              <a:defRPr sz="1600" b="1"/>
+            </a:lvl9pPr>
           </a:lstStyle>
           <a:p>
             <a:pPr lvl="0"/>
             <a:r>
-              <a:rPr lang="zh-TW" altLang="en-US" smtClean="0"/>
-              <a:t>按一下以編輯母片文字樣式</a:t>
-            </a:r>
-          </a:p>
-        </p:txBody>
-      </p:sp>
-      <p:sp>
-        <p:nvSpPr>
-          <p:cNvPr id="4" name="Text Placeholder 3"/>
-          <p:cNvSpPr>
-            <a:spLocks noGrp="1"/>
-          </p:cNvSpPr>
-          <p:nvPr>
-            <p:ph type="body" sz="half" idx="3"/>
+              <a:rPr lang="en-US" altLang="zh-TW"/>
+              <a:t>Click to edit Master text styles</a:t>
+            </a:r>
+          </a:p>
+        </p:txBody>
+      </p:sp>
+      <p:sp>
+        <p:nvSpPr>
+          <p:cNvPr id="4" name="內容版面配置區 3"/>
+          <p:cNvSpPr>
+            <a:spLocks noGrp="1"/>
+          </p:cNvSpPr>
+          <p:nvPr>
+            <p:ph sz="half" idx="2"/>
           </p:nvPr>
         </p:nvSpPr>
         <p:spPr>
           <a:xfrm>
-            <a:off x="4645025" y="2112168"/>
-            <a:ext cx="4041775" cy="502920"/>
-          </a:xfrm>
-        </p:spPr>
-        <p:txBody>
-          <a:bodyPr anchor="b">
-            <a:noAutofit/>
-          </a:bodyPr>
-          <a:lstStyle>
-            <a:lvl1pPr>
-              <a:buNone/>
-              <a:defRPr sz="2200" b="1">
-                <a:effectLst>
-                  <a:outerShdw blurRad="30000" dist="30000" dir="2700000" algn="tl" rotWithShape="0">
-                    <a:schemeClr val="bg2">
-                      <a:shade val="45000"/>
-                      <a:satMod val="150000"/>
-                      <a:alpha val="90000"/>
-                    </a:schemeClr>
-                  </a:outerShdw>
-                </a:effectLst>
-              </a:defRPr>
-            </a:lvl1pPr>
-            <a:lvl2pPr>
-              <a:buNone/>
-              <a:defRPr sz="2000" b="1"/>
-            </a:lvl2pPr>
-            <a:lvl3pPr>
-              <a:buNone/>
-              <a:defRPr sz="1800" b="1"/>
-            </a:lvl3pPr>
-            <a:lvl4pPr>
-              <a:buNone/>
-              <a:defRPr sz="1600" b="1"/>
-            </a:lvl4pPr>
-            <a:lvl5pPr>
-              <a:buNone/>
-              <a:defRPr sz="1600" b="1"/>
-            </a:lvl5pPr>
-          </a:lstStyle>
-          <a:p>
-            <a:pPr lvl="0"/>
-            <a:r>
-              <a:rPr lang="zh-TW" altLang="en-US" smtClean="0"/>
-              <a:t>按一下以編輯母片文字樣式</a:t>
-            </a:r>
-          </a:p>
-        </p:txBody>
-      </p:sp>
-      <p:sp>
-        <p:nvSpPr>
-          <p:cNvPr id="5" name="Content Placeholder 4"/>
-          <p:cNvSpPr>
-            <a:spLocks noGrp="1"/>
-          </p:cNvSpPr>
-          <p:nvPr>
-            <p:ph sz="quarter" idx="2"/>
-          </p:nvPr>
-        </p:nvSpPr>
-        <p:spPr>
-          <a:xfrm>
-            <a:off x="457200" y="2667000"/>
-            <a:ext cx="4040188" cy="3657600"/>
+            <a:off x="609600" y="2174875"/>
+            <a:ext cx="5386917" cy="3951288"/>
           </a:xfrm>
         </p:spPr>
         <p:txBody>
           <a:bodyPr/>
           <a:lstStyle>
             <a:lvl1pPr>
-              <a:defRPr sz="2200"/>
+              <a:defRPr sz="2400"/>
             </a:lvl1pPr>
             <a:lvl2pPr>
               <a:defRPr sz="2000"/>
@@ -1800,66 +1571,143 @@
             <a:lvl5pPr>
               <a:defRPr sz="1600"/>
             </a:lvl5pPr>
+            <a:lvl6pPr>
+              <a:defRPr sz="1600"/>
+            </a:lvl6pPr>
+            <a:lvl7pPr>
+              <a:defRPr sz="1600"/>
+            </a:lvl7pPr>
+            <a:lvl8pPr>
+              <a:defRPr sz="1600"/>
+            </a:lvl8pPr>
+            <a:lvl9pPr>
+              <a:defRPr sz="1600"/>
+            </a:lvl9pPr>
           </a:lstStyle>
           <a:p>
             <a:pPr lvl="0"/>
             <a:r>
-              <a:rPr lang="zh-TW" altLang="en-US" smtClean="0"/>
-              <a:t>按一下以編輯母片文字樣式</a:t>
+              <a:rPr lang="en-US" altLang="zh-TW"/>
+              <a:t>Click to edit Master text styles</a:t>
             </a:r>
           </a:p>
           <a:p>
             <a:pPr lvl="1"/>
             <a:r>
-              <a:rPr lang="zh-TW" altLang="en-US" smtClean="0"/>
-              <a:t>第二層</a:t>
+              <a:rPr lang="en-US" altLang="zh-TW"/>
+              <a:t>Second level</a:t>
             </a:r>
           </a:p>
           <a:p>
             <a:pPr lvl="2"/>
             <a:r>
-              <a:rPr lang="zh-TW" altLang="en-US" smtClean="0"/>
-              <a:t>第三層</a:t>
+              <a:rPr lang="en-US" altLang="zh-TW"/>
+              <a:t>Third level</a:t>
             </a:r>
           </a:p>
           <a:p>
             <a:pPr lvl="3"/>
             <a:r>
-              <a:rPr lang="zh-TW" altLang="en-US" smtClean="0"/>
-              <a:t>第四層</a:t>
+              <a:rPr lang="en-US" altLang="zh-TW"/>
+              <a:t>Fourth level</a:t>
             </a:r>
           </a:p>
           <a:p>
             <a:pPr lvl="4"/>
             <a:r>
-              <a:rPr lang="zh-TW" altLang="en-US" smtClean="0"/>
-              <a:t>第五層</a:t>
-            </a:r>
-            <a:endParaRPr lang="en-US" dirty="0"/>
-          </a:p>
-        </p:txBody>
-      </p:sp>
-      <p:sp>
-        <p:nvSpPr>
-          <p:cNvPr id="6" name="Content Placeholder 5"/>
-          <p:cNvSpPr>
-            <a:spLocks noGrp="1"/>
-          </p:cNvSpPr>
-          <p:nvPr>
-            <p:ph sz="quarter" idx="4"/>
+              <a:rPr lang="en-US" altLang="zh-TW"/>
+              <a:t>Fifth level</a:t>
+            </a:r>
+            <a:endParaRPr lang="zh-TW" altLang="en-US"/>
+          </a:p>
+        </p:txBody>
+      </p:sp>
+      <p:sp>
+        <p:nvSpPr>
+          <p:cNvPr id="5" name="文字版面配置區 4"/>
+          <p:cNvSpPr>
+            <a:spLocks noGrp="1"/>
+          </p:cNvSpPr>
+          <p:nvPr>
+            <p:ph type="body" sz="quarter" idx="3"/>
           </p:nvPr>
         </p:nvSpPr>
         <p:spPr>
           <a:xfrm>
-            <a:off x="4645025" y="2667000"/>
-            <a:ext cx="4041775" cy="3657600"/>
+            <a:off x="6193373" y="1535114"/>
+            <a:ext cx="5389033" cy="639763"/>
+          </a:xfrm>
+        </p:spPr>
+        <p:txBody>
+          <a:bodyPr anchor="b"/>
+          <a:lstStyle>
+            <a:lvl1pPr marL="0" indent="0">
+              <a:buNone/>
+              <a:defRPr sz="2400" b="1"/>
+            </a:lvl1pPr>
+            <a:lvl2pPr marL="457200" indent="0">
+              <a:buNone/>
+              <a:defRPr sz="2000" b="1"/>
+            </a:lvl2pPr>
+            <a:lvl3pPr marL="914400" indent="0">
+              <a:buNone/>
+              <a:defRPr sz="1800" b="1"/>
+            </a:lvl3pPr>
+            <a:lvl4pPr marL="1371600" indent="0">
+              <a:buNone/>
+              <a:defRPr sz="1600" b="1"/>
+            </a:lvl4pPr>
+            <a:lvl5pPr marL="1828800" indent="0">
+              <a:buNone/>
+              <a:defRPr sz="1600" b="1"/>
+            </a:lvl5pPr>
+            <a:lvl6pPr marL="2286000" indent="0">
+              <a:buNone/>
+              <a:defRPr sz="1600" b="1"/>
+            </a:lvl6pPr>
+            <a:lvl7pPr marL="2743200" indent="0">
+              <a:buNone/>
+              <a:defRPr sz="1600" b="1"/>
+            </a:lvl7pPr>
+            <a:lvl8pPr marL="3200400" indent="0">
+              <a:buNone/>
+              <a:defRPr sz="1600" b="1"/>
+            </a:lvl8pPr>
+            <a:lvl9pPr marL="3657600" indent="0">
+              <a:buNone/>
+              <a:defRPr sz="1600" b="1"/>
+            </a:lvl9pPr>
+          </a:lstStyle>
+          <a:p>
+            <a:pPr lvl="0"/>
+            <a:r>
+              <a:rPr lang="en-US" altLang="zh-TW"/>
+              <a:t>Click to edit Master text styles</a:t>
+            </a:r>
+          </a:p>
+        </p:txBody>
+      </p:sp>
+      <p:sp>
+        <p:nvSpPr>
+          <p:cNvPr id="6" name="內容版面配置區 5"/>
+          <p:cNvSpPr>
+            <a:spLocks noGrp="1"/>
+          </p:cNvSpPr>
+          <p:nvPr>
+            <p:ph sz="quarter" idx="4"/>
+          </p:nvPr>
+        </p:nvSpPr>
+        <p:spPr>
+          <a:xfrm>
+            <a:off x="6193373" y="2174875"/>
+            <a:ext cx="5389033" cy="3951288"/>
           </a:xfrm>
         </p:spPr>
         <p:txBody>
           <a:bodyPr/>
           <a:lstStyle>
             <a:lvl1pPr>
-              <a:defRPr sz="2200"/>
+              <a:defRPr sz="2400"/>
             </a:lvl1pPr>
             <a:lvl2pPr>
               <a:defRPr sz="2000"/>
@@ -1873,48 +1721,60 @@
             <a:lvl5pPr>
               <a:defRPr sz="1600"/>
             </a:lvl5pPr>
+            <a:lvl6pPr>
+              <a:defRPr sz="1600"/>
+            </a:lvl6pPr>
+            <a:lvl7pPr>
+              <a:defRPr sz="1600"/>
+            </a:lvl7pPr>
+            <a:lvl8pPr>
+              <a:defRPr sz="1600"/>
+            </a:lvl8pPr>
+            <a:lvl9pPr>
+              <a:defRPr sz="1600"/>
+            </a:lvl9pPr>
           </a:lstStyle>
           <a:p>
             <a:pPr lvl="0"/>
             <a:r>
-              <a:rPr lang="zh-TW" altLang="en-US" smtClean="0"/>
-              <a:t>按一下以編輯母片文字樣式</a:t>
+              <a:rPr lang="en-US" altLang="zh-TW"/>
+              <a:t>Click to edit Master text styles</a:t>
             </a:r>
           </a:p>
           <a:p>
             <a:pPr lvl="1"/>
             <a:r>
-              <a:rPr lang="zh-TW" altLang="en-US" smtClean="0"/>
-              <a:t>第二層</a:t>
+              <a:rPr lang="en-US" altLang="zh-TW"/>
+              <a:t>Second level</a:t>
             </a:r>
           </a:p>
           <a:p>
             <a:pPr lvl="2"/>
             <a:r>
-              <a:rPr lang="zh-TW" altLang="en-US" smtClean="0"/>
-              <a:t>第三層</a:t>
+              <a:rPr lang="en-US" altLang="zh-TW"/>
+              <a:t>Third level</a:t>
             </a:r>
           </a:p>
           <a:p>
             <a:pPr lvl="3"/>
             <a:r>
-              <a:rPr lang="zh-TW" altLang="en-US" smtClean="0"/>
-              <a:t>第四層</a:t>
+              <a:rPr lang="en-US" altLang="zh-TW"/>
+              <a:t>Fourth level</a:t>
             </a:r>
           </a:p>
           <a:p>
             <a:pPr lvl="4"/>
             <a:r>
-              <a:rPr lang="zh-TW" altLang="en-US" smtClean="0"/>
-              <a:t>第五層</a:t>
-            </a:r>
-            <a:endParaRPr lang="en-US" dirty="0"/>
-          </a:p>
-        </p:txBody>
-      </p:sp>
-      <p:sp>
-        <p:nvSpPr>
-          <p:cNvPr id="7" name="Date Placeholder 6"/>
+              <a:rPr lang="en-US" altLang="zh-TW"/>
+              <a:t>Fifth level</a:t>
+            </a:r>
+            <a:endParaRPr lang="zh-TW" altLang="en-US"/>
+          </a:p>
+        </p:txBody>
+      </p:sp>
+      <p:sp>
+        <p:nvSpPr>
+          <p:cNvPr id="7" name="日期版面配置區 6"/>
           <p:cNvSpPr>
             <a:spLocks noGrp="1"/>
           </p:cNvSpPr>
@@ -1929,7 +1789,7 @@
           <a:p>
             <a:fld id="{4CA65DC9-25DB-4D45-A2C5-A87C7239C765}" type="datetimeFigureOut">
               <a:rPr lang="zh-TW" altLang="en-US" smtClean="0"/>
-              <a:t>2016/1/9</a:t>
+              <a:t>2026/4/24</a:t>
             </a:fld>
             <a:endParaRPr lang="zh-TW" altLang="en-US"/>
           </a:p>
@@ -1937,7 +1797,7 @@
       </p:sp>
       <p:sp>
         <p:nvSpPr>
-          <p:cNvPr id="8" name="Footer Placeholder 7"/>
+          <p:cNvPr id="8" name="頁尾版面配置區 7"/>
           <p:cNvSpPr>
             <a:spLocks noGrp="1"/>
           </p:cNvSpPr>
@@ -1956,7 +1816,7 @@
       </p:sp>
       <p:sp>
         <p:nvSpPr>
-          <p:cNvPr id="9" name="Slide Number Placeholder 8"/>
+          <p:cNvPr id="9" name="投影片編號版面配置區 8"/>
           <p:cNvSpPr>
             <a:spLocks noGrp="1"/>
           </p:cNvSpPr>
@@ -1978,6 +1838,11 @@
         </p:txBody>
       </p:sp>
     </p:spTree>
+    <p:extLst>
+      <p:ext uri="{BB962C8B-B14F-4D97-AF65-F5344CB8AC3E}">
+        <p14:creationId xmlns:p14="http://schemas.microsoft.com/office/powerpoint/2010/main" val="2283136502"/>
+      </p:ext>
+    </p:extLst>
   </p:cSld>
   <p:clrMapOvr>
     <a:masterClrMapping/>
@@ -2004,7 +1869,7 @@
       </p:grpSpPr>
       <p:sp>
         <p:nvSpPr>
-          <p:cNvPr id="2" name="Title 1"/>
+          <p:cNvPr id="2" name="標題 1"/>
           <p:cNvSpPr>
             <a:spLocks noGrp="1"/>
           </p:cNvSpPr>
@@ -2012,42 +1877,22 @@
             <p:ph type="title"/>
           </p:nvPr>
         </p:nvSpPr>
-        <p:spPr>
-          <a:xfrm>
-            <a:off x="457200" y="914400"/>
-            <a:ext cx="8229600" cy="1143000"/>
-          </a:xfrm>
-          <a:effectLst/>
-        </p:spPr>
-        <p:txBody>
-          <a:bodyPr tIns="9144" bIns="9144" anchor="b"/>
-          <a:lstStyle>
-            <a:lvl1pPr>
-              <a:defRPr sz="4800" cap="none" baseline="0">
-                <a:effectLst>
-                  <a:outerShdw blurRad="30000" dist="30000" dir="2700000" algn="tl" rotWithShape="0">
-                    <a:schemeClr val="bg2">
-                      <a:shade val="45000"/>
-                      <a:satMod val="150000"/>
-                      <a:alpha val="90000"/>
-                    </a:schemeClr>
-                  </a:outerShdw>
-                </a:effectLst>
-              </a:defRPr>
-            </a:lvl1pPr>
-          </a:lstStyle>
-          <a:p>
-            <a:r>
-              <a:rPr lang="zh-TW" altLang="en-US" smtClean="0"/>
-              <a:t>按一下以編輯母片標題樣式</a:t>
-            </a:r>
-            <a:endParaRPr lang="en-US" dirty="0"/>
-          </a:p>
-        </p:txBody>
-      </p:sp>
-      <p:sp>
-        <p:nvSpPr>
-          <p:cNvPr id="3" name="Date Placeholder 2"/>
+        <p:spPr/>
+        <p:txBody>
+          <a:bodyPr/>
+          <a:lstStyle/>
+          <a:p>
+            <a:r>
+              <a:rPr lang="en-US" altLang="zh-TW"/>
+              <a:t>Click to edit Master title style</a:t>
+            </a:r>
+            <a:endParaRPr lang="zh-TW" altLang="en-US"/>
+          </a:p>
+        </p:txBody>
+      </p:sp>
+      <p:sp>
+        <p:nvSpPr>
+          <p:cNvPr id="3" name="日期版面配置區 2"/>
           <p:cNvSpPr>
             <a:spLocks noGrp="1"/>
           </p:cNvSpPr>
@@ -2062,7 +1907,7 @@
           <a:p>
             <a:fld id="{4CA65DC9-25DB-4D45-A2C5-A87C7239C765}" type="datetimeFigureOut">
               <a:rPr lang="zh-TW" altLang="en-US" smtClean="0"/>
-              <a:t>2016/1/9</a:t>
+              <a:t>2026/4/24</a:t>
             </a:fld>
             <a:endParaRPr lang="zh-TW" altLang="en-US"/>
           </a:p>
@@ -2070,7 +1915,7 @@
       </p:sp>
       <p:sp>
         <p:nvSpPr>
-          <p:cNvPr id="4" name="Footer Placeholder 3"/>
+          <p:cNvPr id="4" name="頁尾版面配置區 3"/>
           <p:cNvSpPr>
             <a:spLocks noGrp="1"/>
           </p:cNvSpPr>
@@ -2089,7 +1934,7 @@
       </p:sp>
       <p:sp>
         <p:nvSpPr>
-          <p:cNvPr id="5" name="Slide Number Placeholder 4"/>
+          <p:cNvPr id="5" name="投影片編號版面配置區 4"/>
           <p:cNvSpPr>
             <a:spLocks noGrp="1"/>
           </p:cNvSpPr>
@@ -2111,6 +1956,11 @@
         </p:txBody>
       </p:sp>
     </p:spTree>
+    <p:extLst>
+      <p:ext uri="{BB962C8B-B14F-4D97-AF65-F5344CB8AC3E}">
+        <p14:creationId xmlns:p14="http://schemas.microsoft.com/office/powerpoint/2010/main" val="3224467870"/>
+      </p:ext>
+    </p:extLst>
   </p:cSld>
   <p:clrMapOvr>
     <a:masterClrMapping/>
@@ -2137,7 +1987,7 @@
       </p:grpSpPr>
       <p:sp>
         <p:nvSpPr>
-          <p:cNvPr id="2" name="Date Placeholder 1"/>
+          <p:cNvPr id="2" name="日期版面配置區 1"/>
           <p:cNvSpPr>
             <a:spLocks noGrp="1"/>
           </p:cNvSpPr>
@@ -2152,7 +2002,7 @@
           <a:p>
             <a:fld id="{4CA65DC9-25DB-4D45-A2C5-A87C7239C765}" type="datetimeFigureOut">
               <a:rPr lang="zh-TW" altLang="en-US" smtClean="0"/>
-              <a:t>2016/1/9</a:t>
+              <a:t>2026/4/24</a:t>
             </a:fld>
             <a:endParaRPr lang="zh-TW" altLang="en-US"/>
           </a:p>
@@ -2160,7 +2010,7 @@
       </p:sp>
       <p:sp>
         <p:nvSpPr>
-          <p:cNvPr id="3" name="Footer Placeholder 2"/>
+          <p:cNvPr id="3" name="頁尾版面配置區 2"/>
           <p:cNvSpPr>
             <a:spLocks noGrp="1"/>
           </p:cNvSpPr>
@@ -2179,7 +2029,7 @@
       </p:sp>
       <p:sp>
         <p:nvSpPr>
-          <p:cNvPr id="4" name="Slide Number Placeholder 3"/>
+          <p:cNvPr id="4" name="投影片編號版面配置區 3"/>
           <p:cNvSpPr>
             <a:spLocks noGrp="1"/>
           </p:cNvSpPr>
@@ -2201,6 +2051,11 @@
         </p:txBody>
       </p:sp>
     </p:spTree>
+    <p:extLst>
+      <p:ext uri="{BB962C8B-B14F-4D97-AF65-F5344CB8AC3E}">
+        <p14:creationId xmlns:p14="http://schemas.microsoft.com/office/powerpoint/2010/main" val="2300163127"/>
+      </p:ext>
+    </p:extLst>
   </p:cSld>
   <p:clrMapOvr>
     <a:masterClrMapping/>
@@ -2209,7 +2064,7 @@
 </file>
 
 <file path=ppt/slideLayouts/slideLayout8.xml><?xml version="1.0" encoding="utf-8"?>
-<p:sldLayout xmlns:a="http://schemas.openxmlformats.org/drawingml/2006/main" xmlns:r="http://schemas.openxmlformats.org/officeDocument/2006/relationships" xmlns:p="http://schemas.openxmlformats.org/presentationml/2006/main" showMasterSp="0" type="objTx" preserve="1">
+<p:sldLayout xmlns:a="http://schemas.openxmlformats.org/drawingml/2006/main" xmlns:r="http://schemas.openxmlformats.org/officeDocument/2006/relationships" xmlns:p="http://schemas.openxmlformats.org/presentationml/2006/main" type="objTx" preserve="1">
   <p:cSld name="含標題的內容">
     <p:spTree>
       <p:nvGrpSpPr>
@@ -2227,7 +2082,7 @@
       </p:grpSpPr>
       <p:sp>
         <p:nvSpPr>
-          <p:cNvPr id="2" name="Title 1"/>
+          <p:cNvPr id="2" name="標題 1"/>
           <p:cNvSpPr>
             <a:spLocks noGrp="1"/>
           </p:cNvSpPr>
@@ -2237,155 +2092,179 @@
         </p:nvSpPr>
         <p:spPr>
           <a:xfrm>
-            <a:off x="457200" y="71440"/>
-            <a:ext cx="8229600" cy="914400"/>
+            <a:off x="609605" y="273050"/>
+            <a:ext cx="4011084" cy="1162051"/>
           </a:xfrm>
         </p:spPr>
         <p:txBody>
-          <a:bodyPr tIns="0" bIns="0" anchor="b"/>
+          <a:bodyPr anchor="b"/>
           <a:lstStyle>
             <a:lvl1pPr algn="l">
-              <a:buNone/>
-              <a:defRPr sz="5000" b="1"/>
+              <a:defRPr sz="2000" b="1"/>
             </a:lvl1pPr>
           </a:lstStyle>
           <a:p>
             <a:r>
-              <a:rPr lang="zh-TW" altLang="en-US" smtClean="0"/>
-              <a:t>按一下以編輯母片標題樣式</a:t>
-            </a:r>
-            <a:endParaRPr lang="en-US" dirty="0"/>
-          </a:p>
-        </p:txBody>
-      </p:sp>
-      <p:sp>
-        <p:nvSpPr>
-          <p:cNvPr id="3" name="Text Placeholder 2"/>
-          <p:cNvSpPr>
-            <a:spLocks noGrp="1"/>
-          </p:cNvSpPr>
-          <p:nvPr>
-            <p:ph type="body" idx="2"/>
+              <a:rPr lang="en-US" altLang="zh-TW"/>
+              <a:t>Click to edit Master title style</a:t>
+            </a:r>
+            <a:endParaRPr lang="zh-TW" altLang="en-US"/>
+          </a:p>
+        </p:txBody>
+      </p:sp>
+      <p:sp>
+        <p:nvSpPr>
+          <p:cNvPr id="3" name="內容版面配置區 2"/>
+          <p:cNvSpPr>
+            <a:spLocks noGrp="1"/>
+          </p:cNvSpPr>
+          <p:nvPr>
+            <p:ph idx="1"/>
           </p:nvPr>
         </p:nvSpPr>
         <p:spPr>
           <a:xfrm>
-            <a:off x="457200" y="1133856"/>
-            <a:ext cx="2590800" cy="5181600"/>
+            <a:off x="4766733" y="273054"/>
+            <a:ext cx="6815667" cy="5853113"/>
           </a:xfrm>
         </p:spPr>
         <p:txBody>
-          <a:bodyPr lIns="45720" tIns="45720" rIns="0"/>
+          <a:bodyPr/>
+          <a:lstStyle>
+            <a:lvl1pPr>
+              <a:defRPr sz="3200"/>
+            </a:lvl1pPr>
+            <a:lvl2pPr>
+              <a:defRPr sz="2800"/>
+            </a:lvl2pPr>
+            <a:lvl3pPr>
+              <a:defRPr sz="2400"/>
+            </a:lvl3pPr>
+            <a:lvl4pPr>
+              <a:defRPr sz="2000"/>
+            </a:lvl4pPr>
+            <a:lvl5pPr>
+              <a:defRPr sz="2000"/>
+            </a:lvl5pPr>
+            <a:lvl6pPr>
+              <a:defRPr sz="2000"/>
+            </a:lvl6pPr>
+            <a:lvl7pPr>
+              <a:defRPr sz="2000"/>
+            </a:lvl7pPr>
+            <a:lvl8pPr>
+              <a:defRPr sz="2000"/>
+            </a:lvl8pPr>
+            <a:lvl9pPr>
+              <a:defRPr sz="2000"/>
+            </a:lvl9pPr>
+          </a:lstStyle>
+          <a:p>
+            <a:pPr lvl="0"/>
+            <a:r>
+              <a:rPr lang="en-US" altLang="zh-TW"/>
+              <a:t>Click to edit Master text styles</a:t>
+            </a:r>
+          </a:p>
+          <a:p>
+            <a:pPr lvl="1"/>
+            <a:r>
+              <a:rPr lang="en-US" altLang="zh-TW"/>
+              <a:t>Second level</a:t>
+            </a:r>
+          </a:p>
+          <a:p>
+            <a:pPr lvl="2"/>
+            <a:r>
+              <a:rPr lang="en-US" altLang="zh-TW"/>
+              <a:t>Third level</a:t>
+            </a:r>
+          </a:p>
+          <a:p>
+            <a:pPr lvl="3"/>
+            <a:r>
+              <a:rPr lang="en-US" altLang="zh-TW"/>
+              <a:t>Fourth level</a:t>
+            </a:r>
+          </a:p>
+          <a:p>
+            <a:pPr lvl="4"/>
+            <a:r>
+              <a:rPr lang="en-US" altLang="zh-TW"/>
+              <a:t>Fifth level</a:t>
+            </a:r>
+            <a:endParaRPr lang="zh-TW" altLang="en-US"/>
+          </a:p>
+        </p:txBody>
+      </p:sp>
+      <p:sp>
+        <p:nvSpPr>
+          <p:cNvPr id="4" name="文字版面配置區 3"/>
+          <p:cNvSpPr>
+            <a:spLocks noGrp="1"/>
+          </p:cNvSpPr>
+          <p:nvPr>
+            <p:ph type="body" sz="half" idx="2"/>
+          </p:nvPr>
+        </p:nvSpPr>
+        <p:spPr>
+          <a:xfrm>
+            <a:off x="609605" y="1435103"/>
+            <a:ext cx="4011084" cy="4691063"/>
+          </a:xfrm>
+        </p:spPr>
+        <p:txBody>
+          <a:bodyPr/>
           <a:lstStyle>
             <a:lvl1pPr marL="0" indent="0">
-              <a:spcBef>
-                <a:spcPts val="300"/>
-              </a:spcBef>
-              <a:buNone/>
-              <a:defRPr sz="1800"/>
+              <a:buNone/>
+              <a:defRPr sz="1400"/>
             </a:lvl1pPr>
-            <a:lvl2pPr>
+            <a:lvl2pPr marL="457200" indent="0">
               <a:buNone/>
               <a:defRPr sz="1200"/>
             </a:lvl2pPr>
-            <a:lvl3pPr>
+            <a:lvl3pPr marL="914400" indent="0">
               <a:buNone/>
               <a:defRPr sz="1000"/>
             </a:lvl3pPr>
-            <a:lvl4pPr>
+            <a:lvl4pPr marL="1371600" indent="0">
               <a:buNone/>
               <a:defRPr sz="900"/>
             </a:lvl4pPr>
-            <a:lvl5pPr>
+            <a:lvl5pPr marL="1828800" indent="0">
               <a:buNone/>
               <a:defRPr sz="900"/>
             </a:lvl5pPr>
+            <a:lvl6pPr marL="2286000" indent="0">
+              <a:buNone/>
+              <a:defRPr sz="900"/>
+            </a:lvl6pPr>
+            <a:lvl7pPr marL="2743200" indent="0">
+              <a:buNone/>
+              <a:defRPr sz="900"/>
+            </a:lvl7pPr>
+            <a:lvl8pPr marL="3200400" indent="0">
+              <a:buNone/>
+              <a:defRPr sz="900"/>
+            </a:lvl8pPr>
+            <a:lvl9pPr marL="3657600" indent="0">
+              <a:buNone/>
+              <a:defRPr sz="900"/>
+            </a:lvl9pPr>
           </a:lstStyle>
           <a:p>
             <a:pPr lvl="0"/>
             <a:r>
-              <a:rPr lang="zh-TW" altLang="en-US" smtClean="0"/>
-              <a:t>按一下以編輯母片文字樣式</a:t>
-            </a:r>
-          </a:p>
-        </p:txBody>
-      </p:sp>
-      <p:sp>
-        <p:nvSpPr>
-          <p:cNvPr id="4" name="Content Placeholder 3"/>
-          <p:cNvSpPr>
-            <a:spLocks noGrp="1"/>
-          </p:cNvSpPr>
-          <p:nvPr>
-            <p:ph sz="half" idx="1"/>
-          </p:nvPr>
-        </p:nvSpPr>
-        <p:spPr>
-          <a:xfrm>
-            <a:off x="3429000" y="1133472"/>
-            <a:ext cx="5257800" cy="5191128"/>
-          </a:xfrm>
-        </p:spPr>
-        <p:txBody>
-          <a:bodyPr/>
-          <a:lstStyle>
-            <a:lvl1pPr algn="l">
-              <a:defRPr sz="3000"/>
-            </a:lvl1pPr>
-            <a:lvl2pPr algn="l">
-              <a:defRPr sz="2800"/>
-            </a:lvl2pPr>
-            <a:lvl3pPr algn="l">
-              <a:defRPr sz="2400"/>
-            </a:lvl3pPr>
-            <a:lvl4pPr algn="l">
-              <a:defRPr sz="2000"/>
-            </a:lvl4pPr>
-            <a:lvl5pPr algn="l">
-              <a:defRPr sz="2000"/>
-            </a:lvl5pPr>
-          </a:lstStyle>
-          <a:p>
-            <a:pPr lvl="0"/>
-            <a:r>
-              <a:rPr lang="zh-TW" altLang="en-US" smtClean="0"/>
-              <a:t>按一下以編輯母片文字樣式</a:t>
-            </a:r>
-          </a:p>
-          <a:p>
-            <a:pPr lvl="1"/>
-            <a:r>
-              <a:rPr lang="zh-TW" altLang="en-US" smtClean="0"/>
-              <a:t>第二層</a:t>
-            </a:r>
-          </a:p>
-          <a:p>
-            <a:pPr lvl="2"/>
-            <a:r>
-              <a:rPr lang="zh-TW" altLang="en-US" smtClean="0"/>
-              <a:t>第三層</a:t>
-            </a:r>
-          </a:p>
-          <a:p>
-            <a:pPr lvl="3"/>
-            <a:r>
-              <a:rPr lang="zh-TW" altLang="en-US" smtClean="0"/>
-              <a:t>第四層</a:t>
-            </a:r>
-          </a:p>
-          <a:p>
-            <a:pPr lvl="4"/>
-            <a:r>
-              <a:rPr lang="zh-TW" altLang="en-US" smtClean="0"/>
-              <a:t>第五層</a:t>
-            </a:r>
-            <a:endParaRPr lang="en-US" dirty="0"/>
-          </a:p>
-        </p:txBody>
-      </p:sp>
-      <p:sp>
-        <p:nvSpPr>
-          <p:cNvPr id="5" name="Date Placeholder 4"/>
+              <a:rPr lang="en-US" altLang="zh-TW"/>
+              <a:t>Click to edit Master text styles</a:t>
+            </a:r>
+          </a:p>
+        </p:txBody>
+      </p:sp>
+      <p:sp>
+        <p:nvSpPr>
+          <p:cNvPr id="5" name="日期版面配置區 4"/>
           <p:cNvSpPr>
             <a:spLocks noGrp="1"/>
           </p:cNvSpPr>
@@ -2400,7 +2279,7 @@
           <a:p>
             <a:fld id="{4CA65DC9-25DB-4D45-A2C5-A87C7239C765}" type="datetimeFigureOut">
               <a:rPr lang="zh-TW" altLang="en-US" smtClean="0"/>
-              <a:t>2016/1/9</a:t>
+              <a:t>2026/4/24</a:t>
             </a:fld>
             <a:endParaRPr lang="zh-TW" altLang="en-US"/>
           </a:p>
@@ -2408,7 +2287,7 @@
       </p:sp>
       <p:sp>
         <p:nvSpPr>
-          <p:cNvPr id="6" name="Footer Placeholder 5"/>
+          <p:cNvPr id="6" name="頁尾版面配置區 5"/>
           <p:cNvSpPr>
             <a:spLocks noGrp="1"/>
           </p:cNvSpPr>
@@ -2427,7 +2306,7 @@
       </p:sp>
       <p:sp>
         <p:nvSpPr>
-          <p:cNvPr id="7" name="Slide Number Placeholder 6"/>
+          <p:cNvPr id="7" name="投影片編號版面配置區 6"/>
           <p:cNvSpPr>
             <a:spLocks noGrp="1"/>
           </p:cNvSpPr>
@@ -2449,6 +2328,11 @@
         </p:txBody>
       </p:sp>
     </p:spTree>
+    <p:extLst>
+      <p:ext uri="{BB962C8B-B14F-4D97-AF65-F5344CB8AC3E}">
+        <p14:creationId xmlns:p14="http://schemas.microsoft.com/office/powerpoint/2010/main" val="3957641733"/>
+      </p:ext>
+    </p:extLst>
   </p:cSld>
   <p:clrMapOvr>
     <a:masterClrMapping/>
@@ -2457,7 +2341,7 @@
 </file>
 
 <file path=ppt/slideLayouts/slideLayout9.xml><?xml version="1.0" encoding="utf-8"?>
-<p:sldLayout xmlns:a="http://schemas.openxmlformats.org/drawingml/2006/main" xmlns:r="http://schemas.openxmlformats.org/officeDocument/2006/relationships" xmlns:p="http://schemas.openxmlformats.org/presentationml/2006/main" showMasterSp="0" type="picTx" preserve="1">
+<p:sldLayout xmlns:a="http://schemas.openxmlformats.org/drawingml/2006/main" xmlns:r="http://schemas.openxmlformats.org/officeDocument/2006/relationships" xmlns:p="http://schemas.openxmlformats.org/presentationml/2006/main" type="picTx" preserve="1">
   <p:cSld name="含標題的圖片">
     <p:spTree>
       <p:nvGrpSpPr>
@@ -2475,7 +2359,7 @@
       </p:grpSpPr>
       <p:sp>
         <p:nvSpPr>
-          <p:cNvPr id="2" name="Title 1"/>
+          <p:cNvPr id="2" name="標題 1"/>
           <p:cNvSpPr>
             <a:spLocks noGrp="1"/>
           </p:cNvSpPr>
@@ -2485,30 +2369,29 @@
         </p:nvSpPr>
         <p:spPr>
           <a:xfrm>
-            <a:off x="376240" y="1981200"/>
-            <a:ext cx="3429000" cy="522288"/>
+            <a:off x="2389717" y="4800602"/>
+            <a:ext cx="7315200" cy="566739"/>
           </a:xfrm>
         </p:spPr>
         <p:txBody>
-          <a:bodyPr tIns="0" bIns="0" anchor="b"/>
+          <a:bodyPr anchor="b"/>
           <a:lstStyle>
-            <a:lvl1pPr algn="r">
-              <a:buNone/>
+            <a:lvl1pPr algn="l">
               <a:defRPr sz="2000" b="1"/>
             </a:lvl1pPr>
           </a:lstStyle>
           <a:p>
             <a:r>
-              <a:rPr lang="zh-TW" altLang="en-US" smtClean="0"/>
-              <a:t>按一下以編輯母片標題樣式</a:t>
-            </a:r>
-            <a:endParaRPr lang="en-US" dirty="0"/>
-          </a:p>
-        </p:txBody>
-      </p:sp>
-      <p:sp>
-        <p:nvSpPr>
-          <p:cNvPr id="3" name="Picture Placeholder 2"/>
+              <a:rPr lang="en-US" altLang="zh-TW"/>
+              <a:t>Click to edit Master title style</a:t>
+            </a:r>
+            <a:endParaRPr lang="zh-TW" altLang="en-US"/>
+          </a:p>
+        </p:txBody>
+      </p:sp>
+      <p:sp>
+        <p:nvSpPr>
+          <p:cNvPr id="3" name="圖片版面配置區 2"/>
           <p:cNvSpPr>
             <a:spLocks noGrp="1"/>
           </p:cNvSpPr>
@@ -2518,49 +2401,62 @@
         </p:nvSpPr>
         <p:spPr>
           <a:xfrm>
-            <a:off x="4093368" y="1066800"/>
-            <a:ext cx="4572000" cy="4572000"/>
+            <a:off x="2389717" y="612775"/>
+            <a:ext cx="7315200" cy="4114800"/>
           </a:xfrm>
-          <a:solidFill>
-            <a:schemeClr val="bg2">
-              <a:shade val="75000"/>
-            </a:schemeClr>
-          </a:solidFill>
-          <a:ln w="60325">
-            <a:solidFill>
-              <a:srgbClr val="FFFFFF"/>
-            </a:solidFill>
-            <a:miter lim="800000"/>
-          </a:ln>
-          <a:effectLst>
-            <a:outerShdw blurRad="36195" dist="10000" dir="5400000" algn="tl" rotWithShape="0">
-              <a:srgbClr val="000000">
-                <a:alpha val="75000"/>
-              </a:srgbClr>
-            </a:outerShdw>
-            <a:reflection stA="21000" endA="500" endPos="10000" dist="20000" dir="5400000" sy="-100000" algn="bl" rotWithShape="0"/>
-          </a:effectLst>
         </p:spPr>
         <p:txBody>
           <a:bodyPr/>
           <a:lstStyle>
-            <a:lvl1pPr>
+            <a:lvl1pPr marL="0" indent="0">
               <a:buNone/>
               <a:defRPr sz="3200"/>
             </a:lvl1pPr>
+            <a:lvl2pPr marL="457200" indent="0">
+              <a:buNone/>
+              <a:defRPr sz="2800"/>
+            </a:lvl2pPr>
+            <a:lvl3pPr marL="914400" indent="0">
+              <a:buNone/>
+              <a:defRPr sz="2400"/>
+            </a:lvl3pPr>
+            <a:lvl4pPr marL="1371600" indent="0">
+              <a:buNone/>
+              <a:defRPr sz="2000"/>
+            </a:lvl4pPr>
+            <a:lvl5pPr marL="1828800" indent="0">
+              <a:buNone/>
+              <a:defRPr sz="2000"/>
+            </a:lvl5pPr>
+            <a:lvl6pPr marL="2286000" indent="0">
+              <a:buNone/>
+              <a:defRPr sz="2000"/>
+            </a:lvl6pPr>
+            <a:lvl7pPr marL="2743200" indent="0">
+              <a:buNone/>
+              <a:defRPr sz="2000"/>
+            </a:lvl7pPr>
+            <a:lvl8pPr marL="3200400" indent="0">
+              <a:buNone/>
+              <a:defRPr sz="2000"/>
+            </a:lvl8pPr>
+            <a:lvl9pPr marL="3657600" indent="0">
+              <a:buNone/>
+              <a:defRPr sz="2000"/>
+            </a:lvl9pPr>
           </a:lstStyle>
           <a:p>
             <a:r>
-              <a:rPr lang="zh-TW" altLang="en-US" smtClean="0"/>
-              <a:t>按一下圖示以新增圖片</a:t>
-            </a:r>
-            <a:endParaRPr lang="en-US" dirty="0"/>
-          </a:p>
-        </p:txBody>
-      </p:sp>
-      <p:sp>
-        <p:nvSpPr>
-          <p:cNvPr id="4" name="Text Placeholder 3"/>
+              <a:rPr lang="en-US" altLang="zh-TW"/>
+              <a:t>Click icon to add picture</a:t>
+            </a:r>
+            <a:endParaRPr lang="zh-TW" altLang="en-US"/>
+          </a:p>
+        </p:txBody>
+      </p:sp>
+      <p:sp>
+        <p:nvSpPr>
+          <p:cNvPr id="4" name="文字版面配置區 3"/>
           <p:cNvSpPr>
             <a:spLocks noGrp="1"/>
           </p:cNvSpPr>
@@ -2570,54 +2466,62 @@
         </p:nvSpPr>
         <p:spPr>
           <a:xfrm>
-            <a:off x="376240" y="2543176"/>
-            <a:ext cx="3429000" cy="914400"/>
+            <a:off x="2389717" y="5367340"/>
+            <a:ext cx="7315200" cy="804863"/>
           </a:xfrm>
         </p:spPr>
         <p:txBody>
-          <a:bodyPr lIns="0" tIns="0" rIns="0" bIns="0" anchor="t"/>
+          <a:bodyPr/>
           <a:lstStyle>
-            <a:lvl1pPr indent="0" algn="r">
-              <a:spcBef>
-                <a:spcPts val="300"/>
-              </a:spcBef>
-              <a:buFontTx/>
-              <a:buNone/>
-              <a:defRPr sz="1400" baseline="0"/>
+            <a:lvl1pPr marL="0" indent="0">
+              <a:buNone/>
+              <a:defRPr sz="1400"/>
             </a:lvl1pPr>
-            <a:lvl2pPr>
-              <a:buFontTx/>
+            <a:lvl2pPr marL="457200" indent="0">
               <a:buNone/>
               <a:defRPr sz="1200"/>
             </a:lvl2pPr>
-            <a:lvl3pPr>
-              <a:buFontTx/>
+            <a:lvl3pPr marL="914400" indent="0">
               <a:buNone/>
               <a:defRPr sz="1000"/>
             </a:lvl3pPr>
-            <a:lvl4pPr>
-              <a:buFontTx/>
+            <a:lvl4pPr marL="1371600" indent="0">
               <a:buNone/>
               <a:defRPr sz="900"/>
             </a:lvl4pPr>
-            <a:lvl5pPr>
-              <a:buFontTx/>
+            <a:lvl5pPr marL="1828800" indent="0">
               <a:buNone/>
               <a:defRPr sz="900"/>
             </a:lvl5pPr>
+            <a:lvl6pPr marL="2286000" indent="0">
+              <a:buNone/>
+              <a:defRPr sz="900"/>
+            </a:lvl6pPr>
+            <a:lvl7pPr marL="2743200" indent="0">
+              <a:buNone/>
+              <a:defRPr sz="900"/>
+            </a:lvl7pPr>
+            <a:lvl8pPr marL="3200400" indent="0">
+              <a:buNone/>
+              <a:defRPr sz="900"/>
+            </a:lvl8pPr>
+            <a:lvl9pPr marL="3657600" indent="0">
+              <a:buNone/>
+              <a:defRPr sz="900"/>
+            </a:lvl9pPr>
           </a:lstStyle>
           <a:p>
             <a:pPr lvl="0"/>
             <a:r>
-              <a:rPr lang="zh-TW" altLang="en-US" smtClean="0"/>
-              <a:t>按一下以編輯母片文字樣式</a:t>
-            </a:r>
-          </a:p>
-        </p:txBody>
-      </p:sp>
-      <p:sp>
-        <p:nvSpPr>
-          <p:cNvPr id="5" name="Date Placeholder 4"/>
+              <a:rPr lang="en-US" altLang="zh-TW"/>
+              <a:t>Click to edit Master text styles</a:t>
+            </a:r>
+          </a:p>
+        </p:txBody>
+      </p:sp>
+      <p:sp>
+        <p:nvSpPr>
+          <p:cNvPr id="5" name="日期版面配置區 4"/>
           <p:cNvSpPr>
             <a:spLocks noGrp="1"/>
           </p:cNvSpPr>
@@ -2632,7 +2536,7 @@
           <a:p>
             <a:fld id="{4CA65DC9-25DB-4D45-A2C5-A87C7239C765}" type="datetimeFigureOut">
               <a:rPr lang="zh-TW" altLang="en-US" smtClean="0"/>
-              <a:t>2016/1/9</a:t>
+              <a:t>2026/4/24</a:t>
             </a:fld>
             <a:endParaRPr lang="zh-TW" altLang="en-US"/>
           </a:p>
@@ -2640,7 +2544,7 @@
       </p:sp>
       <p:sp>
         <p:nvSpPr>
-          <p:cNvPr id="6" name="Footer Placeholder 5"/>
+          <p:cNvPr id="6" name="頁尾版面配置區 5"/>
           <p:cNvSpPr>
             <a:spLocks noGrp="1"/>
           </p:cNvSpPr>
@@ -2659,7 +2563,7 @@
       </p:sp>
       <p:sp>
         <p:nvSpPr>
-          <p:cNvPr id="7" name="Slide Number Placeholder 6"/>
+          <p:cNvPr id="7" name="投影片編號版面配置區 6"/>
           <p:cNvSpPr>
             <a:spLocks noGrp="1"/>
           </p:cNvSpPr>
@@ -2667,12 +2571,7 @@
             <p:ph type="sldNum" sz="quarter" idx="12"/>
           </p:nvPr>
         </p:nvSpPr>
-        <p:spPr>
-          <a:xfrm>
-            <a:off x="8153400" y="6356350"/>
-            <a:ext cx="533400" cy="365125"/>
-          </a:xfrm>
-        </p:spPr>
+        <p:spPr/>
         <p:txBody>
           <a:bodyPr/>
           <a:lstStyle/>
@@ -2686,6 +2585,11 @@
         </p:txBody>
       </p:sp>
     </p:spTree>
+    <p:extLst>
+      <p:ext uri="{BB962C8B-B14F-4D97-AF65-F5344CB8AC3E}">
+        <p14:creationId xmlns:p14="http://schemas.microsoft.com/office/powerpoint/2010/main" val="3696108812"/>
+      </p:ext>
+    </p:extLst>
   </p:cSld>
   <p:clrMapOvr>
     <a:masterClrMapping/>
@@ -2697,9 +2601,14 @@
 <p:sldMaster xmlns:a="http://schemas.openxmlformats.org/drawingml/2006/main" xmlns:r="http://schemas.openxmlformats.org/officeDocument/2006/relationships" xmlns:p="http://schemas.openxmlformats.org/presentationml/2006/main">
   <p:cSld>
     <p:bg>
-      <p:bgRef idx="1003">
-        <a:schemeClr val="bg2"/>
-      </p:bgRef>
+      <p:bgPr>
+        <a:blipFill dpi="0" rotWithShape="1">
+          <a:blip r:embed="rId13"/>
+          <a:srcRect/>
+          <a:tile tx="0" ty="0" sx="100000" sy="100000" flip="none" algn="tl"/>
+        </a:blipFill>
+        <a:effectLst/>
+      </p:bgPr>
     </p:bg>
     <p:spTree>
       <p:nvGrpSpPr>
@@ -2717,712 +2626,7 @@
       </p:grpSpPr>
       <p:sp>
         <p:nvSpPr>
-          <p:cNvPr id="7" name="Flowchart: Document 6"/>
-          <p:cNvSpPr/>
-          <p:nvPr/>
-        </p:nvSpPr>
-        <p:spPr>
-          <a:xfrm rot="10800000">
-            <a:off x="1" y="1142899"/>
-            <a:ext cx="9144000" cy="5562705"/>
-          </a:xfrm>
-          <a:custGeom>
-            <a:avLst/>
-            <a:gdLst>
-              <a:gd name="connsiteX0" fmla="*/ 0 w 21600"/>
-              <a:gd name="connsiteY0" fmla="*/ 0 h 19378"/>
-              <a:gd name="connsiteX1" fmla="*/ 21600 w 21600"/>
-              <a:gd name="connsiteY1" fmla="*/ 0 h 19378"/>
-              <a:gd name="connsiteX2" fmla="*/ 21600 w 21600"/>
-              <a:gd name="connsiteY2" fmla="*/ 17322 h 19378"/>
-              <a:gd name="connsiteX3" fmla="*/ 0 w 21600"/>
-              <a:gd name="connsiteY3" fmla="*/ 19378 h 19378"/>
-              <a:gd name="connsiteX4" fmla="*/ 0 w 21600"/>
-              <a:gd name="connsiteY4" fmla="*/ 0 h 19378"/>
-              <a:gd name="connsiteX0" fmla="*/ 0 w 21600"/>
-              <a:gd name="connsiteY0" fmla="*/ 0 h 19378"/>
-              <a:gd name="connsiteX1" fmla="*/ 21600 w 21600"/>
-              <a:gd name="connsiteY1" fmla="*/ 0 h 19378"/>
-              <a:gd name="connsiteX2" fmla="*/ 21600 w 21600"/>
-              <a:gd name="connsiteY2" fmla="*/ 17322 h 19378"/>
-              <a:gd name="connsiteX3" fmla="*/ 0 w 21600"/>
-              <a:gd name="connsiteY3" fmla="*/ 19378 h 19378"/>
-              <a:gd name="connsiteX4" fmla="*/ 0 w 21600"/>
-              <a:gd name="connsiteY4" fmla="*/ 0 h 19378"/>
-              <a:gd name="connsiteX0" fmla="*/ 0 w 21600"/>
-              <a:gd name="connsiteY0" fmla="*/ 0 h 19378"/>
-              <a:gd name="connsiteX1" fmla="*/ 21600 w 21600"/>
-              <a:gd name="connsiteY1" fmla="*/ 0 h 19378"/>
-              <a:gd name="connsiteX2" fmla="*/ 21600 w 21600"/>
-              <a:gd name="connsiteY2" fmla="*/ 17322 h 19378"/>
-              <a:gd name="connsiteX3" fmla="*/ 0 w 21600"/>
-              <a:gd name="connsiteY3" fmla="*/ 19378 h 19378"/>
-              <a:gd name="connsiteX4" fmla="*/ 0 w 21600"/>
-              <a:gd name="connsiteY4" fmla="*/ 0 h 19378"/>
-              <a:gd name="connsiteX0" fmla="*/ 0 w 21600"/>
-              <a:gd name="connsiteY0" fmla="*/ 0 h 19974"/>
-              <a:gd name="connsiteX1" fmla="*/ 21600 w 21600"/>
-              <a:gd name="connsiteY1" fmla="*/ 0 h 19974"/>
-              <a:gd name="connsiteX2" fmla="*/ 21600 w 21600"/>
-              <a:gd name="connsiteY2" fmla="*/ 17322 h 19974"/>
-              <a:gd name="connsiteX3" fmla="*/ 0 w 21600"/>
-              <a:gd name="connsiteY3" fmla="*/ 19974 h 19974"/>
-              <a:gd name="connsiteX4" fmla="*/ 0 w 21600"/>
-              <a:gd name="connsiteY4" fmla="*/ 0 h 19974"/>
-              <a:gd name="connsiteX0" fmla="*/ 0 w 21600"/>
-              <a:gd name="connsiteY0" fmla="*/ 0 h 19974"/>
-              <a:gd name="connsiteX1" fmla="*/ 21600 w 21600"/>
-              <a:gd name="connsiteY1" fmla="*/ 0 h 19974"/>
-              <a:gd name="connsiteX2" fmla="*/ 21600 w 21600"/>
-              <a:gd name="connsiteY2" fmla="*/ 17322 h 19974"/>
-              <a:gd name="connsiteX3" fmla="*/ 0 w 21600"/>
-              <a:gd name="connsiteY3" fmla="*/ 19974 h 19974"/>
-              <a:gd name="connsiteX4" fmla="*/ 0 w 21600"/>
-              <a:gd name="connsiteY4" fmla="*/ 0 h 19974"/>
-              <a:gd name="connsiteX0" fmla="*/ 0 w 21600"/>
-              <a:gd name="connsiteY0" fmla="*/ 0 h 19974"/>
-              <a:gd name="connsiteX1" fmla="*/ 21600 w 21600"/>
-              <a:gd name="connsiteY1" fmla="*/ 0 h 19974"/>
-              <a:gd name="connsiteX2" fmla="*/ 21600 w 21600"/>
-              <a:gd name="connsiteY2" fmla="*/ 17322 h 19974"/>
-              <a:gd name="connsiteX3" fmla="*/ 0 w 21600"/>
-              <a:gd name="connsiteY3" fmla="*/ 19974 h 19974"/>
-              <a:gd name="connsiteX4" fmla="*/ 0 w 21600"/>
-              <a:gd name="connsiteY4" fmla="*/ 0 h 19974"/>
-              <a:gd name="connsiteX0" fmla="*/ 0 w 21600"/>
-              <a:gd name="connsiteY0" fmla="*/ 0 h 20252"/>
-              <a:gd name="connsiteX1" fmla="*/ 21600 w 21600"/>
-              <a:gd name="connsiteY1" fmla="*/ 0 h 20252"/>
-              <a:gd name="connsiteX2" fmla="*/ 21600 w 21600"/>
-              <a:gd name="connsiteY2" fmla="*/ 17322 h 20252"/>
-              <a:gd name="connsiteX3" fmla="*/ 0 w 21600"/>
-              <a:gd name="connsiteY3" fmla="*/ 20252 h 20252"/>
-              <a:gd name="connsiteX4" fmla="*/ 0 w 21600"/>
-              <a:gd name="connsiteY4" fmla="*/ 0 h 20252"/>
-              <a:gd name="connsiteX0" fmla="*/ 0 w 21600"/>
-              <a:gd name="connsiteY0" fmla="*/ 0 h 20252"/>
-              <a:gd name="connsiteX1" fmla="*/ 21600 w 21600"/>
-              <a:gd name="connsiteY1" fmla="*/ 0 h 20252"/>
-              <a:gd name="connsiteX2" fmla="*/ 21600 w 21600"/>
-              <a:gd name="connsiteY2" fmla="*/ 17322 h 20252"/>
-              <a:gd name="connsiteX3" fmla="*/ 0 w 21600"/>
-              <a:gd name="connsiteY3" fmla="*/ 20252 h 20252"/>
-              <a:gd name="connsiteX4" fmla="*/ 0 w 21600"/>
-              <a:gd name="connsiteY4" fmla="*/ 0 h 20252"/>
-            </a:gdLst>
-            <a:ahLst/>
-            <a:cxnLst>
-              <a:cxn ang="0">
-                <a:pos x="connsiteX0" y="connsiteY0"/>
-              </a:cxn>
-              <a:cxn ang="0">
-                <a:pos x="connsiteX1" y="connsiteY1"/>
-              </a:cxn>
-              <a:cxn ang="0">
-                <a:pos x="connsiteX2" y="connsiteY2"/>
-              </a:cxn>
-              <a:cxn ang="0">
-                <a:pos x="connsiteX3" y="connsiteY3"/>
-              </a:cxn>
-              <a:cxn ang="0">
-                <a:pos x="connsiteX4" y="connsiteY4"/>
-              </a:cxn>
-              <a:cxn ang="0">
-                <a:pos x="connsiteX0" y="connsiteY0"/>
-              </a:cxn>
-              <a:cxn ang="0">
-                <a:pos x="connsiteX1" y="connsiteY1"/>
-              </a:cxn>
-              <a:cxn ang="0">
-                <a:pos x="connsiteX2" y="connsiteY2"/>
-              </a:cxn>
-              <a:cxn ang="0">
-                <a:pos x="connsiteX3" y="connsiteY3"/>
-              </a:cxn>
-              <a:cxn ang="0">
-                <a:pos x="connsiteX4" y="connsiteY4"/>
-              </a:cxn>
-              <a:cxn ang="0">
-                <a:pos x="connsiteX0" y="connsiteY0"/>
-              </a:cxn>
-              <a:cxn ang="0">
-                <a:pos x="connsiteX1" y="connsiteY1"/>
-              </a:cxn>
-              <a:cxn ang="0">
-                <a:pos x="connsiteX2" y="connsiteY2"/>
-              </a:cxn>
-              <a:cxn ang="0">
-                <a:pos x="connsiteX3" y="connsiteY3"/>
-              </a:cxn>
-              <a:cxn ang="0">
-                <a:pos x="connsiteX4" y="connsiteY4"/>
-              </a:cxn>
-              <a:cxn ang="0">
-                <a:pos x="connsiteX0" y="connsiteY0"/>
-              </a:cxn>
-              <a:cxn ang="0">
-                <a:pos x="connsiteX1" y="connsiteY1"/>
-              </a:cxn>
-              <a:cxn ang="0">
-                <a:pos x="connsiteX2" y="connsiteY2"/>
-              </a:cxn>
-              <a:cxn ang="0">
-                <a:pos x="connsiteX3" y="connsiteY3"/>
-              </a:cxn>
-              <a:cxn ang="0">
-                <a:pos x="connsiteX4" y="connsiteY4"/>
-              </a:cxn>
-              <a:cxn ang="0">
-                <a:pos x="connsiteX0" y="connsiteY0"/>
-              </a:cxn>
-              <a:cxn ang="0">
-                <a:pos x="connsiteX1" y="connsiteY1"/>
-              </a:cxn>
-              <a:cxn ang="0">
-                <a:pos x="connsiteX2" y="connsiteY2"/>
-              </a:cxn>
-              <a:cxn ang="0">
-                <a:pos x="connsiteX3" y="connsiteY3"/>
-              </a:cxn>
-              <a:cxn ang="0">
-                <a:pos x="connsiteX4" y="connsiteY4"/>
-              </a:cxn>
-              <a:cxn ang="0">
-                <a:pos x="connsiteX0" y="connsiteY0"/>
-              </a:cxn>
-              <a:cxn ang="0">
-                <a:pos x="connsiteX1" y="connsiteY1"/>
-              </a:cxn>
-              <a:cxn ang="0">
-                <a:pos x="connsiteX2" y="connsiteY2"/>
-              </a:cxn>
-              <a:cxn ang="0">
-                <a:pos x="connsiteX3" y="connsiteY3"/>
-              </a:cxn>
-              <a:cxn ang="0">
-                <a:pos x="connsiteX4" y="connsiteY4"/>
-              </a:cxn>
-              <a:cxn ang="0">
-                <a:pos x="connsiteX0" y="connsiteY0"/>
-              </a:cxn>
-              <a:cxn ang="0">
-                <a:pos x="connsiteX1" y="connsiteY1"/>
-              </a:cxn>
-              <a:cxn ang="0">
-                <a:pos x="connsiteX2" y="connsiteY2"/>
-              </a:cxn>
-              <a:cxn ang="0">
-                <a:pos x="connsiteX3" y="connsiteY3"/>
-              </a:cxn>
-              <a:cxn ang="0">
-                <a:pos x="connsiteX4" y="connsiteY4"/>
-              </a:cxn>
-              <a:cxn ang="0">
-                <a:pos x="connsiteX0" y="connsiteY0"/>
-              </a:cxn>
-              <a:cxn ang="0">
-                <a:pos x="connsiteX1" y="connsiteY1"/>
-              </a:cxn>
-              <a:cxn ang="0">
-                <a:pos x="connsiteX2" y="connsiteY2"/>
-              </a:cxn>
-              <a:cxn ang="0">
-                <a:pos x="connsiteX3" y="connsiteY3"/>
-              </a:cxn>
-              <a:cxn ang="0">
-                <a:pos x="connsiteX4" y="connsiteY4"/>
-              </a:cxn>
-            </a:cxnLst>
-            <a:rect l="l" t="t" r="r" b="b"/>
-            <a:pathLst>
-              <a:path w="21600" h="20252">
-                <a:moveTo>
-                  <a:pt x="0" y="0"/>
-                </a:moveTo>
-                <a:lnTo>
-                  <a:pt x="21600" y="0"/>
-                </a:lnTo>
-                <a:lnTo>
-                  <a:pt x="21600" y="17322"/>
-                </a:lnTo>
-                <a:cubicBezTo>
-                  <a:pt x="10800" y="17322"/>
-                  <a:pt x="10056" y="24231"/>
-                  <a:pt x="0" y="20252"/>
-                </a:cubicBezTo>
-                <a:lnTo>
-                  <a:pt x="0" y="0"/>
-                </a:lnTo>
-                <a:close/>
-              </a:path>
-            </a:pathLst>
-          </a:custGeom>
-          <a:gradFill>
-            <a:gsLst>
-              <a:gs pos="100000">
-                <a:schemeClr val="bg2">
-                  <a:tint val="55000"/>
-                  <a:satMod val="1800000"/>
-                  <a:alpha val="55000"/>
-                </a:schemeClr>
-              </a:gs>
-              <a:gs pos="65000">
-                <a:schemeClr val="bg2">
-                  <a:shade val="100000"/>
-                  <a:satMod val="600000"/>
-                  <a:alpha val="0"/>
-                </a:schemeClr>
-              </a:gs>
-            </a:gsLst>
-            <a:lin ang="4800000" scaled="1"/>
-          </a:gradFill>
-          <a:ln w="31750" cap="sq" cmpd="sng" algn="ctr">
-            <a:noFill/>
-            <a:prstDash val="solid"/>
-          </a:ln>
-          <a:effectLst/>
-        </p:spPr>
-        <p:style>
-          <a:lnRef idx="3">
-            <a:schemeClr val="lt1"/>
-          </a:lnRef>
-          <a:fillRef idx="1">
-            <a:schemeClr val="accent1"/>
-          </a:fillRef>
-          <a:effectRef idx="1">
-            <a:schemeClr val="accent1"/>
-          </a:effectRef>
-          <a:fontRef idx="minor">
-            <a:schemeClr val="lt1"/>
-          </a:fontRef>
-        </p:style>
-        <p:txBody>
-          <a:bodyPr anchor="ctr"/>
-          <a:lstStyle/>
-          <a:p>
-            <a:pPr algn="ctr"/>
-            <a:endParaRPr lang="en-US"/>
-          </a:p>
-        </p:txBody>
-      </p:sp>
-      <p:sp>
-        <p:nvSpPr>
-          <p:cNvPr id="8" name="Flowchart: Document 7"/>
-          <p:cNvSpPr/>
-          <p:nvPr/>
-        </p:nvSpPr>
-        <p:spPr>
-          <a:xfrm rot="10800000">
-            <a:off x="1" y="1341133"/>
-            <a:ext cx="9144000" cy="4480425"/>
-          </a:xfrm>
-          <a:custGeom>
-            <a:avLst/>
-            <a:gdLst>
-              <a:gd name="connsiteX0" fmla="*/ 0 w 21600"/>
-              <a:gd name="connsiteY0" fmla="*/ 0 h 18944"/>
-              <a:gd name="connsiteX1" fmla="*/ 21600 w 21600"/>
-              <a:gd name="connsiteY1" fmla="*/ 0 h 18944"/>
-              <a:gd name="connsiteX2" fmla="*/ 21600 w 21600"/>
-              <a:gd name="connsiteY2" fmla="*/ 17322 h 18944"/>
-              <a:gd name="connsiteX3" fmla="*/ 0 w 21600"/>
-              <a:gd name="connsiteY3" fmla="*/ 18944 h 18944"/>
-              <a:gd name="connsiteX4" fmla="*/ 0 w 21600"/>
-              <a:gd name="connsiteY4" fmla="*/ 0 h 18944"/>
-              <a:gd name="connsiteX0" fmla="*/ 0 w 21600"/>
-              <a:gd name="connsiteY0" fmla="*/ 0 h 18944"/>
-              <a:gd name="connsiteX1" fmla="*/ 21600 w 21600"/>
-              <a:gd name="connsiteY1" fmla="*/ 0 h 18944"/>
-              <a:gd name="connsiteX2" fmla="*/ 21600 w 21600"/>
-              <a:gd name="connsiteY2" fmla="*/ 17322 h 18944"/>
-              <a:gd name="connsiteX3" fmla="*/ 0 w 21600"/>
-              <a:gd name="connsiteY3" fmla="*/ 18944 h 18944"/>
-              <a:gd name="connsiteX4" fmla="*/ 0 w 21600"/>
-              <a:gd name="connsiteY4" fmla="*/ 0 h 18944"/>
-              <a:gd name="connsiteX0" fmla="*/ 0 w 21600"/>
-              <a:gd name="connsiteY0" fmla="*/ 0 h 19350"/>
-              <a:gd name="connsiteX1" fmla="*/ 21600 w 21600"/>
-              <a:gd name="connsiteY1" fmla="*/ 0 h 19350"/>
-              <a:gd name="connsiteX2" fmla="*/ 21600 w 21600"/>
-              <a:gd name="connsiteY2" fmla="*/ 17322 h 19350"/>
-              <a:gd name="connsiteX3" fmla="*/ 0 w 21600"/>
-              <a:gd name="connsiteY3" fmla="*/ 19350 h 19350"/>
-              <a:gd name="connsiteX4" fmla="*/ 0 w 21600"/>
-              <a:gd name="connsiteY4" fmla="*/ 0 h 19350"/>
-              <a:gd name="connsiteX0" fmla="*/ 0 w 21600"/>
-              <a:gd name="connsiteY0" fmla="*/ 0 h 19350"/>
-              <a:gd name="connsiteX1" fmla="*/ 21600 w 21600"/>
-              <a:gd name="connsiteY1" fmla="*/ 0 h 19350"/>
-              <a:gd name="connsiteX2" fmla="*/ 21600 w 21600"/>
-              <a:gd name="connsiteY2" fmla="*/ 17322 h 19350"/>
-              <a:gd name="connsiteX3" fmla="*/ 0 w 21600"/>
-              <a:gd name="connsiteY3" fmla="*/ 19350 h 19350"/>
-              <a:gd name="connsiteX4" fmla="*/ 0 w 21600"/>
-              <a:gd name="connsiteY4" fmla="*/ 0 h 19350"/>
-              <a:gd name="connsiteX0" fmla="*/ 0 w 21600"/>
-              <a:gd name="connsiteY0" fmla="*/ 0 h 19350"/>
-              <a:gd name="connsiteX1" fmla="*/ 21600 w 21600"/>
-              <a:gd name="connsiteY1" fmla="*/ 0 h 19350"/>
-              <a:gd name="connsiteX2" fmla="*/ 21600 w 21600"/>
-              <a:gd name="connsiteY2" fmla="*/ 17322 h 19350"/>
-              <a:gd name="connsiteX3" fmla="*/ 0 w 21600"/>
-              <a:gd name="connsiteY3" fmla="*/ 19350 h 19350"/>
-              <a:gd name="connsiteX4" fmla="*/ 0 w 21600"/>
-              <a:gd name="connsiteY4" fmla="*/ 0 h 19350"/>
-              <a:gd name="connsiteX0" fmla="*/ 0 w 21600"/>
-              <a:gd name="connsiteY0" fmla="*/ 0 h 19350"/>
-              <a:gd name="connsiteX1" fmla="*/ 21600 w 21600"/>
-              <a:gd name="connsiteY1" fmla="*/ 0 h 19350"/>
-              <a:gd name="connsiteX2" fmla="*/ 21600 w 21600"/>
-              <a:gd name="connsiteY2" fmla="*/ 17322 h 19350"/>
-              <a:gd name="connsiteX3" fmla="*/ 0 w 21600"/>
-              <a:gd name="connsiteY3" fmla="*/ 19350 h 19350"/>
-              <a:gd name="connsiteX4" fmla="*/ 0 w 21600"/>
-              <a:gd name="connsiteY4" fmla="*/ 0 h 19350"/>
-              <a:gd name="connsiteX0" fmla="*/ 0 w 21600"/>
-              <a:gd name="connsiteY0" fmla="*/ 0 h 19691"/>
-              <a:gd name="connsiteX1" fmla="*/ 21600 w 21600"/>
-              <a:gd name="connsiteY1" fmla="*/ 0 h 19691"/>
-              <a:gd name="connsiteX2" fmla="*/ 21600 w 21600"/>
-              <a:gd name="connsiteY2" fmla="*/ 17322 h 19691"/>
-              <a:gd name="connsiteX3" fmla="*/ 0 w 21600"/>
-              <a:gd name="connsiteY3" fmla="*/ 19691 h 19691"/>
-              <a:gd name="connsiteX4" fmla="*/ 0 w 21600"/>
-              <a:gd name="connsiteY4" fmla="*/ 0 h 19691"/>
-              <a:gd name="connsiteX0" fmla="*/ 0 w 21600"/>
-              <a:gd name="connsiteY0" fmla="*/ 0 h 19691"/>
-              <a:gd name="connsiteX1" fmla="*/ 21600 w 21600"/>
-              <a:gd name="connsiteY1" fmla="*/ 0 h 19691"/>
-              <a:gd name="connsiteX2" fmla="*/ 21600 w 21600"/>
-              <a:gd name="connsiteY2" fmla="*/ 17322 h 19691"/>
-              <a:gd name="connsiteX3" fmla="*/ 0 w 21600"/>
-              <a:gd name="connsiteY3" fmla="*/ 19691 h 19691"/>
-              <a:gd name="connsiteX4" fmla="*/ 0 w 21600"/>
-              <a:gd name="connsiteY4" fmla="*/ 0 h 19691"/>
-              <a:gd name="connsiteX0" fmla="*/ 0 w 21600"/>
-              <a:gd name="connsiteY0" fmla="*/ 0 h 20032"/>
-              <a:gd name="connsiteX1" fmla="*/ 21600 w 21600"/>
-              <a:gd name="connsiteY1" fmla="*/ 0 h 20032"/>
-              <a:gd name="connsiteX2" fmla="*/ 21600 w 21600"/>
-              <a:gd name="connsiteY2" fmla="*/ 17322 h 20032"/>
-              <a:gd name="connsiteX3" fmla="*/ 0 w 21600"/>
-              <a:gd name="connsiteY3" fmla="*/ 20032 h 20032"/>
-              <a:gd name="connsiteX4" fmla="*/ 0 w 21600"/>
-              <a:gd name="connsiteY4" fmla="*/ 0 h 20032"/>
-              <a:gd name="connsiteX0" fmla="*/ 0 w 21600"/>
-              <a:gd name="connsiteY0" fmla="*/ 0 h 20032"/>
-              <a:gd name="connsiteX1" fmla="*/ 21600 w 21600"/>
-              <a:gd name="connsiteY1" fmla="*/ 0 h 20032"/>
-              <a:gd name="connsiteX2" fmla="*/ 21600 w 21600"/>
-              <a:gd name="connsiteY2" fmla="*/ 17322 h 20032"/>
-              <a:gd name="connsiteX3" fmla="*/ 0 w 21600"/>
-              <a:gd name="connsiteY3" fmla="*/ 20032 h 20032"/>
-              <a:gd name="connsiteX4" fmla="*/ 0 w 21600"/>
-              <a:gd name="connsiteY4" fmla="*/ 0 h 20032"/>
-              <a:gd name="connsiteX0" fmla="*/ 0 w 21600"/>
-              <a:gd name="connsiteY0" fmla="*/ 0 h 20032"/>
-              <a:gd name="connsiteX1" fmla="*/ 21600 w 21600"/>
-              <a:gd name="connsiteY1" fmla="*/ 0 h 20032"/>
-              <a:gd name="connsiteX2" fmla="*/ 21600 w 21600"/>
-              <a:gd name="connsiteY2" fmla="*/ 17322 h 20032"/>
-              <a:gd name="connsiteX3" fmla="*/ 0 w 21600"/>
-              <a:gd name="connsiteY3" fmla="*/ 20032 h 20032"/>
-              <a:gd name="connsiteX4" fmla="*/ 0 w 21600"/>
-              <a:gd name="connsiteY4" fmla="*/ 0 h 20032"/>
-              <a:gd name="connsiteX0" fmla="*/ 0 w 21600"/>
-              <a:gd name="connsiteY0" fmla="*/ 0 h 20032"/>
-              <a:gd name="connsiteX1" fmla="*/ 21600 w 21600"/>
-              <a:gd name="connsiteY1" fmla="*/ 0 h 20032"/>
-              <a:gd name="connsiteX2" fmla="*/ 21600 w 21600"/>
-              <a:gd name="connsiteY2" fmla="*/ 17322 h 20032"/>
-              <a:gd name="connsiteX3" fmla="*/ 0 w 21600"/>
-              <a:gd name="connsiteY3" fmla="*/ 20032 h 20032"/>
-              <a:gd name="connsiteX4" fmla="*/ 0 w 21600"/>
-              <a:gd name="connsiteY4" fmla="*/ 0 h 20032"/>
-              <a:gd name="connsiteX0" fmla="*/ 0 w 21600"/>
-              <a:gd name="connsiteY0" fmla="*/ 0 h 20032"/>
-              <a:gd name="connsiteX1" fmla="*/ 21600 w 21600"/>
-              <a:gd name="connsiteY1" fmla="*/ 0 h 20032"/>
-              <a:gd name="connsiteX2" fmla="*/ 21600 w 21600"/>
-              <a:gd name="connsiteY2" fmla="*/ 17322 h 20032"/>
-              <a:gd name="connsiteX3" fmla="*/ 0 w 21600"/>
-              <a:gd name="connsiteY3" fmla="*/ 20032 h 20032"/>
-              <a:gd name="connsiteX4" fmla="*/ 0 w 21600"/>
-              <a:gd name="connsiteY4" fmla="*/ 0 h 20032"/>
-            </a:gdLst>
-            <a:ahLst/>
-            <a:cxnLst>
-              <a:cxn ang="0">
-                <a:pos x="connsiteX0" y="connsiteY0"/>
-              </a:cxn>
-              <a:cxn ang="0">
-                <a:pos x="connsiteX1" y="connsiteY1"/>
-              </a:cxn>
-              <a:cxn ang="0">
-                <a:pos x="connsiteX2" y="connsiteY2"/>
-              </a:cxn>
-              <a:cxn ang="0">
-                <a:pos x="connsiteX3" y="connsiteY3"/>
-              </a:cxn>
-              <a:cxn ang="0">
-                <a:pos x="connsiteX4" y="connsiteY4"/>
-              </a:cxn>
-              <a:cxn ang="0">
-                <a:pos x="connsiteX0" y="connsiteY0"/>
-              </a:cxn>
-              <a:cxn ang="0">
-                <a:pos x="connsiteX1" y="connsiteY1"/>
-              </a:cxn>
-              <a:cxn ang="0">
-                <a:pos x="connsiteX2" y="connsiteY2"/>
-              </a:cxn>
-              <a:cxn ang="0">
-                <a:pos x="connsiteX3" y="connsiteY3"/>
-              </a:cxn>
-              <a:cxn ang="0">
-                <a:pos x="connsiteX4" y="connsiteY4"/>
-              </a:cxn>
-              <a:cxn ang="0">
-                <a:pos x="connsiteX0" y="connsiteY0"/>
-              </a:cxn>
-              <a:cxn ang="0">
-                <a:pos x="connsiteX1" y="connsiteY1"/>
-              </a:cxn>
-              <a:cxn ang="0">
-                <a:pos x="connsiteX2" y="connsiteY2"/>
-              </a:cxn>
-              <a:cxn ang="0">
-                <a:pos x="connsiteX3" y="connsiteY3"/>
-              </a:cxn>
-              <a:cxn ang="0">
-                <a:pos x="connsiteX4" y="connsiteY4"/>
-              </a:cxn>
-              <a:cxn ang="0">
-                <a:pos x="connsiteX0" y="connsiteY0"/>
-              </a:cxn>
-              <a:cxn ang="0">
-                <a:pos x="connsiteX1" y="connsiteY1"/>
-              </a:cxn>
-              <a:cxn ang="0">
-                <a:pos x="connsiteX2" y="connsiteY2"/>
-              </a:cxn>
-              <a:cxn ang="0">
-                <a:pos x="connsiteX3" y="connsiteY3"/>
-              </a:cxn>
-              <a:cxn ang="0">
-                <a:pos x="connsiteX4" y="connsiteY4"/>
-              </a:cxn>
-              <a:cxn ang="0">
-                <a:pos x="connsiteX0" y="connsiteY0"/>
-              </a:cxn>
-              <a:cxn ang="0">
-                <a:pos x="connsiteX1" y="connsiteY1"/>
-              </a:cxn>
-              <a:cxn ang="0">
-                <a:pos x="connsiteX2" y="connsiteY2"/>
-              </a:cxn>
-              <a:cxn ang="0">
-                <a:pos x="connsiteX3" y="connsiteY3"/>
-              </a:cxn>
-              <a:cxn ang="0">
-                <a:pos x="connsiteX4" y="connsiteY4"/>
-              </a:cxn>
-              <a:cxn ang="0">
-                <a:pos x="connsiteX0" y="connsiteY0"/>
-              </a:cxn>
-              <a:cxn ang="0">
-                <a:pos x="connsiteX1" y="connsiteY1"/>
-              </a:cxn>
-              <a:cxn ang="0">
-                <a:pos x="connsiteX2" y="connsiteY2"/>
-              </a:cxn>
-              <a:cxn ang="0">
-                <a:pos x="connsiteX3" y="connsiteY3"/>
-              </a:cxn>
-              <a:cxn ang="0">
-                <a:pos x="connsiteX4" y="connsiteY4"/>
-              </a:cxn>
-              <a:cxn ang="0">
-                <a:pos x="connsiteX0" y="connsiteY0"/>
-              </a:cxn>
-              <a:cxn ang="0">
-                <a:pos x="connsiteX1" y="connsiteY1"/>
-              </a:cxn>
-              <a:cxn ang="0">
-                <a:pos x="connsiteX2" y="connsiteY2"/>
-              </a:cxn>
-              <a:cxn ang="0">
-                <a:pos x="connsiteX3" y="connsiteY3"/>
-              </a:cxn>
-              <a:cxn ang="0">
-                <a:pos x="connsiteX4" y="connsiteY4"/>
-              </a:cxn>
-              <a:cxn ang="0">
-                <a:pos x="connsiteX0" y="connsiteY0"/>
-              </a:cxn>
-              <a:cxn ang="0">
-                <a:pos x="connsiteX1" y="connsiteY1"/>
-              </a:cxn>
-              <a:cxn ang="0">
-                <a:pos x="connsiteX2" y="connsiteY2"/>
-              </a:cxn>
-              <a:cxn ang="0">
-                <a:pos x="connsiteX3" y="connsiteY3"/>
-              </a:cxn>
-              <a:cxn ang="0">
-                <a:pos x="connsiteX4" y="connsiteY4"/>
-              </a:cxn>
-              <a:cxn ang="0">
-                <a:pos x="connsiteX0" y="connsiteY0"/>
-              </a:cxn>
-              <a:cxn ang="0">
-                <a:pos x="connsiteX1" y="connsiteY1"/>
-              </a:cxn>
-              <a:cxn ang="0">
-                <a:pos x="connsiteX2" y="connsiteY2"/>
-              </a:cxn>
-              <a:cxn ang="0">
-                <a:pos x="connsiteX3" y="connsiteY3"/>
-              </a:cxn>
-              <a:cxn ang="0">
-                <a:pos x="connsiteX4" y="connsiteY4"/>
-              </a:cxn>
-              <a:cxn ang="0">
-                <a:pos x="connsiteX0" y="connsiteY0"/>
-              </a:cxn>
-              <a:cxn ang="0">
-                <a:pos x="connsiteX1" y="connsiteY1"/>
-              </a:cxn>
-              <a:cxn ang="0">
-                <a:pos x="connsiteX2" y="connsiteY2"/>
-              </a:cxn>
-              <a:cxn ang="0">
-                <a:pos x="connsiteX3" y="connsiteY3"/>
-              </a:cxn>
-              <a:cxn ang="0">
-                <a:pos x="connsiteX4" y="connsiteY4"/>
-              </a:cxn>
-              <a:cxn ang="0">
-                <a:pos x="connsiteX0" y="connsiteY0"/>
-              </a:cxn>
-              <a:cxn ang="0">
-                <a:pos x="connsiteX1" y="connsiteY1"/>
-              </a:cxn>
-              <a:cxn ang="0">
-                <a:pos x="connsiteX2" y="connsiteY2"/>
-              </a:cxn>
-              <a:cxn ang="0">
-                <a:pos x="connsiteX3" y="connsiteY3"/>
-              </a:cxn>
-              <a:cxn ang="0">
-                <a:pos x="connsiteX4" y="connsiteY4"/>
-              </a:cxn>
-              <a:cxn ang="0">
-                <a:pos x="connsiteX0" y="connsiteY0"/>
-              </a:cxn>
-              <a:cxn ang="0">
-                <a:pos x="connsiteX1" y="connsiteY1"/>
-              </a:cxn>
-              <a:cxn ang="0">
-                <a:pos x="connsiteX2" y="connsiteY2"/>
-              </a:cxn>
-              <a:cxn ang="0">
-                <a:pos x="connsiteX3" y="connsiteY3"/>
-              </a:cxn>
-              <a:cxn ang="0">
-                <a:pos x="connsiteX4" y="connsiteY4"/>
-              </a:cxn>
-              <a:cxn ang="0">
-                <a:pos x="connsiteX0" y="connsiteY0"/>
-              </a:cxn>
-              <a:cxn ang="0">
-                <a:pos x="connsiteX1" y="connsiteY1"/>
-              </a:cxn>
-              <a:cxn ang="0">
-                <a:pos x="connsiteX2" y="connsiteY2"/>
-              </a:cxn>
-              <a:cxn ang="0">
-                <a:pos x="connsiteX3" y="connsiteY3"/>
-              </a:cxn>
-              <a:cxn ang="0">
-                <a:pos x="connsiteX4" y="connsiteY4"/>
-              </a:cxn>
-            </a:cxnLst>
-            <a:rect l="l" t="t" r="r" b="b"/>
-            <a:pathLst>
-              <a:path w="21600" h="20032">
-                <a:moveTo>
-                  <a:pt x="0" y="0"/>
-                </a:moveTo>
-                <a:lnTo>
-                  <a:pt x="21600" y="0"/>
-                </a:lnTo>
-                <a:lnTo>
-                  <a:pt x="21600" y="17322"/>
-                </a:lnTo>
-                <a:cubicBezTo>
-                  <a:pt x="10800" y="17322"/>
-                  <a:pt x="8684" y="24776"/>
-                  <a:pt x="0" y="20032"/>
-                </a:cubicBezTo>
-                <a:lnTo>
-                  <a:pt x="0" y="0"/>
-                </a:lnTo>
-                <a:close/>
-              </a:path>
-            </a:pathLst>
-          </a:custGeom>
-          <a:gradFill>
-            <a:gsLst>
-              <a:gs pos="100000">
-                <a:schemeClr val="bg2">
-                  <a:tint val="40000"/>
-                  <a:satMod val="1900000"/>
-                  <a:alpha val="30000"/>
-                </a:schemeClr>
-              </a:gs>
-              <a:gs pos="65000">
-                <a:schemeClr val="bg2">
-                  <a:shade val="100000"/>
-                  <a:satMod val="600000"/>
-                  <a:alpha val="0"/>
-                </a:schemeClr>
-              </a:gs>
-            </a:gsLst>
-            <a:lin ang="4800000" scaled="1"/>
-          </a:gradFill>
-          <a:ln w="31750" cap="sq" cmpd="sng" algn="ctr">
-            <a:noFill/>
-            <a:prstDash val="solid"/>
-          </a:ln>
-          <a:effectLst/>
-        </p:spPr>
-        <p:style>
-          <a:lnRef idx="3">
-            <a:schemeClr val="lt1"/>
-          </a:lnRef>
-          <a:fillRef idx="1">
-            <a:schemeClr val="accent1"/>
-          </a:fillRef>
-          <a:effectRef idx="1">
-            <a:schemeClr val="accent1"/>
-          </a:effectRef>
-          <a:fontRef idx="minor">
-            <a:schemeClr val="lt1"/>
-          </a:fontRef>
-        </p:style>
-        <p:txBody>
-          <a:bodyPr anchor="ctr"/>
-          <a:lstStyle/>
-          <a:p>
-            <a:pPr algn="ctr"/>
-            <a:endParaRPr lang="en-US"/>
-          </a:p>
-        </p:txBody>
-      </p:sp>
-      <p:sp>
-        <p:nvSpPr>
-          <p:cNvPr id="9" name="Title Placeholder 8"/>
+          <p:cNvPr id="2" name="標題版面配置區 1"/>
           <p:cNvSpPr>
             <a:spLocks noGrp="1"/>
           </p:cNvSpPr>
@@ -3432,30 +2636,29 @@
         </p:nvSpPr>
         <p:spPr>
           <a:xfrm>
-            <a:off x="457200" y="533400"/>
-            <a:ext cx="8229600" cy="1524000"/>
+            <a:off x="609600" y="274637"/>
+            <a:ext cx="10972800" cy="1143000"/>
           </a:xfrm>
           <a:prstGeom prst="rect">
             <a:avLst/>
           </a:prstGeom>
         </p:spPr>
         <p:txBody>
-          <a:bodyPr vert="horz" lIns="0" tIns="9144" rIns="0" bIns="9144" anchor="b">
+          <a:bodyPr vert="horz" lIns="91440" tIns="45720" rIns="91440" bIns="45720" rtlCol="0" anchor="ctr">
             <a:normAutofit/>
           </a:bodyPr>
           <a:lstStyle/>
           <a:p>
             <a:r>
-              <a:rPr lang="zh-TW" altLang="en-US" smtClean="0"/>
+              <a:rPr lang="zh-TW" altLang="en-US"/>
               <a:t>按一下以編輯母片標題樣式</a:t>
             </a:r>
-            <a:endParaRPr lang="en-US" dirty="0"/>
-          </a:p>
-        </p:txBody>
-      </p:sp>
-      <p:sp>
-        <p:nvSpPr>
-          <p:cNvPr id="30" name="Text Placeholder 29"/>
+          </a:p>
+        </p:txBody>
+      </p:sp>
+      <p:sp>
+        <p:nvSpPr>
+          <p:cNvPr id="3" name="文字版面配置區 2"/>
           <p:cNvSpPr>
             <a:spLocks noGrp="1"/>
           </p:cNvSpPr>
@@ -3465,59 +2668,58 @@
         </p:nvSpPr>
         <p:spPr>
           <a:xfrm>
-            <a:off x="457200" y="2179637"/>
-            <a:ext cx="8229600" cy="4114800"/>
+            <a:off x="609600" y="1600202"/>
+            <a:ext cx="10972800" cy="4525963"/>
           </a:xfrm>
           <a:prstGeom prst="rect">
             <a:avLst/>
           </a:prstGeom>
         </p:spPr>
         <p:txBody>
-          <a:bodyPr vert="horz" lIns="91440">
+          <a:bodyPr vert="horz" lIns="91440" tIns="45720" rIns="91440" bIns="45720" rtlCol="0">
             <a:normAutofit/>
           </a:bodyPr>
           <a:lstStyle/>
           <a:p>
             <a:pPr lvl="0"/>
             <a:r>
-              <a:rPr lang="zh-TW" altLang="en-US" smtClean="0"/>
+              <a:rPr lang="zh-TW" altLang="en-US"/>
               <a:t>按一下以編輯母片文字樣式</a:t>
             </a:r>
           </a:p>
           <a:p>
             <a:pPr lvl="1"/>
             <a:r>
-              <a:rPr lang="zh-TW" altLang="en-US" smtClean="0"/>
+              <a:rPr lang="zh-TW" altLang="en-US"/>
               <a:t>第二層</a:t>
             </a:r>
           </a:p>
           <a:p>
             <a:pPr lvl="2"/>
             <a:r>
-              <a:rPr lang="zh-TW" altLang="en-US" smtClean="0"/>
+              <a:rPr lang="zh-TW" altLang="en-US"/>
               <a:t>第三層</a:t>
             </a:r>
           </a:p>
           <a:p>
             <a:pPr lvl="3"/>
             <a:r>
-              <a:rPr lang="zh-TW" altLang="en-US" smtClean="0"/>
+              <a:rPr lang="zh-TW" altLang="en-US"/>
               <a:t>第四層</a:t>
             </a:r>
           </a:p>
           <a:p>
             <a:pPr lvl="4"/>
             <a:r>
-              <a:rPr lang="zh-TW" altLang="en-US" smtClean="0"/>
+              <a:rPr lang="zh-TW" altLang="en-US"/>
               <a:t>第五層</a:t>
             </a:r>
-            <a:endParaRPr lang="en-US" dirty="0"/>
-          </a:p>
-        </p:txBody>
-      </p:sp>
-      <p:sp>
-        <p:nvSpPr>
-          <p:cNvPr id="10" name="Date Placeholder 9"/>
+          </a:p>
+        </p:txBody>
+      </p:sp>
+      <p:sp>
+        <p:nvSpPr>
+          <p:cNvPr id="4" name="日期版面配置區 3"/>
           <p:cNvSpPr>
             <a:spLocks noGrp="1"/>
           </p:cNvSpPr>
@@ -3527,21 +2729,21 @@
         </p:nvSpPr>
         <p:spPr>
           <a:xfrm>
-            <a:off x="457200" y="6356350"/>
-            <a:ext cx="1981200" cy="365125"/>
+            <a:off x="609600" y="6356353"/>
+            <a:ext cx="2844800" cy="365125"/>
           </a:xfrm>
           <a:prstGeom prst="rect">
             <a:avLst/>
           </a:prstGeom>
         </p:spPr>
         <p:txBody>
-          <a:bodyPr vert="horz" anchor="b"/>
+          <a:bodyPr vert="horz" lIns="91440" tIns="45720" rIns="91440" bIns="45720" rtlCol="0" anchor="ctr"/>
           <a:lstStyle>
-            <a:lvl1pPr algn="ctr">
+            <a:lvl1pPr algn="l">
               <a:defRPr sz="1200">
                 <a:solidFill>
-                  <a:schemeClr val="tx2">
-                    <a:shade val="50000"/>
+                  <a:schemeClr val="tx1">
+                    <a:tint val="75000"/>
                   </a:schemeClr>
                 </a:solidFill>
               </a:defRPr>
@@ -3550,7 +2752,7 @@
           <a:p>
             <a:fld id="{4CA65DC9-25DB-4D45-A2C5-A87C7239C765}" type="datetimeFigureOut">
               <a:rPr lang="zh-TW" altLang="en-US" smtClean="0"/>
-              <a:t>2016/1/9</a:t>
+              <a:t>2026/4/24</a:t>
             </a:fld>
             <a:endParaRPr lang="zh-TW" altLang="en-US"/>
           </a:p>
@@ -3558,7 +2760,7 @@
       </p:sp>
       <p:sp>
         <p:nvSpPr>
-          <p:cNvPr id="22" name="Footer Placeholder 21"/>
+          <p:cNvPr id="5" name="頁尾版面配置區 4"/>
           <p:cNvSpPr>
             <a:spLocks noGrp="1"/>
           </p:cNvSpPr>
@@ -3568,21 +2770,21 @@
         </p:nvSpPr>
         <p:spPr>
           <a:xfrm>
-            <a:off x="2438400" y="6356350"/>
-            <a:ext cx="2895600" cy="365125"/>
+            <a:off x="4165600" y="6356353"/>
+            <a:ext cx="3860800" cy="365125"/>
           </a:xfrm>
           <a:prstGeom prst="rect">
             <a:avLst/>
           </a:prstGeom>
         </p:spPr>
         <p:txBody>
-          <a:bodyPr vert="horz" lIns="0" anchor="b"/>
+          <a:bodyPr vert="horz" lIns="91440" tIns="45720" rIns="91440" bIns="45720" rtlCol="0" anchor="ctr"/>
           <a:lstStyle>
-            <a:lvl1pPr algn="l">
+            <a:lvl1pPr algn="ctr">
               <a:defRPr sz="1200">
                 <a:solidFill>
-                  <a:schemeClr val="tx2">
-                    <a:shade val="50000"/>
+                  <a:schemeClr val="tx1">
+                    <a:tint val="75000"/>
                   </a:schemeClr>
                 </a:solidFill>
               </a:defRPr>
@@ -3595,7 +2797,7 @@
       </p:sp>
       <p:sp>
         <p:nvSpPr>
-          <p:cNvPr id="18" name="Slide Number Placeholder 17"/>
+          <p:cNvPr id="6" name="投影片編號版面配置區 5"/>
           <p:cNvSpPr>
             <a:spLocks noGrp="1"/>
           </p:cNvSpPr>
@@ -3605,21 +2807,21 @@
         </p:nvSpPr>
         <p:spPr>
           <a:xfrm>
-            <a:off x="8153400" y="6356350"/>
-            <a:ext cx="533400" cy="365125"/>
+            <a:off x="8737600" y="6356353"/>
+            <a:ext cx="2844800" cy="365125"/>
           </a:xfrm>
           <a:prstGeom prst="rect">
             <a:avLst/>
           </a:prstGeom>
         </p:spPr>
         <p:txBody>
-          <a:bodyPr vert="horz" lIns="91440" rIns="0" anchor="b"/>
+          <a:bodyPr vert="horz" lIns="91440" tIns="45720" rIns="91440" bIns="45720" rtlCol="0" anchor="ctr"/>
           <a:lstStyle>
             <a:lvl1pPr algn="r">
-              <a:defRPr sz="1400">
-                <a:solidFill>
-                  <a:schemeClr val="tx2">
-                    <a:shade val="50000"/>
+              <a:defRPr sz="1200">
+                <a:solidFill>
+                  <a:schemeClr val="tx1">
+                    <a:tint val="75000"/>
                   </a:schemeClr>
                 </a:solidFill>
               </a:defRPr>
@@ -3635,52 +2837,37 @@
         </p:txBody>
       </p:sp>
     </p:spTree>
+    <p:extLst>
+      <p:ext uri="{BB962C8B-B14F-4D97-AF65-F5344CB8AC3E}">
+        <p14:creationId xmlns:p14="http://schemas.microsoft.com/office/powerpoint/2010/main" val="1752424714"/>
+      </p:ext>
+    </p:extLst>
   </p:cSld>
-  <p:clrMap bg1="dk1" tx1="lt1" bg2="dk2" tx2="lt2" accent1="accent1" accent2="accent2" accent3="accent3" accent4="accent4" accent5="accent5" accent6="accent6" hlink="hlink" folHlink="folHlink"/>
+  <p:clrMap bg1="lt1" tx1="dk1" bg2="lt2" tx2="dk2" accent1="accent1" accent2="accent2" accent3="accent3" accent4="accent4" accent5="accent5" accent6="accent6" hlink="hlink" folHlink="folHlink"/>
   <p:sldLayoutIdLst>
-    <p:sldLayoutId id="2147483661" r:id="rId1"/>
-    <p:sldLayoutId id="2147483662" r:id="rId2"/>
-    <p:sldLayoutId id="2147483663" r:id="rId3"/>
-    <p:sldLayoutId id="2147483664" r:id="rId4"/>
-    <p:sldLayoutId id="2147483665" r:id="rId5"/>
-    <p:sldLayoutId id="2147483666" r:id="rId6"/>
-    <p:sldLayoutId id="2147483667" r:id="rId7"/>
-    <p:sldLayoutId id="2147483668" r:id="rId8"/>
-    <p:sldLayoutId id="2147483669" r:id="rId9"/>
-    <p:sldLayoutId id="2147483670" r:id="rId10"/>
-    <p:sldLayoutId id="2147483671" r:id="rId11"/>
+    <p:sldLayoutId id="2147483673" r:id="rId1"/>
+    <p:sldLayoutId id="2147483674" r:id="rId2"/>
+    <p:sldLayoutId id="2147483675" r:id="rId3"/>
+    <p:sldLayoutId id="2147483676" r:id="rId4"/>
+    <p:sldLayoutId id="2147483677" r:id="rId5"/>
+    <p:sldLayoutId id="2147483678" r:id="rId6"/>
+    <p:sldLayoutId id="2147483679" r:id="rId7"/>
+    <p:sldLayoutId id="2147483680" r:id="rId8"/>
+    <p:sldLayoutId id="2147483681" r:id="rId9"/>
+    <p:sldLayoutId id="2147483682" r:id="rId10"/>
+    <p:sldLayoutId id="2147483683" r:id="rId11"/>
   </p:sldLayoutIdLst>
   <p:txStyles>
     <p:titleStyle>
-      <a:lvl1pPr algn="l" rtl="0" eaLnBrk="1" latinLnBrk="0" hangingPunct="1">
+      <a:lvl1pPr algn="ctr" defTabSz="914400" rtl="0" eaLnBrk="1" latinLnBrk="0" hangingPunct="1">
         <a:spcBef>
           <a:spcPct val="0"/>
         </a:spcBef>
         <a:buNone/>
-        <a:defRPr sz="4800" b="1" kern="1200">
-          <a:ln w="500">
-            <a:solidFill>
-              <a:schemeClr val="tx2">
-                <a:shade val="20000"/>
-                <a:satMod val="350000"/>
-              </a:schemeClr>
-            </a:solidFill>
-          </a:ln>
+        <a:defRPr sz="4400" kern="1200">
           <a:solidFill>
-            <a:schemeClr val="tx2">
-              <a:tint val="100000"/>
-              <a:satMod val="250000"/>
-            </a:schemeClr>
+            <a:schemeClr val="tx1"/>
           </a:solidFill>
-          <a:effectLst>
-            <a:outerShdw blurRad="30000" dist="30000" dir="2700000" algn="tl" rotWithShape="0">
-              <a:schemeClr val="bg2">
-                <a:shade val="45000"/>
-                <a:satMod val="150000"/>
-                <a:alpha val="90000"/>
-              </a:schemeClr>
-            </a:outerShdw>
-          </a:effectLst>
           <a:latin typeface="+mj-lt"/>
           <a:ea typeface="+mj-ea"/>
           <a:cs typeface="+mj-cs"/>
@@ -3688,17 +2875,13 @@
       </a:lvl1pPr>
     </p:titleStyle>
     <p:bodyStyle>
-      <a:lvl1pPr marL="320040" indent="-320040" algn="l" rtl="0" eaLnBrk="1" latinLnBrk="0" hangingPunct="1">
+      <a:lvl1pPr marL="342900" indent="-342900" algn="l" defTabSz="914400" rtl="0" eaLnBrk="1" latinLnBrk="0" hangingPunct="1">
         <a:spcBef>
           <a:spcPct val="20000"/>
         </a:spcBef>
-        <a:buClr>
-          <a:schemeClr val="accent1"/>
-        </a:buClr>
-        <a:buSzPct val="70000"/>
-        <a:buFont typeface="Wingdings 2"/>
-        <a:buChar char=""/>
-        <a:defRPr sz="3000" kern="1200">
+        <a:buFont typeface="Arial" panose="02080604020202020204" pitchFamily="34" charset="0"/>
+        <a:buChar char="•"/>
+        <a:defRPr sz="3200" kern="1200">
           <a:solidFill>
             <a:schemeClr val="tx1"/>
           </a:solidFill>
@@ -3707,16 +2890,13 @@
           <a:cs typeface="+mn-cs"/>
         </a:defRPr>
       </a:lvl1pPr>
-      <a:lvl2pPr marL="630936" indent="-274320" algn="l" rtl="0" eaLnBrk="1" latinLnBrk="0" hangingPunct="1">
+      <a:lvl2pPr marL="742950" indent="-285750" algn="l" defTabSz="914400" rtl="0" eaLnBrk="1" latinLnBrk="0" hangingPunct="1">
         <a:spcBef>
           <a:spcPct val="20000"/>
         </a:spcBef>
-        <a:buClr>
-          <a:schemeClr val="accent2"/>
-        </a:buClr>
-        <a:buFont typeface="Wingdings 2"/>
-        <a:buChar char=""/>
-        <a:defRPr sz="2600" kern="1200">
+        <a:buFont typeface="Arial" panose="02080604020202020204" pitchFamily="34" charset="0"/>
+        <a:buChar char="–"/>
+        <a:defRPr sz="2800" kern="1200">
           <a:solidFill>
             <a:schemeClr val="tx1"/>
           </a:solidFill>
@@ -3725,15 +2905,12 @@
           <a:cs typeface="+mn-cs"/>
         </a:defRPr>
       </a:lvl2pPr>
-      <a:lvl3pPr marL="923544" indent="-274320" algn="l" rtl="0" eaLnBrk="1" latinLnBrk="0" hangingPunct="1">
+      <a:lvl3pPr marL="1143000" indent="-228600" algn="l" defTabSz="914400" rtl="0" eaLnBrk="1" latinLnBrk="0" hangingPunct="1">
         <a:spcBef>
           <a:spcPct val="20000"/>
         </a:spcBef>
-        <a:buClr>
-          <a:schemeClr val="accent3"/>
-        </a:buClr>
-        <a:buFont typeface="Wingdings 2"/>
-        <a:buChar char=""/>
+        <a:buFont typeface="Arial" panose="02080604020202020204" pitchFamily="34" charset="0"/>
+        <a:buChar char="•"/>
         <a:defRPr sz="2400" kern="1200">
           <a:solidFill>
             <a:schemeClr val="tx1"/>
@@ -3743,16 +2920,13 @@
           <a:cs typeface="+mn-cs"/>
         </a:defRPr>
       </a:lvl3pPr>
-      <a:lvl4pPr marL="1188720" indent="-228600" algn="l" rtl="0" eaLnBrk="1" latinLnBrk="0" hangingPunct="1">
+      <a:lvl4pPr marL="1600200" indent="-228600" algn="l" defTabSz="914400" rtl="0" eaLnBrk="1" latinLnBrk="0" hangingPunct="1">
         <a:spcBef>
           <a:spcPct val="20000"/>
         </a:spcBef>
-        <a:buClr>
-          <a:schemeClr val="accent4"/>
-        </a:buClr>
-        <a:buFont typeface="Wingdings 2"/>
-        <a:buChar char=""/>
-        <a:defRPr sz="2200" kern="1200">
+        <a:buFont typeface="Arial" panose="02080604020202020204" pitchFamily="34" charset="0"/>
+        <a:buChar char="–"/>
+        <a:defRPr sz="2000" kern="1200">
           <a:solidFill>
             <a:schemeClr val="tx1"/>
           </a:solidFill>
@@ -3761,15 +2935,12 @@
           <a:cs typeface="+mn-cs"/>
         </a:defRPr>
       </a:lvl4pPr>
-      <a:lvl5pPr marL="1426464" indent="-228600" algn="l" rtl="0" eaLnBrk="1" latinLnBrk="0" hangingPunct="1">
+      <a:lvl5pPr marL="2057400" indent="-228600" algn="l" defTabSz="914400" rtl="0" eaLnBrk="1" latinLnBrk="0" hangingPunct="1">
         <a:spcBef>
           <a:spcPct val="20000"/>
         </a:spcBef>
-        <a:buClr>
-          <a:schemeClr val="accent5"/>
-        </a:buClr>
-        <a:buFont typeface="Wingdings 2"/>
-        <a:buChar char=""/>
+        <a:buFont typeface="Arial" panose="02080604020202020204" pitchFamily="34" charset="0"/>
+        <a:buChar char="»"/>
         <a:defRPr sz="2000" kern="1200">
           <a:solidFill>
             <a:schemeClr val="tx1"/>
@@ -3779,16 +2950,13 @@
           <a:cs typeface="+mn-cs"/>
         </a:defRPr>
       </a:lvl5pPr>
-      <a:lvl6pPr marL="1673352" indent="-228600" algn="l" rtl="0" eaLnBrk="1" latinLnBrk="0" hangingPunct="1">
+      <a:lvl6pPr marL="2514600" indent="-228600" algn="l" defTabSz="914400" rtl="0" eaLnBrk="1" latinLnBrk="0" hangingPunct="1">
         <a:spcBef>
           <a:spcPct val="20000"/>
         </a:spcBef>
-        <a:buClr>
-          <a:schemeClr val="accent6"/>
-        </a:buClr>
-        <a:buFont typeface="Wingdings 2"/>
-        <a:buChar char=""/>
-        <a:defRPr sz="1800" kern="1200">
+        <a:buFont typeface="Arial" panose="02080604020202020204" pitchFamily="34" charset="0"/>
+        <a:buChar char="•"/>
+        <a:defRPr sz="2000" kern="1200">
           <a:solidFill>
             <a:schemeClr val="tx1"/>
           </a:solidFill>
@@ -3797,16 +2965,13 @@
           <a:cs typeface="+mn-cs"/>
         </a:defRPr>
       </a:lvl6pPr>
-      <a:lvl7pPr marL="1911096" indent="-228600" algn="l" rtl="0" eaLnBrk="1" latinLnBrk="0" hangingPunct="1">
+      <a:lvl7pPr marL="2971800" indent="-228600" algn="l" defTabSz="914400" rtl="0" eaLnBrk="1" latinLnBrk="0" hangingPunct="1">
         <a:spcBef>
           <a:spcPct val="20000"/>
         </a:spcBef>
-        <a:buClr>
-          <a:schemeClr val="tx2"/>
-        </a:buClr>
-        <a:buFont typeface="Wingdings 2"/>
-        <a:buChar char=""/>
-        <a:defRPr sz="1600" kern="1200">
+        <a:buFont typeface="Arial" panose="02080604020202020204" pitchFamily="34" charset="0"/>
+        <a:buChar char="•"/>
+        <a:defRPr sz="2000" kern="1200">
           <a:solidFill>
             <a:schemeClr val="tx1"/>
           </a:solidFill>
@@ -3815,16 +2980,13 @@
           <a:cs typeface="+mn-cs"/>
         </a:defRPr>
       </a:lvl7pPr>
-      <a:lvl8pPr marL="2121408" indent="-182880" algn="l" rtl="0" eaLnBrk="1" latinLnBrk="0" hangingPunct="1">
+      <a:lvl8pPr marL="3429000" indent="-228600" algn="l" defTabSz="914400" rtl="0" eaLnBrk="1" latinLnBrk="0" hangingPunct="1">
         <a:spcBef>
           <a:spcPct val="20000"/>
         </a:spcBef>
-        <a:buClr>
-          <a:schemeClr val="tx2"/>
-        </a:buClr>
-        <a:buFont typeface="Wingdings 2"/>
-        <a:buChar char=""/>
-        <a:defRPr sz="1400" kern="1200">
+        <a:buFont typeface="Arial" panose="02080604020202020204" pitchFamily="34" charset="0"/>
+        <a:buChar char="•"/>
+        <a:defRPr sz="2000" kern="1200">
           <a:solidFill>
             <a:schemeClr val="tx1"/>
           </a:solidFill>
@@ -3833,16 +2995,13 @@
           <a:cs typeface="+mn-cs"/>
         </a:defRPr>
       </a:lvl8pPr>
-      <a:lvl9pPr marL="2322576" indent="-182880" algn="l" rtl="0" eaLnBrk="1" latinLnBrk="0" hangingPunct="1">
+      <a:lvl9pPr marL="3886200" indent="-228600" algn="l" defTabSz="914400" rtl="0" eaLnBrk="1" latinLnBrk="0" hangingPunct="1">
         <a:spcBef>
           <a:spcPct val="20000"/>
         </a:spcBef>
-        <a:buClr>
-          <a:schemeClr val="tx2"/>
-        </a:buClr>
-        <a:buFont typeface="Wingdings 2"/>
-        <a:buChar char=""/>
-        <a:defRPr sz="1400" kern="1200">
+        <a:buFont typeface="Arial" panose="02080604020202020204" pitchFamily="34" charset="0"/>
+        <a:buChar char="•"/>
+        <a:defRPr sz="2000" kern="1200">
           <a:solidFill>
             <a:schemeClr val="tx1"/>
           </a:solidFill>
@@ -3853,8 +3012,11 @@
       </a:lvl9pPr>
     </p:bodyStyle>
     <p:otherStyle>
-      <a:lvl1pPr marL="0" algn="l" rtl="0" eaLnBrk="1" hangingPunct="1">
-        <a:defRPr kern="1200">
+      <a:defPPr>
+        <a:defRPr lang="zh-TW"/>
+      </a:defPPr>
+      <a:lvl1pPr marL="0" algn="l" defTabSz="914400" rtl="0" eaLnBrk="1" latinLnBrk="0" hangingPunct="1">
+        <a:defRPr sz="1800" kern="1200">
           <a:solidFill>
             <a:schemeClr val="tx1"/>
           </a:solidFill>
@@ -3863,8 +3025,8 @@
           <a:cs typeface="+mn-cs"/>
         </a:defRPr>
       </a:lvl1pPr>
-      <a:lvl2pPr marL="457200" algn="l" rtl="0" eaLnBrk="1" hangingPunct="1">
-        <a:defRPr kern="1200">
+      <a:lvl2pPr marL="457200" algn="l" defTabSz="914400" rtl="0" eaLnBrk="1" latinLnBrk="0" hangingPunct="1">
+        <a:defRPr sz="1800" kern="1200">
           <a:solidFill>
             <a:schemeClr val="tx1"/>
           </a:solidFill>
@@ -3873,8 +3035,8 @@
           <a:cs typeface="+mn-cs"/>
         </a:defRPr>
       </a:lvl2pPr>
-      <a:lvl3pPr marL="914400" algn="l" rtl="0" eaLnBrk="1" hangingPunct="1">
-        <a:defRPr kern="1200">
+      <a:lvl3pPr marL="914400" algn="l" defTabSz="914400" rtl="0" eaLnBrk="1" latinLnBrk="0" hangingPunct="1">
+        <a:defRPr sz="1800" kern="1200">
           <a:solidFill>
             <a:schemeClr val="tx1"/>
           </a:solidFill>
@@ -3883,8 +3045,8 @@
           <a:cs typeface="+mn-cs"/>
         </a:defRPr>
       </a:lvl3pPr>
-      <a:lvl4pPr marL="1371600" algn="l" rtl="0" eaLnBrk="1" hangingPunct="1">
-        <a:defRPr kern="1200">
+      <a:lvl4pPr marL="1371600" algn="l" defTabSz="914400" rtl="0" eaLnBrk="1" latinLnBrk="0" hangingPunct="1">
+        <a:defRPr sz="1800" kern="1200">
           <a:solidFill>
             <a:schemeClr val="tx1"/>
           </a:solidFill>
@@ -3893,8 +3055,8 @@
           <a:cs typeface="+mn-cs"/>
         </a:defRPr>
       </a:lvl4pPr>
-      <a:lvl5pPr marL="1828800" algn="l" rtl="0" eaLnBrk="1" hangingPunct="1">
-        <a:defRPr kern="1200">
+      <a:lvl5pPr marL="1828800" algn="l" defTabSz="914400" rtl="0" eaLnBrk="1" latinLnBrk="0" hangingPunct="1">
+        <a:defRPr sz="1800" kern="1200">
           <a:solidFill>
             <a:schemeClr val="tx1"/>
           </a:solidFill>
@@ -3903,8 +3065,8 @@
           <a:cs typeface="+mn-cs"/>
         </a:defRPr>
       </a:lvl5pPr>
-      <a:lvl6pPr marL="2286000" algn="l" rtl="0" eaLnBrk="1" hangingPunct="1">
-        <a:defRPr kern="1200">
+      <a:lvl6pPr marL="2286000" algn="l" defTabSz="914400" rtl="0" eaLnBrk="1" latinLnBrk="0" hangingPunct="1">
+        <a:defRPr sz="1800" kern="1200">
           <a:solidFill>
             <a:schemeClr val="tx1"/>
           </a:solidFill>
@@ -3913,8 +3075,8 @@
           <a:cs typeface="+mn-cs"/>
         </a:defRPr>
       </a:lvl6pPr>
-      <a:lvl7pPr marL="2743200" algn="l" rtl="0" eaLnBrk="1" hangingPunct="1">
-        <a:defRPr kern="1200">
+      <a:lvl7pPr marL="2743200" algn="l" defTabSz="914400" rtl="0" eaLnBrk="1" latinLnBrk="0" hangingPunct="1">
+        <a:defRPr sz="1800" kern="1200">
           <a:solidFill>
             <a:schemeClr val="tx1"/>
           </a:solidFill>
@@ -3923,8 +3085,8 @@
           <a:cs typeface="+mn-cs"/>
         </a:defRPr>
       </a:lvl7pPr>
-      <a:lvl8pPr marL="3200400" algn="l" rtl="0" eaLnBrk="1" hangingPunct="1">
-        <a:defRPr kern="1200">
+      <a:lvl8pPr marL="3200400" algn="l" defTabSz="914400" rtl="0" eaLnBrk="1" latinLnBrk="0" hangingPunct="1">
+        <a:defRPr sz="1800" kern="1200">
           <a:solidFill>
             <a:schemeClr val="tx1"/>
           </a:solidFill>
@@ -3933,8 +3095,8 @@
           <a:cs typeface="+mn-cs"/>
         </a:defRPr>
       </a:lvl8pPr>
-      <a:lvl9pPr marL="3657600" algn="l" rtl="0" eaLnBrk="1" hangingPunct="1">
-        <a:defRPr kern="1200">
+      <a:lvl9pPr marL="3657600" algn="l" defTabSz="914400" rtl="0" eaLnBrk="1" latinLnBrk="0" hangingPunct="1">
+        <a:defRPr sz="1800" kern="1200">
           <a:solidFill>
             <a:schemeClr val="tx1"/>
           </a:solidFill>
@@ -3967,7 +3129,7 @@
       </p:grpSpPr>
       <p:sp>
         <p:nvSpPr>
-          <p:cNvPr id="6" name="標題 5"/>
+          <p:cNvPr id="4" name="標題 3"/>
           <p:cNvSpPr>
             <a:spLocks noGrp="1"/>
           </p:cNvSpPr>
@@ -3975,21 +3137,78 @@
             <p:ph type="title"/>
           </p:nvPr>
         </p:nvSpPr>
-        <p:spPr/>
-        <p:txBody>
-          <a:bodyPr/>
-          <a:lstStyle/>
-          <a:p>
-            <a:r>
-              <a:rPr lang="zh-TW" altLang="en-US" dirty="0"/>
+        <p:spPr>
+          <a:xfrm>
+            <a:off x="0" y="2660915"/>
+            <a:ext cx="12192000" cy="1143000"/>
+          </a:xfrm>
+        </p:spPr>
+        <p:txBody>
+          <a:bodyPr>
+            <a:noAutofit/>
+          </a:bodyPr>
+          <a:lstStyle/>
+          <a:p>
+            <a:r>
+              <a:rPr lang="zh-TW" altLang="en-US" sz="7200" b="1" i="1" dirty="0">
+                <a:solidFill>
+                  <a:srgbClr val="660033"/>
+                </a:solidFill>
+                <a:effectLst>
+                  <a:outerShdw blurRad="38100" dist="38100" dir="2700000" algn="tl">
+                    <a:srgbClr val="000000">
+                      <a:alpha val="43137"/>
+                    </a:srgbClr>
+                  </a:outerShdw>
+                </a:effectLst>
+                <a:latin typeface="微軟正黑體" pitchFamily="34" charset="-120"/>
+                <a:ea typeface="微軟正黑體" pitchFamily="34" charset="-120"/>
+              </a:rPr>
               <a:t>像榮美川流</a:t>
             </a:r>
           </a:p>
         </p:txBody>
       </p:sp>
-      <p:sp>
-        <p:nvSpPr>
-          <p:cNvPr id="7" name="內容版面配置區 6"/>
+    </p:spTree>
+  </p:cSld>
+  <p:clrMapOvr>
+    <a:masterClrMapping/>
+  </p:clrMapOvr>
+</p:sld>
+</file>
+
+<file path=ppt/slides/slide10.xml><?xml version="1.0" encoding="utf-8"?>
+<p:sld xmlns:a="http://schemas.openxmlformats.org/drawingml/2006/main" xmlns:r="http://schemas.openxmlformats.org/officeDocument/2006/relationships" xmlns:p="http://schemas.openxmlformats.org/presentationml/2006/main">
+  <p:cSld>
+    <p:spTree>
+      <p:nvGrpSpPr>
+        <p:cNvPr id="1" name="">
+          <a:extLst>
+            <a:ext uri="{FF2B5EF4-FFF2-40B4-BE49-F238E27FC236}">
+              <a16:creationId xmlns:a16="http://schemas.microsoft.com/office/drawing/2014/main" id="{201EB90A-A61A-23CF-6E77-5FFFAD47EE7A}"/>
+            </a:ext>
+          </a:extLst>
+        </p:cNvPr>
+        <p:cNvGrpSpPr/>
+        <p:nvPr/>
+      </p:nvGrpSpPr>
+      <p:grpSpPr>
+        <a:xfrm>
+          <a:off x="0" y="0"/>
+          <a:ext cx="0" cy="0"/>
+          <a:chOff x="0" y="0"/>
+          <a:chExt cx="0" cy="0"/>
+        </a:xfrm>
+      </p:grpSpPr>
+      <p:sp>
+        <p:nvSpPr>
+          <p:cNvPr id="5" name="內容版面配置區 4">
+            <a:extLst>
+              <a:ext uri="{FF2B5EF4-FFF2-40B4-BE49-F238E27FC236}">
+                <a16:creationId xmlns:a16="http://schemas.microsoft.com/office/drawing/2014/main" id="{FB67AD82-AD9F-EC9D-1D9C-3678CDE474D4}"/>
+              </a:ext>
+            </a:extLst>
+          </p:cNvPr>
           <p:cNvSpPr>
             <a:spLocks noGrp="1"/>
           </p:cNvSpPr>
@@ -3997,23 +3216,50 @@
             <p:ph idx="1"/>
           </p:nvPr>
         </p:nvSpPr>
-        <p:spPr/>
-        <p:txBody>
-          <a:bodyPr>
+        <p:spPr>
+          <a:xfrm>
+            <a:off x="0" y="2084851"/>
+            <a:ext cx="12192000" cy="2404863"/>
+          </a:xfrm>
+        </p:spPr>
+        <p:txBody>
+          <a:bodyPr anchor="ctr">
             <a:normAutofit/>
           </a:bodyPr>
           <a:lstStyle/>
           <a:p>
-            <a:pPr lvl="0" algn="ctr">
+            <a:pPr algn="ctr">
               <a:buNone/>
             </a:pPr>
             <a:r>
-              <a:rPr lang="zh-TW" altLang="en-US" sz="5400" dirty="0"/>
-              <a:t>神完全的</a:t>
-            </a:r>
-            <a:r>
-              <a:rPr lang="zh-TW" altLang="en-US" sz="5400" dirty="0" smtClean="0"/>
-              <a:t>平安</a:t>
+              <a:rPr lang="zh-TW" altLang="en-US" sz="6400" b="1" dirty="0">
+                <a:solidFill>
+                  <a:srgbClr val="660033"/>
+                </a:solidFill>
+                <a:latin typeface="微軟正黑體" pitchFamily="34" charset="-120"/>
+                <a:ea typeface="微軟正黑體" pitchFamily="34" charset="-120"/>
+              </a:rPr>
+              <a:t>倚靠主耶和華</a:t>
+            </a:r>
+            <a:r>
+              <a:rPr lang="zh-CN" altLang="en-US" sz="6400" b="1" dirty="0">
+                <a:solidFill>
+                  <a:srgbClr val="660033"/>
+                </a:solidFill>
+                <a:latin typeface="微軟正黑體" pitchFamily="34" charset="-120"/>
+                <a:ea typeface="微軟正黑體" pitchFamily="34" charset="-120"/>
+              </a:rPr>
+              <a:t>　</a:t>
+            </a:r>
+            <a:r>
+              <a:rPr lang="zh-TW" altLang="en-US" sz="6400" b="1" dirty="0">
+                <a:solidFill>
+                  <a:srgbClr val="660033"/>
+                </a:solidFill>
+                <a:latin typeface="微軟正黑體" pitchFamily="34" charset="-120"/>
+                <a:ea typeface="微軟正黑體" pitchFamily="34" charset="-120"/>
+              </a:rPr>
+              <a:t>心靈得福祉</a:t>
             </a:r>
           </a:p>
           <a:p>
@@ -4021,35 +3267,44 @@
               <a:buNone/>
             </a:pPr>
             <a:r>
-              <a:rPr lang="zh-TW" altLang="en-US" sz="5400" dirty="0" smtClean="0"/>
-              <a:t>像榮美的川流</a:t>
-            </a:r>
-          </a:p>
-          <a:p>
-            <a:pPr algn="ctr">
-              <a:buNone/>
-            </a:pPr>
-            <a:r>
-              <a:rPr lang="zh-TW" altLang="en-US" sz="5400" dirty="0" smtClean="0"/>
-              <a:t>日</a:t>
-            </a:r>
-            <a:r>
-              <a:rPr lang="zh-TW" altLang="en-US" sz="5400" dirty="0"/>
-              <a:t>日向前湧進</a:t>
-            </a:r>
-          </a:p>
-          <a:p>
-            <a:pPr algn="ctr">
-              <a:buNone/>
-            </a:pPr>
-            <a:r>
-              <a:rPr lang="zh-TW" altLang="en-US" sz="5400" dirty="0"/>
-              <a:t>永遠盡無休</a:t>
+              <a:rPr lang="zh-TW" altLang="en-US" sz="6400" b="1" dirty="0">
+                <a:solidFill>
+                  <a:srgbClr val="660033"/>
+                </a:solidFill>
+                <a:latin typeface="微軟正黑體" pitchFamily="34" charset="-120"/>
+                <a:ea typeface="微軟正黑體" pitchFamily="34" charset="-120"/>
+              </a:rPr>
+              <a:t>祂的應許真實</a:t>
+            </a:r>
+            <a:r>
+              <a:rPr lang="zh-CN" altLang="en-US" sz="6400" b="1" dirty="0">
+                <a:solidFill>
+                  <a:srgbClr val="660033"/>
+                </a:solidFill>
+                <a:latin typeface="微軟正黑體" pitchFamily="34" charset="-120"/>
+                <a:ea typeface="微軟正黑體" pitchFamily="34" charset="-120"/>
+              </a:rPr>
+              <a:t>　</a:t>
+            </a:r>
+            <a:r>
+              <a:rPr lang="zh-TW" altLang="en-US" sz="6400" b="1" dirty="0">
+                <a:solidFill>
+                  <a:srgbClr val="660033"/>
+                </a:solidFill>
+                <a:latin typeface="微軟正黑體" pitchFamily="34" charset="-120"/>
+                <a:ea typeface="微軟正黑體" pitchFamily="34" charset="-120"/>
+              </a:rPr>
+              <a:t>你必得安息</a:t>
             </a:r>
           </a:p>
         </p:txBody>
       </p:sp>
     </p:spTree>
+    <p:extLst>
+      <p:ext uri="{BB962C8B-B14F-4D97-AF65-F5344CB8AC3E}">
+        <p14:creationId xmlns:p14="http://schemas.microsoft.com/office/powerpoint/2010/main" val="3963585740"/>
+      </p:ext>
+    </p:extLst>
   </p:cSld>
   <p:clrMapOvr>
     <a:masterClrMapping/>
@@ -4076,29 +3331,7 @@
       </p:grpSpPr>
       <p:sp>
         <p:nvSpPr>
-          <p:cNvPr id="6" name="標題 5"/>
-          <p:cNvSpPr>
-            <a:spLocks noGrp="1"/>
-          </p:cNvSpPr>
-          <p:nvPr>
-            <p:ph type="title"/>
-          </p:nvPr>
-        </p:nvSpPr>
-        <p:spPr/>
-        <p:txBody>
-          <a:bodyPr/>
-          <a:lstStyle/>
-          <a:p>
-            <a:r>
-              <a:rPr lang="zh-TW" altLang="en-US" dirty="0"/>
-              <a:t>像榮美川流</a:t>
-            </a:r>
-          </a:p>
-        </p:txBody>
-      </p:sp>
-      <p:sp>
-        <p:nvSpPr>
-          <p:cNvPr id="7" name="內容版面配置區 6"/>
+          <p:cNvPr id="5" name="內容版面配置區 4"/>
           <p:cNvSpPr>
             <a:spLocks noGrp="1"/>
           </p:cNvSpPr>
@@ -4106,9 +3339,14 @@
             <p:ph idx="1"/>
           </p:nvPr>
         </p:nvSpPr>
-        <p:spPr/>
-        <p:txBody>
-          <a:bodyPr>
+        <p:spPr>
+          <a:xfrm>
+            <a:off x="0" y="2084851"/>
+            <a:ext cx="12192000" cy="2404863"/>
+          </a:xfrm>
+        </p:spPr>
+        <p:txBody>
+          <a:bodyPr anchor="ctr">
             <a:normAutofit/>
           </a:bodyPr>
           <a:lstStyle/>
@@ -4117,36 +3355,133 @@
               <a:buNone/>
             </a:pPr>
             <a:r>
-              <a:rPr lang="zh-TW" altLang="en-US" sz="5400" dirty="0"/>
+              <a:rPr lang="zh-TW" altLang="en-US" sz="6400" b="1" dirty="0">
+                <a:solidFill>
+                  <a:srgbClr val="660033"/>
+                </a:solidFill>
+                <a:latin typeface="微軟正黑體" pitchFamily="34" charset="-120"/>
+                <a:ea typeface="微軟正黑體" pitchFamily="34" charset="-120"/>
+              </a:rPr>
               <a:t>神完全的平安</a:t>
             </a:r>
+            <a:r>
+              <a:rPr lang="zh-CN" altLang="en-US" sz="6400" b="1" dirty="0">
+                <a:solidFill>
+                  <a:srgbClr val="660033"/>
+                </a:solidFill>
+                <a:latin typeface="微軟正黑體" pitchFamily="34" charset="-120"/>
+                <a:ea typeface="微軟正黑體" pitchFamily="34" charset="-120"/>
+              </a:rPr>
+              <a:t>　</a:t>
+            </a:r>
+            <a:r>
+              <a:rPr lang="zh-TW" altLang="en-US" sz="6400" b="1" dirty="0">
+                <a:solidFill>
+                  <a:srgbClr val="660033"/>
+                </a:solidFill>
+                <a:latin typeface="微軟正黑體" pitchFamily="34" charset="-120"/>
+                <a:ea typeface="微軟正黑體" pitchFamily="34" charset="-120"/>
+              </a:rPr>
+              <a:t>像榮美川流</a:t>
+            </a:r>
           </a:p>
           <a:p>
             <a:pPr algn="ctr">
               <a:buNone/>
             </a:pPr>
             <a:r>
-              <a:rPr lang="zh-TW" altLang="en-US" sz="5400" dirty="0"/>
-              <a:t>愈久逾豐盛</a:t>
-            </a:r>
-          </a:p>
-          <a:p>
-            <a:pPr algn="ctr">
-              <a:buNone/>
-            </a:pPr>
-            <a:r>
-              <a:rPr lang="zh-TW" altLang="en-US" sz="5400" dirty="0"/>
-              <a:t>神完全的平安</a:t>
-            </a:r>
-          </a:p>
-          <a:p>
-            <a:pPr algn="ctr">
-              <a:buNone/>
-            </a:pPr>
-            <a:r>
-              <a:rPr lang="zh-TW" altLang="en-US" sz="5400" dirty="0"/>
-              <a:t>愈久逾深厚</a:t>
-            </a:r>
+              <a:rPr lang="zh-TW" altLang="en-US" sz="6400" b="1" dirty="0">
+                <a:solidFill>
+                  <a:srgbClr val="660033"/>
+                </a:solidFill>
+                <a:latin typeface="微軟正黑體" pitchFamily="34" charset="-120"/>
+                <a:ea typeface="微軟正黑體" pitchFamily="34" charset="-120"/>
+              </a:rPr>
+              <a:t>日日向前湧進</a:t>
+            </a:r>
+            <a:r>
+              <a:rPr lang="zh-CN" altLang="en-US" sz="6400" b="1" dirty="0">
+                <a:solidFill>
+                  <a:srgbClr val="660033"/>
+                </a:solidFill>
+                <a:latin typeface="微軟正黑體" pitchFamily="34" charset="-120"/>
+                <a:ea typeface="微軟正黑體" pitchFamily="34" charset="-120"/>
+              </a:rPr>
+              <a:t>　</a:t>
+            </a:r>
+            <a:r>
+              <a:rPr lang="zh-TW" altLang="en-US" sz="6400" b="1" dirty="0">
+                <a:solidFill>
+                  <a:srgbClr val="660033"/>
+                </a:solidFill>
+                <a:latin typeface="微軟正黑體" pitchFamily="34" charset="-120"/>
+                <a:ea typeface="微軟正黑體" pitchFamily="34" charset="-120"/>
+              </a:rPr>
+              <a:t>永無盡無休</a:t>
+            </a:r>
+          </a:p>
+        </p:txBody>
+      </p:sp>
+      <p:sp>
+        <p:nvSpPr>
+          <p:cNvPr id="3" name="TextBox 2"/>
+          <p:cNvSpPr txBox="1"/>
+          <p:nvPr/>
+        </p:nvSpPr>
+        <p:spPr>
+          <a:xfrm>
+            <a:off x="0" y="5157193"/>
+            <a:ext cx="12192000" cy="584775"/>
+          </a:xfrm>
+          <a:prstGeom prst="rect">
+            <a:avLst/>
+          </a:prstGeom>
+          <a:noFill/>
+        </p:spPr>
+        <p:txBody>
+          <a:bodyPr wrap="square" rtlCol="0">
+            <a:spAutoFit/>
+          </a:bodyPr>
+          <a:lstStyle/>
+          <a:p>
+            <a:pPr algn="ctr"/>
+            <a:r>
+              <a:rPr lang="en-US" sz="3200" b="1" dirty="0">
+                <a:solidFill>
+                  <a:srgbClr val="660033"/>
+                </a:solidFill>
+                <a:latin typeface="+mj-lt"/>
+                <a:ea typeface="Microsoft JhengHei" panose="020B0604030504040204" pitchFamily="34" charset="-120"/>
+              </a:rPr>
+              <a:t>( </a:t>
+            </a:r>
+            <a:r>
+              <a:rPr lang="en-US" altLang="zh-CN" sz="3200" b="1" dirty="0">
+                <a:solidFill>
+                  <a:srgbClr val="660033"/>
+                </a:solidFill>
+                <a:latin typeface="+mj-lt"/>
+                <a:ea typeface="Microsoft JhengHei" panose="020B0604030504040204" pitchFamily="34" charset="-120"/>
+              </a:rPr>
+              <a:t>1 / 3</a:t>
+            </a:r>
+            <a:r>
+              <a:rPr lang="en-US" sz="3200" b="1" dirty="0">
+                <a:solidFill>
+                  <a:srgbClr val="660033"/>
+                </a:solidFill>
+                <a:latin typeface="+mj-lt"/>
+                <a:ea typeface="Microsoft JhengHei" panose="020B0604030504040204" pitchFamily="34" charset="-120"/>
+              </a:rPr>
+              <a:t> )</a:t>
+            </a:r>
+            <a:endParaRPr lang="vi-VN" sz="3200" b="1" dirty="0">
+              <a:solidFill>
+                <a:srgbClr val="660033"/>
+              </a:solidFill>
+              <a:latin typeface="+mj-lt"/>
+              <a:ea typeface="Microsoft JhengHei" panose="020B0604030504040204" pitchFamily="34" charset="-120"/>
+            </a:endParaRPr>
           </a:p>
         </p:txBody>
       </p:sp>
@@ -4163,7 +3498,13 @@
   <p:cSld>
     <p:spTree>
       <p:nvGrpSpPr>
-        <p:cNvPr id="1" name=""/>
+        <p:cNvPr id="1" name="">
+          <a:extLst>
+            <a:ext uri="{FF2B5EF4-FFF2-40B4-BE49-F238E27FC236}">
+              <a16:creationId xmlns:a16="http://schemas.microsoft.com/office/drawing/2014/main" id="{BB8DD4D2-F3F5-C513-30AB-8551CBB2AE9D}"/>
+            </a:ext>
+          </a:extLst>
+        </p:cNvPr>
         <p:cNvGrpSpPr/>
         <p:nvPr/>
       </p:nvGrpSpPr>
@@ -4177,29 +3518,13 @@
       </p:grpSpPr>
       <p:sp>
         <p:nvSpPr>
-          <p:cNvPr id="6" name="標題 5"/>
-          <p:cNvSpPr>
-            <a:spLocks noGrp="1"/>
-          </p:cNvSpPr>
-          <p:nvPr>
-            <p:ph type="title"/>
-          </p:nvPr>
-        </p:nvSpPr>
-        <p:spPr/>
-        <p:txBody>
-          <a:bodyPr/>
-          <a:lstStyle/>
-          <a:p>
-            <a:r>
-              <a:rPr lang="zh-TW" altLang="en-US" dirty="0"/>
-              <a:t>像榮美川流</a:t>
-            </a:r>
-          </a:p>
-        </p:txBody>
-      </p:sp>
-      <p:sp>
-        <p:nvSpPr>
-          <p:cNvPr id="7" name="內容版面配置區 6"/>
+          <p:cNvPr id="5" name="內容版面配置區 4">
+            <a:extLst>
+              <a:ext uri="{FF2B5EF4-FFF2-40B4-BE49-F238E27FC236}">
+                <a16:creationId xmlns:a16="http://schemas.microsoft.com/office/drawing/2014/main" id="{D1931F10-86D8-16B3-C5A4-3E3E133ABB39}"/>
+              </a:ext>
+            </a:extLst>
+          </p:cNvPr>
           <p:cNvSpPr>
             <a:spLocks noGrp="1"/>
           </p:cNvSpPr>
@@ -4207,9 +3532,14 @@
             <p:ph idx="1"/>
           </p:nvPr>
         </p:nvSpPr>
-        <p:spPr/>
-        <p:txBody>
-          <a:bodyPr>
+        <p:spPr>
+          <a:xfrm>
+            <a:off x="0" y="2084851"/>
+            <a:ext cx="12192000" cy="2404863"/>
+          </a:xfrm>
+        </p:spPr>
+        <p:txBody>
+          <a:bodyPr anchor="ctr">
             <a:normAutofit/>
           </a:bodyPr>
           <a:lstStyle/>
@@ -4218,8 +3548,34 @@
               <a:buNone/>
             </a:pPr>
             <a:r>
-              <a:rPr lang="zh-TW" altLang="en-US" sz="5400" dirty="0"/>
-              <a:t>倚靠主耶和華</a:t>
+              <a:rPr lang="zh-TW" altLang="en-US" sz="6400" b="1" dirty="0">
+                <a:solidFill>
+                  <a:srgbClr val="660033"/>
+                </a:solidFill>
+                <a:latin typeface="微軟正黑體" pitchFamily="34" charset="-120"/>
+                <a:ea typeface="微軟正黑體" pitchFamily="34" charset="-120"/>
+              </a:rPr>
+              <a:t>神完全的平安</a:t>
+            </a:r>
+            <a:r>
+              <a:rPr lang="zh-CN" altLang="en-US" sz="6400" b="1" dirty="0">
+                <a:solidFill>
+                  <a:srgbClr val="660033"/>
+                </a:solidFill>
+                <a:latin typeface="微軟正黑體" pitchFamily="34" charset="-120"/>
+                <a:ea typeface="微軟正黑體" pitchFamily="34" charset="-120"/>
+              </a:rPr>
+              <a:t>　</a:t>
+            </a:r>
+            <a:r>
+              <a:rPr lang="zh-TW" altLang="en-US" sz="6400" b="1" dirty="0">
+                <a:solidFill>
+                  <a:srgbClr val="660033"/>
+                </a:solidFill>
+                <a:latin typeface="微軟正黑體" pitchFamily="34" charset="-120"/>
+                <a:ea typeface="微軟正黑體" pitchFamily="34" charset="-120"/>
+              </a:rPr>
+              <a:t>越久越豐盛</a:t>
             </a:r>
           </a:p>
           <a:p>
@@ -4227,31 +3583,113 @@
               <a:buNone/>
             </a:pPr>
             <a:r>
-              <a:rPr lang="zh-TW" altLang="en-US" sz="5400" dirty="0"/>
-              <a:t>心靈得福祉</a:t>
-            </a:r>
-          </a:p>
-          <a:p>
-            <a:pPr algn="ctr">
-              <a:buNone/>
-            </a:pPr>
-            <a:r>
-              <a:rPr lang="zh-TW" altLang="en-US" sz="5400" dirty="0"/>
-              <a:t>祂的應許真實</a:t>
-            </a:r>
-          </a:p>
-          <a:p>
-            <a:pPr algn="ctr">
-              <a:buNone/>
-            </a:pPr>
-            <a:r>
-              <a:rPr lang="zh-TW" altLang="en-US" sz="5400" dirty="0"/>
-              <a:t>你必得安息</a:t>
-            </a:r>
+              <a:rPr lang="zh-TW" altLang="en-US" sz="6400" b="1" dirty="0">
+                <a:solidFill>
+                  <a:srgbClr val="660033"/>
+                </a:solidFill>
+                <a:latin typeface="微軟正黑體" pitchFamily="34" charset="-120"/>
+                <a:ea typeface="微軟正黑體" pitchFamily="34" charset="-120"/>
+              </a:rPr>
+              <a:t>神完全的平安</a:t>
+            </a:r>
+            <a:r>
+              <a:rPr lang="zh-CN" altLang="en-US" sz="6400" b="1" dirty="0">
+                <a:solidFill>
+                  <a:srgbClr val="660033"/>
+                </a:solidFill>
+                <a:latin typeface="微軟正黑體" pitchFamily="34" charset="-120"/>
+                <a:ea typeface="微軟正黑體" pitchFamily="34" charset="-120"/>
+              </a:rPr>
+              <a:t>　</a:t>
+            </a:r>
+            <a:r>
+              <a:rPr lang="zh-TW" altLang="en-US" sz="6400" b="1" dirty="0">
+                <a:solidFill>
+                  <a:srgbClr val="660033"/>
+                </a:solidFill>
+                <a:latin typeface="微軟正黑體" pitchFamily="34" charset="-120"/>
+                <a:ea typeface="微軟正黑體" pitchFamily="34" charset="-120"/>
+              </a:rPr>
+              <a:t>越久越深厚</a:t>
+            </a:r>
+          </a:p>
+        </p:txBody>
+      </p:sp>
+      <p:sp>
+        <p:nvSpPr>
+          <p:cNvPr id="3" name="TextBox 2">
+            <a:extLst>
+              <a:ext uri="{FF2B5EF4-FFF2-40B4-BE49-F238E27FC236}">
+                <a16:creationId xmlns:a16="http://schemas.microsoft.com/office/drawing/2014/main" id="{4A162FAF-692C-DA26-8A60-AF00D8635BB8}"/>
+              </a:ext>
+            </a:extLst>
+          </p:cNvPr>
+          <p:cNvSpPr txBox="1"/>
+          <p:nvPr/>
+        </p:nvSpPr>
+        <p:spPr>
+          <a:xfrm>
+            <a:off x="0" y="5157193"/>
+            <a:ext cx="12192000" cy="584775"/>
+          </a:xfrm>
+          <a:prstGeom prst="rect">
+            <a:avLst/>
+          </a:prstGeom>
+          <a:noFill/>
+        </p:spPr>
+        <p:txBody>
+          <a:bodyPr wrap="square" rtlCol="0">
+            <a:spAutoFit/>
+          </a:bodyPr>
+          <a:lstStyle/>
+          <a:p>
+            <a:pPr algn="ctr"/>
+            <a:r>
+              <a:rPr lang="en-US" sz="3200" b="1" dirty="0">
+                <a:solidFill>
+                  <a:srgbClr val="660033"/>
+                </a:solidFill>
+                <a:latin typeface="+mj-lt"/>
+                <a:ea typeface="Microsoft JhengHei" panose="020B0604030504040204" pitchFamily="34" charset="-120"/>
+              </a:rPr>
+              <a:t>( </a:t>
+            </a:r>
+            <a:r>
+              <a:rPr lang="en-US" altLang="zh-CN" sz="3200" b="1" dirty="0">
+                <a:solidFill>
+                  <a:srgbClr val="660033"/>
+                </a:solidFill>
+                <a:latin typeface="+mj-lt"/>
+                <a:ea typeface="Microsoft JhengHei" panose="020B0604030504040204" pitchFamily="34" charset="-120"/>
+              </a:rPr>
+              <a:t>1 / 3</a:t>
+            </a:r>
+            <a:r>
+              <a:rPr lang="en-US" sz="3200" b="1" dirty="0">
+                <a:solidFill>
+                  <a:srgbClr val="660033"/>
+                </a:solidFill>
+                <a:latin typeface="+mj-lt"/>
+                <a:ea typeface="Microsoft JhengHei" panose="020B0604030504040204" pitchFamily="34" charset="-120"/>
+              </a:rPr>
+              <a:t> )</a:t>
+            </a:r>
+            <a:endParaRPr lang="vi-VN" sz="3200" b="1" dirty="0">
+              <a:solidFill>
+                <a:srgbClr val="660033"/>
+              </a:solidFill>
+              <a:latin typeface="+mj-lt"/>
+              <a:ea typeface="Microsoft JhengHei" panose="020B0604030504040204" pitchFamily="34" charset="-120"/>
+            </a:endParaRPr>
           </a:p>
         </p:txBody>
       </p:sp>
     </p:spTree>
+    <p:extLst>
+      <p:ext uri="{BB962C8B-B14F-4D97-AF65-F5344CB8AC3E}">
+        <p14:creationId xmlns:p14="http://schemas.microsoft.com/office/powerpoint/2010/main" val="1907469721"/>
+      </p:ext>
+    </p:extLst>
   </p:cSld>
   <p:clrMapOvr>
     <a:masterClrMapping/>
@@ -4264,7 +3702,13 @@
   <p:cSld>
     <p:spTree>
       <p:nvGrpSpPr>
-        <p:cNvPr id="1" name=""/>
+        <p:cNvPr id="1" name="">
+          <a:extLst>
+            <a:ext uri="{FF2B5EF4-FFF2-40B4-BE49-F238E27FC236}">
+              <a16:creationId xmlns:a16="http://schemas.microsoft.com/office/drawing/2014/main" id="{4383A1CF-A5F5-F345-C36C-EB928F30338E}"/>
+            </a:ext>
+          </a:extLst>
+        </p:cNvPr>
         <p:cNvGrpSpPr/>
         <p:nvPr/>
       </p:nvGrpSpPr>
@@ -4278,29 +3722,13 @@
       </p:grpSpPr>
       <p:sp>
         <p:nvSpPr>
-          <p:cNvPr id="6" name="標題 5"/>
-          <p:cNvSpPr>
-            <a:spLocks noGrp="1"/>
-          </p:cNvSpPr>
-          <p:nvPr>
-            <p:ph type="title"/>
-          </p:nvPr>
-        </p:nvSpPr>
-        <p:spPr/>
-        <p:txBody>
-          <a:bodyPr/>
-          <a:lstStyle/>
-          <a:p>
-            <a:r>
-              <a:rPr lang="zh-TW" altLang="en-US" dirty="0"/>
-              <a:t>像榮美川流</a:t>
-            </a:r>
-          </a:p>
-        </p:txBody>
-      </p:sp>
-      <p:sp>
-        <p:nvSpPr>
-          <p:cNvPr id="7" name="內容版面配置區 6"/>
+          <p:cNvPr id="5" name="內容版面配置區 4">
+            <a:extLst>
+              <a:ext uri="{FF2B5EF4-FFF2-40B4-BE49-F238E27FC236}">
+                <a16:creationId xmlns:a16="http://schemas.microsoft.com/office/drawing/2014/main" id="{609EBB1D-37BF-5EE1-DB36-1F1C6E4409F7}"/>
+              </a:ext>
+            </a:extLst>
+          </p:cNvPr>
           <p:cNvSpPr>
             <a:spLocks noGrp="1"/>
           </p:cNvSpPr>
@@ -4308,19 +3736,50 @@
             <p:ph idx="1"/>
           </p:nvPr>
         </p:nvSpPr>
-        <p:spPr/>
-        <p:txBody>
-          <a:bodyPr>
+        <p:spPr>
+          <a:xfrm>
+            <a:off x="0" y="2084851"/>
+            <a:ext cx="12192000" cy="2404863"/>
+          </a:xfrm>
+        </p:spPr>
+        <p:txBody>
+          <a:bodyPr anchor="ctr">
             <a:normAutofit/>
           </a:bodyPr>
           <a:lstStyle/>
           <a:p>
-            <a:pPr lvl="0" algn="ctr">
+            <a:pPr algn="ctr">
               <a:buNone/>
             </a:pPr>
             <a:r>
-              <a:rPr lang="zh-TW" altLang="en-US" sz="5400" dirty="0"/>
-              <a:t>藏在恩主手中</a:t>
+              <a:rPr lang="zh-TW" altLang="en-US" sz="6400" b="1" dirty="0">
+                <a:solidFill>
+                  <a:srgbClr val="660033"/>
+                </a:solidFill>
+                <a:latin typeface="微軟正黑體" pitchFamily="34" charset="-120"/>
+                <a:ea typeface="微軟正黑體" pitchFamily="34" charset="-120"/>
+              </a:rPr>
+              <a:t>倚靠主耶和華</a:t>
+            </a:r>
+            <a:r>
+              <a:rPr lang="zh-CN" altLang="en-US" sz="6400" b="1" dirty="0">
+                <a:solidFill>
+                  <a:srgbClr val="660033"/>
+                </a:solidFill>
+                <a:latin typeface="微軟正黑體" pitchFamily="34" charset="-120"/>
+                <a:ea typeface="微軟正黑體" pitchFamily="34" charset="-120"/>
+              </a:rPr>
+              <a:t>　</a:t>
+            </a:r>
+            <a:r>
+              <a:rPr lang="zh-TW" altLang="en-US" sz="6400" b="1" dirty="0">
+                <a:solidFill>
+                  <a:srgbClr val="660033"/>
+                </a:solidFill>
+                <a:latin typeface="微軟正黑體" pitchFamily="34" charset="-120"/>
+                <a:ea typeface="微軟正黑體" pitchFamily="34" charset="-120"/>
+              </a:rPr>
+              <a:t>心靈得福祉</a:t>
             </a:r>
           </a:p>
           <a:p>
@@ -4328,31 +3787,44 @@
               <a:buNone/>
             </a:pPr>
             <a:r>
-              <a:rPr lang="zh-TW" altLang="en-US" sz="5400" dirty="0"/>
-              <a:t>安穩又歡欣</a:t>
-            </a:r>
-          </a:p>
-          <a:p>
-            <a:pPr algn="ctr">
-              <a:buNone/>
-            </a:pPr>
-            <a:r>
-              <a:rPr lang="zh-TW" altLang="en-US" sz="5400" dirty="0"/>
-              <a:t>仇敵不能臨近</a:t>
-            </a:r>
-          </a:p>
-          <a:p>
-            <a:pPr algn="ctr">
-              <a:buNone/>
-            </a:pPr>
-            <a:r>
-              <a:rPr lang="zh-TW" altLang="en-US" sz="5400" dirty="0"/>
-              <a:t>惡勢不能侵</a:t>
+              <a:rPr lang="zh-TW" altLang="en-US" sz="6400" b="1" dirty="0">
+                <a:solidFill>
+                  <a:srgbClr val="660033"/>
+                </a:solidFill>
+                <a:latin typeface="微軟正黑體" pitchFamily="34" charset="-120"/>
+                <a:ea typeface="微軟正黑體" pitchFamily="34" charset="-120"/>
+              </a:rPr>
+              <a:t>祂的應許真實</a:t>
+            </a:r>
+            <a:r>
+              <a:rPr lang="zh-CN" altLang="en-US" sz="6400" b="1" dirty="0">
+                <a:solidFill>
+                  <a:srgbClr val="660033"/>
+                </a:solidFill>
+                <a:latin typeface="微軟正黑體" pitchFamily="34" charset="-120"/>
+                <a:ea typeface="微軟正黑體" pitchFamily="34" charset="-120"/>
+              </a:rPr>
+              <a:t>　</a:t>
+            </a:r>
+            <a:r>
+              <a:rPr lang="zh-TW" altLang="en-US" sz="6400" b="1" dirty="0">
+                <a:solidFill>
+                  <a:srgbClr val="660033"/>
+                </a:solidFill>
+                <a:latin typeface="微軟正黑體" pitchFamily="34" charset="-120"/>
+                <a:ea typeface="微軟正黑體" pitchFamily="34" charset="-120"/>
+              </a:rPr>
+              <a:t>你必得安息</a:t>
             </a:r>
           </a:p>
         </p:txBody>
       </p:sp>
     </p:spTree>
+    <p:extLst>
+      <p:ext uri="{BB962C8B-B14F-4D97-AF65-F5344CB8AC3E}">
+        <p14:creationId xmlns:p14="http://schemas.microsoft.com/office/powerpoint/2010/main" val="2311857095"/>
+      </p:ext>
+    </p:extLst>
   </p:cSld>
   <p:clrMapOvr>
     <a:masterClrMapping/>
@@ -4365,7 +3837,13 @@
   <p:cSld>
     <p:spTree>
       <p:nvGrpSpPr>
-        <p:cNvPr id="1" name=""/>
+        <p:cNvPr id="1" name="">
+          <a:extLst>
+            <a:ext uri="{FF2B5EF4-FFF2-40B4-BE49-F238E27FC236}">
+              <a16:creationId xmlns:a16="http://schemas.microsoft.com/office/drawing/2014/main" id="{85186040-9098-2AF3-27A1-FBF8D84169CD}"/>
+            </a:ext>
+          </a:extLst>
+        </p:cNvPr>
         <p:cNvGrpSpPr/>
         <p:nvPr/>
       </p:nvGrpSpPr>
@@ -4379,29 +3857,13 @@
       </p:grpSpPr>
       <p:sp>
         <p:nvSpPr>
-          <p:cNvPr id="6" name="標題 5"/>
-          <p:cNvSpPr>
-            <a:spLocks noGrp="1"/>
-          </p:cNvSpPr>
-          <p:nvPr>
-            <p:ph type="title"/>
-          </p:nvPr>
-        </p:nvSpPr>
-        <p:spPr/>
-        <p:txBody>
-          <a:bodyPr/>
-          <a:lstStyle/>
-          <a:p>
-            <a:r>
-              <a:rPr lang="zh-TW" altLang="en-US" dirty="0"/>
-              <a:t>像榮美川流</a:t>
-            </a:r>
-          </a:p>
-        </p:txBody>
-      </p:sp>
-      <p:sp>
-        <p:nvSpPr>
-          <p:cNvPr id="7" name="內容版面配置區 6"/>
+          <p:cNvPr id="5" name="內容版面配置區 4">
+            <a:extLst>
+              <a:ext uri="{FF2B5EF4-FFF2-40B4-BE49-F238E27FC236}">
+                <a16:creationId xmlns:a16="http://schemas.microsoft.com/office/drawing/2014/main" id="{48BE324C-CC56-D1B0-6B03-F4F78AF5F4D5}"/>
+              </a:ext>
+            </a:extLst>
+          </p:cNvPr>
           <p:cNvSpPr>
             <a:spLocks noGrp="1"/>
           </p:cNvSpPr>
@@ -4409,9 +3871,14 @@
             <p:ph idx="1"/>
           </p:nvPr>
         </p:nvSpPr>
-        <p:spPr/>
-        <p:txBody>
-          <a:bodyPr>
+        <p:spPr>
+          <a:xfrm>
+            <a:off x="0" y="2084851"/>
+            <a:ext cx="12192000" cy="2404863"/>
+          </a:xfrm>
+        </p:spPr>
+        <p:txBody>
+          <a:bodyPr anchor="ctr">
             <a:normAutofit/>
           </a:bodyPr>
           <a:lstStyle/>
@@ -4420,8 +3887,34 @@
               <a:buNone/>
             </a:pPr>
             <a:r>
-              <a:rPr lang="zh-TW" altLang="en-US" sz="5400" dirty="0"/>
-              <a:t>沒有一點掛慮</a:t>
+              <a:rPr lang="zh-TW" altLang="en-US" sz="6400" b="1" dirty="0">
+                <a:solidFill>
+                  <a:srgbClr val="660033"/>
+                </a:solidFill>
+                <a:latin typeface="微軟正黑體" pitchFamily="34" charset="-120"/>
+                <a:ea typeface="微軟正黑體" pitchFamily="34" charset="-120"/>
+              </a:rPr>
+              <a:t>藏在恩主手中</a:t>
+            </a:r>
+            <a:r>
+              <a:rPr lang="zh-CN" altLang="en-US" sz="6400" b="1" dirty="0">
+                <a:solidFill>
+                  <a:srgbClr val="660033"/>
+                </a:solidFill>
+                <a:latin typeface="微軟正黑體" pitchFamily="34" charset="-120"/>
+                <a:ea typeface="微軟正黑體" pitchFamily="34" charset="-120"/>
+              </a:rPr>
+              <a:t>　</a:t>
+            </a:r>
+            <a:r>
+              <a:rPr lang="zh-TW" altLang="en-US" sz="6400" b="1" dirty="0">
+                <a:solidFill>
+                  <a:srgbClr val="660033"/>
+                </a:solidFill>
+                <a:latin typeface="微軟正黑體" pitchFamily="34" charset="-120"/>
+                <a:ea typeface="微軟正黑體" pitchFamily="34" charset="-120"/>
+              </a:rPr>
+              <a:t>安穩又歡欣</a:t>
             </a:r>
           </a:p>
           <a:p>
@@ -4429,31 +3922,113 @@
               <a:buNone/>
             </a:pPr>
             <a:r>
-              <a:rPr lang="zh-TW" altLang="en-US" sz="5400" dirty="0"/>
-              <a:t>無些微憂愁</a:t>
-            </a:r>
-          </a:p>
-          <a:p>
-            <a:pPr algn="ctr">
-              <a:buNone/>
-            </a:pPr>
-            <a:r>
-              <a:rPr lang="zh-TW" altLang="en-US" sz="5400" dirty="0"/>
-              <a:t>沒有絲毫焦急</a:t>
-            </a:r>
-          </a:p>
-          <a:p>
-            <a:pPr algn="ctr">
-              <a:buNone/>
-            </a:pPr>
-            <a:r>
-              <a:rPr lang="zh-TW" altLang="en-US" sz="5400" dirty="0"/>
-              <a:t>騷擾我心頭</a:t>
-            </a:r>
+              <a:rPr lang="zh-TW" altLang="en-US" sz="6400" b="1" dirty="0">
+                <a:solidFill>
+                  <a:srgbClr val="660033"/>
+                </a:solidFill>
+                <a:latin typeface="微軟正黑體" pitchFamily="34" charset="-120"/>
+                <a:ea typeface="微軟正黑體" pitchFamily="34" charset="-120"/>
+              </a:rPr>
+              <a:t>仇敵不能臨近</a:t>
+            </a:r>
+            <a:r>
+              <a:rPr lang="zh-CN" altLang="en-US" sz="6400" b="1" dirty="0">
+                <a:solidFill>
+                  <a:srgbClr val="660033"/>
+                </a:solidFill>
+                <a:latin typeface="微軟正黑體" pitchFamily="34" charset="-120"/>
+                <a:ea typeface="微軟正黑體" pitchFamily="34" charset="-120"/>
+              </a:rPr>
+              <a:t>　</a:t>
+            </a:r>
+            <a:r>
+              <a:rPr lang="zh-TW" altLang="en-US" sz="6400" b="1" dirty="0">
+                <a:solidFill>
+                  <a:srgbClr val="660033"/>
+                </a:solidFill>
+                <a:latin typeface="微軟正黑體" pitchFamily="34" charset="-120"/>
+                <a:ea typeface="微軟正黑體" pitchFamily="34" charset="-120"/>
+              </a:rPr>
+              <a:t>惡勢不能侵</a:t>
+            </a:r>
+          </a:p>
+        </p:txBody>
+      </p:sp>
+      <p:sp>
+        <p:nvSpPr>
+          <p:cNvPr id="3" name="TextBox 2">
+            <a:extLst>
+              <a:ext uri="{FF2B5EF4-FFF2-40B4-BE49-F238E27FC236}">
+                <a16:creationId xmlns:a16="http://schemas.microsoft.com/office/drawing/2014/main" id="{49F6DD08-5F5F-3BE5-6629-72543A6A7E6A}"/>
+              </a:ext>
+            </a:extLst>
+          </p:cNvPr>
+          <p:cNvSpPr txBox="1"/>
+          <p:nvPr/>
+        </p:nvSpPr>
+        <p:spPr>
+          <a:xfrm>
+            <a:off x="0" y="5157193"/>
+            <a:ext cx="12192000" cy="584775"/>
+          </a:xfrm>
+          <a:prstGeom prst="rect">
+            <a:avLst/>
+          </a:prstGeom>
+          <a:noFill/>
+        </p:spPr>
+        <p:txBody>
+          <a:bodyPr wrap="square" rtlCol="0">
+            <a:spAutoFit/>
+          </a:bodyPr>
+          <a:lstStyle/>
+          <a:p>
+            <a:pPr algn="ctr"/>
+            <a:r>
+              <a:rPr lang="en-US" sz="3200" b="1" dirty="0">
+                <a:solidFill>
+                  <a:srgbClr val="660033"/>
+                </a:solidFill>
+                <a:latin typeface="+mj-lt"/>
+                <a:ea typeface="Microsoft JhengHei" panose="020B0604030504040204" pitchFamily="34" charset="-120"/>
+              </a:rPr>
+              <a:t>( </a:t>
+            </a:r>
+            <a:r>
+              <a:rPr lang="en-US" altLang="zh-CN" sz="3200" b="1" dirty="0">
+                <a:solidFill>
+                  <a:srgbClr val="660033"/>
+                </a:solidFill>
+                <a:latin typeface="+mj-lt"/>
+                <a:ea typeface="Microsoft JhengHei" panose="020B0604030504040204" pitchFamily="34" charset="-120"/>
+              </a:rPr>
+              <a:t>2 / 3</a:t>
+            </a:r>
+            <a:r>
+              <a:rPr lang="en-US" sz="3200" b="1" dirty="0">
+                <a:solidFill>
+                  <a:srgbClr val="660033"/>
+                </a:solidFill>
+                <a:latin typeface="+mj-lt"/>
+                <a:ea typeface="Microsoft JhengHei" panose="020B0604030504040204" pitchFamily="34" charset="-120"/>
+              </a:rPr>
+              <a:t> )</a:t>
+            </a:r>
+            <a:endParaRPr lang="vi-VN" sz="3200" b="1" dirty="0">
+              <a:solidFill>
+                <a:srgbClr val="660033"/>
+              </a:solidFill>
+              <a:latin typeface="+mj-lt"/>
+              <a:ea typeface="Microsoft JhengHei" panose="020B0604030504040204" pitchFamily="34" charset="-120"/>
+            </a:endParaRPr>
           </a:p>
         </p:txBody>
       </p:sp>
     </p:spTree>
+    <p:extLst>
+      <p:ext uri="{BB962C8B-B14F-4D97-AF65-F5344CB8AC3E}">
+        <p14:creationId xmlns:p14="http://schemas.microsoft.com/office/powerpoint/2010/main" val="763486025"/>
+      </p:ext>
+    </p:extLst>
   </p:cSld>
   <p:clrMapOvr>
     <a:masterClrMapping/>
@@ -4466,7 +4041,13 @@
   <p:cSld>
     <p:spTree>
       <p:nvGrpSpPr>
-        <p:cNvPr id="1" name=""/>
+        <p:cNvPr id="1" name="">
+          <a:extLst>
+            <a:ext uri="{FF2B5EF4-FFF2-40B4-BE49-F238E27FC236}">
+              <a16:creationId xmlns:a16="http://schemas.microsoft.com/office/drawing/2014/main" id="{EC106AD0-A43B-D5F1-CDA4-9ACE7175B828}"/>
+            </a:ext>
+          </a:extLst>
+        </p:cNvPr>
         <p:cNvGrpSpPr/>
         <p:nvPr/>
       </p:nvGrpSpPr>
@@ -4480,29 +4061,13 @@
       </p:grpSpPr>
       <p:sp>
         <p:nvSpPr>
-          <p:cNvPr id="6" name="標題 5"/>
-          <p:cNvSpPr>
-            <a:spLocks noGrp="1"/>
-          </p:cNvSpPr>
-          <p:nvPr>
-            <p:ph type="title"/>
-          </p:nvPr>
-        </p:nvSpPr>
-        <p:spPr/>
-        <p:txBody>
-          <a:bodyPr/>
-          <a:lstStyle/>
-          <a:p>
-            <a:r>
-              <a:rPr lang="zh-TW" altLang="en-US" dirty="0"/>
-              <a:t>像榮美川流</a:t>
-            </a:r>
-          </a:p>
-        </p:txBody>
-      </p:sp>
-      <p:sp>
-        <p:nvSpPr>
-          <p:cNvPr id="7" name="內容版面配置區 6"/>
+          <p:cNvPr id="5" name="內容版面配置區 4">
+            <a:extLst>
+              <a:ext uri="{FF2B5EF4-FFF2-40B4-BE49-F238E27FC236}">
+                <a16:creationId xmlns:a16="http://schemas.microsoft.com/office/drawing/2014/main" id="{9FD1AF9B-5784-7CB7-4438-3A15417C7EE4}"/>
+              </a:ext>
+            </a:extLst>
+          </p:cNvPr>
           <p:cNvSpPr>
             <a:spLocks noGrp="1"/>
           </p:cNvSpPr>
@@ -4510,9 +4075,14 @@
             <p:ph idx="1"/>
           </p:nvPr>
         </p:nvSpPr>
-        <p:spPr/>
-        <p:txBody>
-          <a:bodyPr>
+        <p:spPr>
+          <a:xfrm>
+            <a:off x="0" y="2084851"/>
+            <a:ext cx="12192000" cy="2404863"/>
+          </a:xfrm>
+        </p:spPr>
+        <p:txBody>
+          <a:bodyPr anchor="ctr">
             <a:normAutofit/>
           </a:bodyPr>
           <a:lstStyle/>
@@ -4521,8 +4091,34 @@
               <a:buNone/>
             </a:pPr>
             <a:r>
-              <a:rPr lang="zh-TW" altLang="en-US" sz="5400" dirty="0"/>
-              <a:t>倚靠主耶和華</a:t>
+              <a:rPr lang="zh-TW" altLang="en-US" sz="6400" b="1" dirty="0">
+                <a:solidFill>
+                  <a:srgbClr val="660033"/>
+                </a:solidFill>
+                <a:latin typeface="微軟正黑體" pitchFamily="34" charset="-120"/>
+                <a:ea typeface="微軟正黑體" pitchFamily="34" charset="-120"/>
+              </a:rPr>
+              <a:t>沒有一點掛慮</a:t>
+            </a:r>
+            <a:r>
+              <a:rPr lang="zh-CN" altLang="en-US" sz="6400" b="1" dirty="0">
+                <a:solidFill>
+                  <a:srgbClr val="660033"/>
+                </a:solidFill>
+                <a:latin typeface="微軟正黑體" pitchFamily="34" charset="-120"/>
+                <a:ea typeface="微軟正黑體" pitchFamily="34" charset="-120"/>
+              </a:rPr>
+              <a:t>　</a:t>
+            </a:r>
+            <a:r>
+              <a:rPr lang="zh-TW" altLang="en-US" sz="6400" b="1" dirty="0">
+                <a:solidFill>
+                  <a:srgbClr val="660033"/>
+                </a:solidFill>
+                <a:latin typeface="微軟正黑體" pitchFamily="34" charset="-120"/>
+                <a:ea typeface="微軟正黑體" pitchFamily="34" charset="-120"/>
+              </a:rPr>
+              <a:t>無些微憂愁</a:t>
             </a:r>
           </a:p>
           <a:p>
@@ -4530,31 +4126,113 @@
               <a:buNone/>
             </a:pPr>
             <a:r>
-              <a:rPr lang="zh-TW" altLang="en-US" sz="5400" dirty="0"/>
-              <a:t>心靈得福祉</a:t>
-            </a:r>
-          </a:p>
-          <a:p>
-            <a:pPr algn="ctr">
-              <a:buNone/>
-            </a:pPr>
-            <a:r>
-              <a:rPr lang="zh-TW" altLang="en-US" sz="5400" dirty="0"/>
-              <a:t>祂的應許真實</a:t>
-            </a:r>
-          </a:p>
-          <a:p>
-            <a:pPr algn="ctr">
-              <a:buNone/>
-            </a:pPr>
-            <a:r>
-              <a:rPr lang="zh-TW" altLang="en-US" sz="5400" dirty="0"/>
-              <a:t>你必得安息</a:t>
-            </a:r>
+              <a:rPr lang="zh-TW" altLang="en-US" sz="6400" b="1" dirty="0">
+                <a:solidFill>
+                  <a:srgbClr val="660033"/>
+                </a:solidFill>
+                <a:latin typeface="微軟正黑體" pitchFamily="34" charset="-120"/>
+                <a:ea typeface="微軟正黑體" pitchFamily="34" charset="-120"/>
+              </a:rPr>
+              <a:t>沒有絲毫焦急</a:t>
+            </a:r>
+            <a:r>
+              <a:rPr lang="zh-CN" altLang="en-US" sz="6400" b="1" dirty="0">
+                <a:solidFill>
+                  <a:srgbClr val="660033"/>
+                </a:solidFill>
+                <a:latin typeface="微軟正黑體" pitchFamily="34" charset="-120"/>
+                <a:ea typeface="微軟正黑體" pitchFamily="34" charset="-120"/>
+              </a:rPr>
+              <a:t>　</a:t>
+            </a:r>
+            <a:r>
+              <a:rPr lang="zh-TW" altLang="en-US" sz="6400" b="1" dirty="0">
+                <a:solidFill>
+                  <a:srgbClr val="660033"/>
+                </a:solidFill>
+                <a:latin typeface="微軟正黑體" pitchFamily="34" charset="-120"/>
+                <a:ea typeface="微軟正黑體" pitchFamily="34" charset="-120"/>
+              </a:rPr>
+              <a:t>騷擾我心頭</a:t>
+            </a:r>
+          </a:p>
+        </p:txBody>
+      </p:sp>
+      <p:sp>
+        <p:nvSpPr>
+          <p:cNvPr id="3" name="TextBox 2">
+            <a:extLst>
+              <a:ext uri="{FF2B5EF4-FFF2-40B4-BE49-F238E27FC236}">
+                <a16:creationId xmlns:a16="http://schemas.microsoft.com/office/drawing/2014/main" id="{298E2F60-7F58-3478-21D3-2254BF5348F7}"/>
+              </a:ext>
+            </a:extLst>
+          </p:cNvPr>
+          <p:cNvSpPr txBox="1"/>
+          <p:nvPr/>
+        </p:nvSpPr>
+        <p:spPr>
+          <a:xfrm>
+            <a:off x="0" y="5157193"/>
+            <a:ext cx="12192000" cy="584775"/>
+          </a:xfrm>
+          <a:prstGeom prst="rect">
+            <a:avLst/>
+          </a:prstGeom>
+          <a:noFill/>
+        </p:spPr>
+        <p:txBody>
+          <a:bodyPr wrap="square" rtlCol="0">
+            <a:spAutoFit/>
+          </a:bodyPr>
+          <a:lstStyle/>
+          <a:p>
+            <a:pPr algn="ctr"/>
+            <a:r>
+              <a:rPr lang="en-US" sz="3200" b="1" dirty="0">
+                <a:solidFill>
+                  <a:srgbClr val="660033"/>
+                </a:solidFill>
+                <a:latin typeface="+mj-lt"/>
+                <a:ea typeface="Microsoft JhengHei" panose="020B0604030504040204" pitchFamily="34" charset="-120"/>
+              </a:rPr>
+              <a:t>( </a:t>
+            </a:r>
+            <a:r>
+              <a:rPr lang="en-US" altLang="zh-CN" sz="3200" b="1" dirty="0">
+                <a:solidFill>
+                  <a:srgbClr val="660033"/>
+                </a:solidFill>
+                <a:latin typeface="+mj-lt"/>
+                <a:ea typeface="Microsoft JhengHei" panose="020B0604030504040204" pitchFamily="34" charset="-120"/>
+              </a:rPr>
+              <a:t>2 / 3</a:t>
+            </a:r>
+            <a:r>
+              <a:rPr lang="en-US" sz="3200" b="1" dirty="0">
+                <a:solidFill>
+                  <a:srgbClr val="660033"/>
+                </a:solidFill>
+                <a:latin typeface="+mj-lt"/>
+                <a:ea typeface="Microsoft JhengHei" panose="020B0604030504040204" pitchFamily="34" charset="-120"/>
+              </a:rPr>
+              <a:t> )</a:t>
+            </a:r>
+            <a:endParaRPr lang="vi-VN" sz="3200" b="1" dirty="0">
+              <a:solidFill>
+                <a:srgbClr val="660033"/>
+              </a:solidFill>
+              <a:latin typeface="+mj-lt"/>
+              <a:ea typeface="Microsoft JhengHei" panose="020B0604030504040204" pitchFamily="34" charset="-120"/>
+            </a:endParaRPr>
           </a:p>
         </p:txBody>
       </p:sp>
     </p:spTree>
+    <p:extLst>
+      <p:ext uri="{BB962C8B-B14F-4D97-AF65-F5344CB8AC3E}">
+        <p14:creationId xmlns:p14="http://schemas.microsoft.com/office/powerpoint/2010/main" val="3818696958"/>
+      </p:ext>
+    </p:extLst>
   </p:cSld>
   <p:clrMapOvr>
     <a:masterClrMapping/>
@@ -4567,7 +4245,13 @@
   <p:cSld>
     <p:spTree>
       <p:nvGrpSpPr>
-        <p:cNvPr id="1" name=""/>
+        <p:cNvPr id="1" name="">
+          <a:extLst>
+            <a:ext uri="{FF2B5EF4-FFF2-40B4-BE49-F238E27FC236}">
+              <a16:creationId xmlns:a16="http://schemas.microsoft.com/office/drawing/2014/main" id="{B9CEC587-D90E-6205-AF87-9380811BA2FF}"/>
+            </a:ext>
+          </a:extLst>
+        </p:cNvPr>
         <p:cNvGrpSpPr/>
         <p:nvPr/>
       </p:nvGrpSpPr>
@@ -4581,29 +4265,13 @@
       </p:grpSpPr>
       <p:sp>
         <p:nvSpPr>
-          <p:cNvPr id="6" name="標題 5"/>
-          <p:cNvSpPr>
-            <a:spLocks noGrp="1"/>
-          </p:cNvSpPr>
-          <p:nvPr>
-            <p:ph type="title"/>
-          </p:nvPr>
-        </p:nvSpPr>
-        <p:spPr/>
-        <p:txBody>
-          <a:bodyPr/>
-          <a:lstStyle/>
-          <a:p>
-            <a:r>
-              <a:rPr lang="zh-TW" altLang="en-US" dirty="0"/>
-              <a:t>像榮美川流</a:t>
-            </a:r>
-          </a:p>
-        </p:txBody>
-      </p:sp>
-      <p:sp>
-        <p:nvSpPr>
-          <p:cNvPr id="7" name="內容版面配置區 6"/>
+          <p:cNvPr id="5" name="內容版面配置區 4">
+            <a:extLst>
+              <a:ext uri="{FF2B5EF4-FFF2-40B4-BE49-F238E27FC236}">
+                <a16:creationId xmlns:a16="http://schemas.microsoft.com/office/drawing/2014/main" id="{0EEAC86D-F2EC-042A-AB6C-51CDC6B4D7EE}"/>
+              </a:ext>
+            </a:extLst>
+          </p:cNvPr>
           <p:cNvSpPr>
             <a:spLocks noGrp="1"/>
           </p:cNvSpPr>
@@ -4611,19 +4279,50 @@
             <p:ph idx="1"/>
           </p:nvPr>
         </p:nvSpPr>
-        <p:spPr/>
-        <p:txBody>
-          <a:bodyPr>
+        <p:spPr>
+          <a:xfrm>
+            <a:off x="0" y="2084851"/>
+            <a:ext cx="12192000" cy="2404863"/>
+          </a:xfrm>
+        </p:spPr>
+        <p:txBody>
+          <a:bodyPr anchor="ctr">
             <a:normAutofit/>
           </a:bodyPr>
           <a:lstStyle/>
           <a:p>
-            <a:pPr lvl="0" algn="ctr">
+            <a:pPr algn="ctr">
               <a:buNone/>
             </a:pPr>
             <a:r>
-              <a:rPr lang="zh-TW" altLang="en-US" sz="5400" dirty="0"/>
-              <a:t>不論喜樂試煉</a:t>
+              <a:rPr lang="zh-TW" altLang="en-US" sz="6400" b="1" dirty="0">
+                <a:solidFill>
+                  <a:srgbClr val="660033"/>
+                </a:solidFill>
+                <a:latin typeface="微軟正黑體" pitchFamily="34" charset="-120"/>
+                <a:ea typeface="微軟正黑體" pitchFamily="34" charset="-120"/>
+              </a:rPr>
+              <a:t>倚靠主耶和華</a:t>
+            </a:r>
+            <a:r>
+              <a:rPr lang="zh-CN" altLang="en-US" sz="6400" b="1" dirty="0">
+                <a:solidFill>
+                  <a:srgbClr val="660033"/>
+                </a:solidFill>
+                <a:latin typeface="微軟正黑體" pitchFamily="34" charset="-120"/>
+                <a:ea typeface="微軟正黑體" pitchFamily="34" charset="-120"/>
+              </a:rPr>
+              <a:t>　</a:t>
+            </a:r>
+            <a:r>
+              <a:rPr lang="zh-TW" altLang="en-US" sz="6400" b="1" dirty="0">
+                <a:solidFill>
+                  <a:srgbClr val="660033"/>
+                </a:solidFill>
+                <a:latin typeface="微軟正黑體" pitchFamily="34" charset="-120"/>
+                <a:ea typeface="微軟正黑體" pitchFamily="34" charset="-120"/>
+              </a:rPr>
+              <a:t>心靈得福祉</a:t>
             </a:r>
           </a:p>
           <a:p>
@@ -4631,31 +4330,44 @@
               <a:buNone/>
             </a:pPr>
             <a:r>
-              <a:rPr lang="zh-TW" altLang="en-US" sz="5400" dirty="0"/>
-              <a:t>是從上主來</a:t>
-            </a:r>
-          </a:p>
-          <a:p>
-            <a:pPr algn="ctr">
-              <a:buNone/>
-            </a:pPr>
-            <a:r>
-              <a:rPr lang="zh-TW" altLang="en-US" sz="5400" dirty="0"/>
-              <a:t>每時刻的遭遇</a:t>
-            </a:r>
-          </a:p>
-          <a:p>
-            <a:pPr algn="ctr">
-              <a:buNone/>
-            </a:pPr>
-            <a:r>
-              <a:rPr lang="zh-TW" altLang="en-US" sz="5400" dirty="0"/>
-              <a:t>都有主慈愛</a:t>
+              <a:rPr lang="zh-TW" altLang="en-US" sz="6400" b="1" dirty="0">
+                <a:solidFill>
+                  <a:srgbClr val="660033"/>
+                </a:solidFill>
+                <a:latin typeface="微軟正黑體" pitchFamily="34" charset="-120"/>
+                <a:ea typeface="微軟正黑體" pitchFamily="34" charset="-120"/>
+              </a:rPr>
+              <a:t>祂的應許真實</a:t>
+            </a:r>
+            <a:r>
+              <a:rPr lang="zh-CN" altLang="en-US" sz="6400" b="1" dirty="0">
+                <a:solidFill>
+                  <a:srgbClr val="660033"/>
+                </a:solidFill>
+                <a:latin typeface="微軟正黑體" pitchFamily="34" charset="-120"/>
+                <a:ea typeface="微軟正黑體" pitchFamily="34" charset="-120"/>
+              </a:rPr>
+              <a:t>　</a:t>
+            </a:r>
+            <a:r>
+              <a:rPr lang="zh-TW" altLang="en-US" sz="6400" b="1" dirty="0">
+                <a:solidFill>
+                  <a:srgbClr val="660033"/>
+                </a:solidFill>
+                <a:latin typeface="微軟正黑體" pitchFamily="34" charset="-120"/>
+                <a:ea typeface="微軟正黑體" pitchFamily="34" charset="-120"/>
+              </a:rPr>
+              <a:t>你必得安息</a:t>
             </a:r>
           </a:p>
         </p:txBody>
       </p:sp>
     </p:spTree>
+    <p:extLst>
+      <p:ext uri="{BB962C8B-B14F-4D97-AF65-F5344CB8AC3E}">
+        <p14:creationId xmlns:p14="http://schemas.microsoft.com/office/powerpoint/2010/main" val="1279523241"/>
+      </p:ext>
+    </p:extLst>
   </p:cSld>
   <p:clrMapOvr>
     <a:masterClrMapping/>
@@ -4668,7 +4380,13 @@
   <p:cSld>
     <p:spTree>
       <p:nvGrpSpPr>
-        <p:cNvPr id="1" name=""/>
+        <p:cNvPr id="1" name="">
+          <a:extLst>
+            <a:ext uri="{FF2B5EF4-FFF2-40B4-BE49-F238E27FC236}">
+              <a16:creationId xmlns:a16="http://schemas.microsoft.com/office/drawing/2014/main" id="{C808220B-98B4-C071-E9C9-FB18A0209E1F}"/>
+            </a:ext>
+          </a:extLst>
+        </p:cNvPr>
         <p:cNvGrpSpPr/>
         <p:nvPr/>
       </p:nvGrpSpPr>
@@ -4682,29 +4400,13 @@
       </p:grpSpPr>
       <p:sp>
         <p:nvSpPr>
-          <p:cNvPr id="6" name="標題 5"/>
-          <p:cNvSpPr>
-            <a:spLocks noGrp="1"/>
-          </p:cNvSpPr>
-          <p:nvPr>
-            <p:ph type="title"/>
-          </p:nvPr>
-        </p:nvSpPr>
-        <p:spPr/>
-        <p:txBody>
-          <a:bodyPr/>
-          <a:lstStyle/>
-          <a:p>
-            <a:r>
-              <a:rPr lang="zh-TW" altLang="en-US" dirty="0"/>
-              <a:t>像榮美川流</a:t>
-            </a:r>
-          </a:p>
-        </p:txBody>
-      </p:sp>
-      <p:sp>
-        <p:nvSpPr>
-          <p:cNvPr id="7" name="內容版面配置區 6"/>
+          <p:cNvPr id="5" name="內容版面配置區 4">
+            <a:extLst>
+              <a:ext uri="{FF2B5EF4-FFF2-40B4-BE49-F238E27FC236}">
+                <a16:creationId xmlns:a16="http://schemas.microsoft.com/office/drawing/2014/main" id="{458D5A35-0023-5DA3-D159-DF05AC3363BE}"/>
+              </a:ext>
+            </a:extLst>
+          </p:cNvPr>
           <p:cNvSpPr>
             <a:spLocks noGrp="1"/>
           </p:cNvSpPr>
@@ -4712,9 +4414,14 @@
             <p:ph idx="1"/>
           </p:nvPr>
         </p:nvSpPr>
-        <p:spPr/>
-        <p:txBody>
-          <a:bodyPr>
+        <p:spPr>
+          <a:xfrm>
+            <a:off x="0" y="2084851"/>
+            <a:ext cx="12192000" cy="2404863"/>
+          </a:xfrm>
+        </p:spPr>
+        <p:txBody>
+          <a:bodyPr anchor="ctr">
             <a:normAutofit/>
           </a:bodyPr>
           <a:lstStyle/>
@@ -4723,8 +4430,34 @@
               <a:buNone/>
             </a:pPr>
             <a:r>
-              <a:rPr lang="zh-TW" altLang="en-US" sz="5400" dirty="0"/>
-              <a:t>要全主信賴主</a:t>
+              <a:rPr lang="zh-TW" altLang="en-US" sz="6400" b="1" dirty="0">
+                <a:solidFill>
+                  <a:srgbClr val="660033"/>
+                </a:solidFill>
+                <a:latin typeface="微軟正黑體" pitchFamily="34" charset="-120"/>
+                <a:ea typeface="微軟正黑體" pitchFamily="34" charset="-120"/>
+              </a:rPr>
+              <a:t>不論喜樂試煉</a:t>
+            </a:r>
+            <a:r>
+              <a:rPr lang="zh-CN" altLang="en-US" sz="6400" b="1" dirty="0">
+                <a:solidFill>
+                  <a:srgbClr val="660033"/>
+                </a:solidFill>
+                <a:latin typeface="微軟正黑體" pitchFamily="34" charset="-120"/>
+                <a:ea typeface="微軟正黑體" pitchFamily="34" charset="-120"/>
+              </a:rPr>
+              <a:t>　</a:t>
+            </a:r>
+            <a:r>
+              <a:rPr lang="zh-TW" altLang="en-US" sz="6400" b="1" dirty="0">
+                <a:solidFill>
+                  <a:srgbClr val="660033"/>
+                </a:solidFill>
+                <a:latin typeface="微軟正黑體" pitchFamily="34" charset="-120"/>
+                <a:ea typeface="微軟正黑體" pitchFamily="34" charset="-120"/>
+              </a:rPr>
+              <a:t>是從上主來</a:t>
             </a:r>
           </a:p>
           <a:p>
@@ -4732,31 +4465,113 @@
               <a:buNone/>
             </a:pPr>
             <a:r>
-              <a:rPr lang="zh-TW" altLang="en-US" sz="5400" dirty="0"/>
-              <a:t>祂成全萬事</a:t>
-            </a:r>
-          </a:p>
-          <a:p>
-            <a:pPr algn="ctr">
-              <a:buNone/>
-            </a:pPr>
-            <a:r>
-              <a:rPr lang="zh-TW" altLang="en-US" sz="5400" dirty="0"/>
-              <a:t>誰完全信靠祂</a:t>
-            </a:r>
-          </a:p>
-          <a:p>
-            <a:pPr algn="ctr">
-              <a:buNone/>
-            </a:pPr>
-            <a:r>
-              <a:rPr lang="zh-TW" altLang="en-US" sz="5400" dirty="0"/>
-              <a:t>必知祂信實</a:t>
-            </a:r>
+              <a:rPr lang="zh-TW" altLang="en-US" sz="6400" b="1" dirty="0">
+                <a:solidFill>
+                  <a:srgbClr val="660033"/>
+                </a:solidFill>
+                <a:latin typeface="微軟正黑體" pitchFamily="34" charset="-120"/>
+                <a:ea typeface="微軟正黑體" pitchFamily="34" charset="-120"/>
+              </a:rPr>
+              <a:t>每時刻的遭遇</a:t>
+            </a:r>
+            <a:r>
+              <a:rPr lang="zh-CN" altLang="en-US" sz="6400" b="1" dirty="0">
+                <a:solidFill>
+                  <a:srgbClr val="660033"/>
+                </a:solidFill>
+                <a:latin typeface="微軟正黑體" pitchFamily="34" charset="-120"/>
+                <a:ea typeface="微軟正黑體" pitchFamily="34" charset="-120"/>
+              </a:rPr>
+              <a:t>　</a:t>
+            </a:r>
+            <a:r>
+              <a:rPr lang="zh-TW" altLang="en-US" sz="6400" b="1" dirty="0">
+                <a:solidFill>
+                  <a:srgbClr val="660033"/>
+                </a:solidFill>
+                <a:latin typeface="微軟正黑體" pitchFamily="34" charset="-120"/>
+                <a:ea typeface="微軟正黑體" pitchFamily="34" charset="-120"/>
+              </a:rPr>
+              <a:t>都有主慈愛</a:t>
+            </a:r>
+          </a:p>
+        </p:txBody>
+      </p:sp>
+      <p:sp>
+        <p:nvSpPr>
+          <p:cNvPr id="3" name="TextBox 2">
+            <a:extLst>
+              <a:ext uri="{FF2B5EF4-FFF2-40B4-BE49-F238E27FC236}">
+                <a16:creationId xmlns:a16="http://schemas.microsoft.com/office/drawing/2014/main" id="{B4289E30-42B7-61A2-BE4F-2DE1AC47BE0A}"/>
+              </a:ext>
+            </a:extLst>
+          </p:cNvPr>
+          <p:cNvSpPr txBox="1"/>
+          <p:nvPr/>
+        </p:nvSpPr>
+        <p:spPr>
+          <a:xfrm>
+            <a:off x="0" y="5157193"/>
+            <a:ext cx="12192000" cy="584775"/>
+          </a:xfrm>
+          <a:prstGeom prst="rect">
+            <a:avLst/>
+          </a:prstGeom>
+          <a:noFill/>
+        </p:spPr>
+        <p:txBody>
+          <a:bodyPr wrap="square" rtlCol="0">
+            <a:spAutoFit/>
+          </a:bodyPr>
+          <a:lstStyle/>
+          <a:p>
+            <a:pPr algn="ctr"/>
+            <a:r>
+              <a:rPr lang="en-US" sz="3200" b="1" dirty="0">
+                <a:solidFill>
+                  <a:srgbClr val="660033"/>
+                </a:solidFill>
+                <a:latin typeface="+mj-lt"/>
+                <a:ea typeface="Microsoft JhengHei" panose="020B0604030504040204" pitchFamily="34" charset="-120"/>
+              </a:rPr>
+              <a:t>( </a:t>
+            </a:r>
+            <a:r>
+              <a:rPr lang="en-US" altLang="zh-CN" sz="3200" b="1" dirty="0">
+                <a:solidFill>
+                  <a:srgbClr val="660033"/>
+                </a:solidFill>
+                <a:latin typeface="+mj-lt"/>
+                <a:ea typeface="Microsoft JhengHei" panose="020B0604030504040204" pitchFamily="34" charset="-120"/>
+              </a:rPr>
+              <a:t>3 / 3</a:t>
+            </a:r>
+            <a:r>
+              <a:rPr lang="en-US" sz="3200" b="1" dirty="0">
+                <a:solidFill>
+                  <a:srgbClr val="660033"/>
+                </a:solidFill>
+                <a:latin typeface="+mj-lt"/>
+                <a:ea typeface="Microsoft JhengHei" panose="020B0604030504040204" pitchFamily="34" charset="-120"/>
+              </a:rPr>
+              <a:t> )</a:t>
+            </a:r>
+            <a:endParaRPr lang="vi-VN" sz="3200" b="1" dirty="0">
+              <a:solidFill>
+                <a:srgbClr val="660033"/>
+              </a:solidFill>
+              <a:latin typeface="+mj-lt"/>
+              <a:ea typeface="Microsoft JhengHei" panose="020B0604030504040204" pitchFamily="34" charset="-120"/>
+            </a:endParaRPr>
           </a:p>
         </p:txBody>
       </p:sp>
     </p:spTree>
+    <p:extLst>
+      <p:ext uri="{BB962C8B-B14F-4D97-AF65-F5344CB8AC3E}">
+        <p14:creationId xmlns:p14="http://schemas.microsoft.com/office/powerpoint/2010/main" val="3668354255"/>
+      </p:ext>
+    </p:extLst>
   </p:cSld>
   <p:clrMapOvr>
     <a:masterClrMapping/>
@@ -4769,7 +4584,13 @@
   <p:cSld>
     <p:spTree>
       <p:nvGrpSpPr>
-        <p:cNvPr id="1" name=""/>
+        <p:cNvPr id="1" name="">
+          <a:extLst>
+            <a:ext uri="{FF2B5EF4-FFF2-40B4-BE49-F238E27FC236}">
+              <a16:creationId xmlns:a16="http://schemas.microsoft.com/office/drawing/2014/main" id="{6F9CDB2F-72E3-A528-DF61-01E66D19C77B}"/>
+            </a:ext>
+          </a:extLst>
+        </p:cNvPr>
         <p:cNvGrpSpPr/>
         <p:nvPr/>
       </p:nvGrpSpPr>
@@ -4783,29 +4604,13 @@
       </p:grpSpPr>
       <p:sp>
         <p:nvSpPr>
-          <p:cNvPr id="6" name="標題 5"/>
-          <p:cNvSpPr>
-            <a:spLocks noGrp="1"/>
-          </p:cNvSpPr>
-          <p:nvPr>
-            <p:ph type="title"/>
-          </p:nvPr>
-        </p:nvSpPr>
-        <p:spPr/>
-        <p:txBody>
-          <a:bodyPr/>
-          <a:lstStyle/>
-          <a:p>
-            <a:r>
-              <a:rPr lang="zh-TW" altLang="en-US" dirty="0"/>
-              <a:t>像榮美川流</a:t>
-            </a:r>
-          </a:p>
-        </p:txBody>
-      </p:sp>
-      <p:sp>
-        <p:nvSpPr>
-          <p:cNvPr id="7" name="內容版面配置區 6"/>
+          <p:cNvPr id="5" name="內容版面配置區 4">
+            <a:extLst>
+              <a:ext uri="{FF2B5EF4-FFF2-40B4-BE49-F238E27FC236}">
+                <a16:creationId xmlns:a16="http://schemas.microsoft.com/office/drawing/2014/main" id="{2DAB9B3D-810F-4A67-5613-3D116AB82F25}"/>
+              </a:ext>
+            </a:extLst>
+          </p:cNvPr>
           <p:cNvSpPr>
             <a:spLocks noGrp="1"/>
           </p:cNvSpPr>
@@ -4813,9 +4618,14 @@
             <p:ph idx="1"/>
           </p:nvPr>
         </p:nvSpPr>
-        <p:spPr/>
-        <p:txBody>
-          <a:bodyPr>
+        <p:spPr>
+          <a:xfrm>
+            <a:off x="0" y="2084851"/>
+            <a:ext cx="12192000" cy="2404863"/>
+          </a:xfrm>
+        </p:spPr>
+        <p:txBody>
+          <a:bodyPr anchor="ctr">
             <a:normAutofit/>
           </a:bodyPr>
           <a:lstStyle/>
@@ -4824,8 +4634,54 @@
               <a:buNone/>
             </a:pPr>
             <a:r>
-              <a:rPr lang="zh-TW" altLang="en-US" sz="5400" dirty="0"/>
-              <a:t>倚靠主耶和華</a:t>
+              <a:rPr lang="zh-TW" altLang="en-US" sz="6400" b="1" dirty="0">
+                <a:solidFill>
+                  <a:srgbClr val="660033"/>
+                </a:solidFill>
+                <a:latin typeface="微軟正黑體" pitchFamily="34" charset="-120"/>
+                <a:ea typeface="微軟正黑體" pitchFamily="34" charset="-120"/>
+              </a:rPr>
+              <a:t>要全</a:t>
+            </a:r>
+            <a:r>
+              <a:rPr lang="zh-CN" altLang="en-US" sz="6400" b="1" dirty="0">
+                <a:solidFill>
+                  <a:srgbClr val="660033"/>
+                </a:solidFill>
+                <a:latin typeface="微軟正黑體" pitchFamily="34" charset="-120"/>
+                <a:ea typeface="微軟正黑體" pitchFamily="34" charset="-120"/>
+              </a:rPr>
+              <a:t>心</a:t>
+            </a:r>
+            <a:r>
+              <a:rPr lang="zh-TW" altLang="en-US" sz="6400" b="1" dirty="0">
+                <a:solidFill>
+                  <a:srgbClr val="660033"/>
+                </a:solidFill>
+                <a:latin typeface="微軟正黑體" pitchFamily="34" charset="-120"/>
+                <a:ea typeface="微軟正黑體" pitchFamily="34" charset="-120"/>
+              </a:rPr>
+              <a:t>信賴主</a:t>
+            </a:r>
+            <a:r>
+              <a:rPr lang="zh-CN" altLang="en-US" sz="6400" b="1" dirty="0">
+                <a:solidFill>
+                  <a:srgbClr val="660033"/>
+                </a:solidFill>
+                <a:latin typeface="微軟正黑體" pitchFamily="34" charset="-120"/>
+                <a:ea typeface="微軟正黑體" pitchFamily="34" charset="-120"/>
+              </a:rPr>
+              <a:t>　</a:t>
+            </a:r>
+            <a:r>
+              <a:rPr lang="zh-TW" altLang="en-US" sz="6400" b="1" dirty="0">
+                <a:solidFill>
+                  <a:srgbClr val="660033"/>
+                </a:solidFill>
+                <a:latin typeface="微軟正黑體" pitchFamily="34" charset="-120"/>
+                <a:ea typeface="微軟正黑體" pitchFamily="34" charset="-120"/>
+              </a:rPr>
+              <a:t>祂成全萬事</a:t>
             </a:r>
           </a:p>
           <a:p>
@@ -4833,31 +4689,113 @@
               <a:buNone/>
             </a:pPr>
             <a:r>
-              <a:rPr lang="zh-TW" altLang="en-US" sz="5400" dirty="0"/>
-              <a:t>心靈得福祉</a:t>
-            </a:r>
-          </a:p>
-          <a:p>
-            <a:pPr algn="ctr">
-              <a:buNone/>
-            </a:pPr>
-            <a:r>
-              <a:rPr lang="zh-TW" altLang="en-US" sz="5400" dirty="0"/>
-              <a:t>祂的應許真實</a:t>
-            </a:r>
-          </a:p>
-          <a:p>
-            <a:pPr algn="ctr">
-              <a:buNone/>
-            </a:pPr>
-            <a:r>
-              <a:rPr lang="zh-TW" altLang="en-US" sz="5400" dirty="0"/>
-              <a:t>你必得安息</a:t>
-            </a:r>
+              <a:rPr lang="zh-TW" altLang="en-US" sz="6400" b="1" dirty="0">
+                <a:solidFill>
+                  <a:srgbClr val="660033"/>
+                </a:solidFill>
+                <a:latin typeface="微軟正黑體" pitchFamily="34" charset="-120"/>
+                <a:ea typeface="微軟正黑體" pitchFamily="34" charset="-120"/>
+              </a:rPr>
+              <a:t>誰完全信靠祂</a:t>
+            </a:r>
+            <a:r>
+              <a:rPr lang="zh-CN" altLang="en-US" sz="6400" b="1" dirty="0">
+                <a:solidFill>
+                  <a:srgbClr val="660033"/>
+                </a:solidFill>
+                <a:latin typeface="微軟正黑體" pitchFamily="34" charset="-120"/>
+                <a:ea typeface="微軟正黑體" pitchFamily="34" charset="-120"/>
+              </a:rPr>
+              <a:t>　</a:t>
+            </a:r>
+            <a:r>
+              <a:rPr lang="zh-TW" altLang="en-US" sz="6400" b="1" dirty="0">
+                <a:solidFill>
+                  <a:srgbClr val="660033"/>
+                </a:solidFill>
+                <a:latin typeface="微軟正黑體" pitchFamily="34" charset="-120"/>
+                <a:ea typeface="微軟正黑體" pitchFamily="34" charset="-120"/>
+              </a:rPr>
+              <a:t>必知祂信實</a:t>
+            </a:r>
+          </a:p>
+        </p:txBody>
+      </p:sp>
+      <p:sp>
+        <p:nvSpPr>
+          <p:cNvPr id="3" name="TextBox 2">
+            <a:extLst>
+              <a:ext uri="{FF2B5EF4-FFF2-40B4-BE49-F238E27FC236}">
+                <a16:creationId xmlns:a16="http://schemas.microsoft.com/office/drawing/2014/main" id="{93FEB7E1-C8D8-C7E0-0F2D-CFCF31F385BF}"/>
+              </a:ext>
+            </a:extLst>
+          </p:cNvPr>
+          <p:cNvSpPr txBox="1"/>
+          <p:nvPr/>
+        </p:nvSpPr>
+        <p:spPr>
+          <a:xfrm>
+            <a:off x="0" y="5157193"/>
+            <a:ext cx="12192000" cy="584775"/>
+          </a:xfrm>
+          <a:prstGeom prst="rect">
+            <a:avLst/>
+          </a:prstGeom>
+          <a:noFill/>
+        </p:spPr>
+        <p:txBody>
+          <a:bodyPr wrap="square" rtlCol="0">
+            <a:spAutoFit/>
+          </a:bodyPr>
+          <a:lstStyle/>
+          <a:p>
+            <a:pPr algn="ctr"/>
+            <a:r>
+              <a:rPr lang="en-US" sz="3200" b="1" dirty="0">
+                <a:solidFill>
+                  <a:srgbClr val="660033"/>
+                </a:solidFill>
+                <a:latin typeface="+mj-lt"/>
+                <a:ea typeface="Microsoft JhengHei" panose="020B0604030504040204" pitchFamily="34" charset="-120"/>
+              </a:rPr>
+              <a:t>( </a:t>
+            </a:r>
+            <a:r>
+              <a:rPr lang="en-US" altLang="zh-CN" sz="3200" b="1" dirty="0">
+                <a:solidFill>
+                  <a:srgbClr val="660033"/>
+                </a:solidFill>
+                <a:latin typeface="+mj-lt"/>
+                <a:ea typeface="Microsoft JhengHei" panose="020B0604030504040204" pitchFamily="34" charset="-120"/>
+              </a:rPr>
+              <a:t>3 / 3</a:t>
+            </a:r>
+            <a:r>
+              <a:rPr lang="en-US" sz="3200" b="1" dirty="0">
+                <a:solidFill>
+                  <a:srgbClr val="660033"/>
+                </a:solidFill>
+                <a:latin typeface="+mj-lt"/>
+                <a:ea typeface="Microsoft JhengHei" panose="020B0604030504040204" pitchFamily="34" charset="-120"/>
+              </a:rPr>
+              <a:t> )</a:t>
+            </a:r>
+            <a:endParaRPr lang="vi-VN" sz="3200" b="1" dirty="0">
+              <a:solidFill>
+                <a:srgbClr val="660033"/>
+              </a:solidFill>
+              <a:latin typeface="+mj-lt"/>
+              <a:ea typeface="Microsoft JhengHei" panose="020B0604030504040204" pitchFamily="34" charset="-120"/>
+            </a:endParaRPr>
           </a:p>
         </p:txBody>
       </p:sp>
     </p:spTree>
+    <p:extLst>
+      <p:ext uri="{BB962C8B-B14F-4D97-AF65-F5344CB8AC3E}">
+        <p14:creationId xmlns:p14="http://schemas.microsoft.com/office/powerpoint/2010/main" val="3324154992"/>
+      </p:ext>
+    </p:extLst>
   </p:cSld>
   <p:clrMapOvr>
     <a:masterClrMapping/>
@@ -4866,9 +4804,9 @@
 </file>
 
 <file path=ppt/theme/theme1.xml><?xml version="1.0" encoding="utf-8"?>
-<a:theme xmlns:a="http://schemas.openxmlformats.org/drawingml/2006/main" name="佈景主題8">
+<a:theme xmlns:a="http://schemas.openxmlformats.org/drawingml/2006/main" name="Theme1">
   <a:themeElements>
-    <a:clrScheme name="Deluxe">
+    <a:clrScheme name="Office">
       <a:dk1>
         <a:sysClr val="windowText" lastClr="000000"/>
       </a:dk1>
@@ -4876,52 +4814,52 @@
         <a:sysClr val="window" lastClr="FFFFFF"/>
       </a:lt1>
       <a:dk2>
-        <a:srgbClr val="30356E"/>
+        <a:srgbClr val="1F497D"/>
       </a:dk2>
       <a:lt2>
-        <a:srgbClr val="FFF9E5"/>
+        <a:srgbClr val="EEECE1"/>
       </a:lt2>
       <a:accent1>
-        <a:srgbClr val="CC4757"/>
+        <a:srgbClr val="4F81BD"/>
       </a:accent1>
       <a:accent2>
-        <a:srgbClr val="FF6F61"/>
+        <a:srgbClr val="C0504D"/>
       </a:accent2>
       <a:accent3>
-        <a:srgbClr val="FF953E"/>
+        <a:srgbClr val="9BBB59"/>
       </a:accent3>
       <a:accent4>
-        <a:srgbClr val="F8BD52"/>
+        <a:srgbClr val="8064A2"/>
       </a:accent4>
       <a:accent5>
-        <a:srgbClr val="46A6BD"/>
+        <a:srgbClr val="4BACC6"/>
       </a:accent5>
       <a:accent6>
-        <a:srgbClr val="5488BC"/>
+        <a:srgbClr val="F79646"/>
       </a:accent6>
       <a:hlink>
-        <a:srgbClr val="FA7D7A"/>
+        <a:srgbClr val="0000FF"/>
       </a:hlink>
       <a:folHlink>
-        <a:srgbClr val="FFCF3E"/>
+        <a:srgbClr val="800080"/>
       </a:folHlink>
     </a:clrScheme>
-    <a:fontScheme name="Deluxe">
+    <a:fontScheme name="Office">
       <a:majorFont>
-        <a:latin typeface="Corbel"/>
+        <a:latin typeface="Calibri"/>
         <a:ea typeface=""/>
         <a:cs typeface=""/>
-        <a:font script="Jpan" typeface="HGｺﾞｼｯｸM"/>
-        <a:font script="Hang" typeface="HY엽서L"/>
-        <a:font script="Hans" typeface="华文新魏"/>
+        <a:font script="Jpan" typeface="ＭＳ Ｐゴシック"/>
+        <a:font script="Hang" typeface="맑은 고딕"/>
+        <a:font script="Hans" typeface="宋体"/>
         <a:font script="Hant" typeface="新細明體"/>
-        <a:font script="Arab" typeface="Tahoma"/>
-        <a:font script="Hebr" typeface="Miriam"/>
-        <a:font script="Thai" typeface="DilleniaUPC"/>
+        <a:font script="Arab" typeface="Times New Roman"/>
+        <a:font script="Hebr" typeface="Times New Roman"/>
+        <a:font script="Thai" typeface="Angsana New"/>
         <a:font script="Ethi" typeface="Nyala"/>
         <a:font script="Beng" typeface="Vrinda"/>
         <a:font script="Gujr" typeface="Shruti"/>
-        <a:font script="Khmr" typeface="DaunPenh"/>
+        <a:font script="Khmr" typeface="MoolBoran"/>
         <a:font script="Knda" typeface="Tunga"/>
         <a:font script="Guru" typeface="Raavi"/>
         <a:font script="Cans" typeface="Euphemia"/>
@@ -4938,20 +4876,20 @@
         <a:font script="Laoo" typeface="DokChampa"/>
         <a:font script="Sinh" typeface="Iskoola Pota"/>
         <a:font script="Mong" typeface="Mongolian Baiti"/>
-        <a:font script="Viet" typeface="Arial"/>
+        <a:font script="Viet" typeface="Times New Roman"/>
         <a:font script="Uigh" typeface="Microsoft Uighur"/>
       </a:majorFont>
       <a:minorFont>
-        <a:latin typeface="Corbel"/>
+        <a:latin typeface="Calibri"/>
         <a:ea typeface=""/>
         <a:cs typeface=""/>
-        <a:font script="Jpan" typeface="HGｺﾞｼｯｸM"/>
-        <a:font script="Hang" typeface="HY엽서L"/>
-        <a:font script="Hans" typeface="华文新魏"/>
+        <a:font script="Jpan" typeface="ＭＳ Ｐゴシック"/>
+        <a:font script="Hang" typeface="맑은 고딕"/>
+        <a:font script="Hans" typeface="宋体"/>
         <a:font script="Hant" typeface="新細明體"/>
-        <a:font script="Arab" typeface="Tahoma"/>
-        <a:font script="Hebr" typeface="Miriam"/>
-        <a:font script="Thai" typeface="DilleniaUPC"/>
+        <a:font script="Arab" typeface="Arial"/>
+        <a:font script="Hebr" typeface="Arial"/>
+        <a:font script="Thai" typeface="Cordia New"/>
         <a:font script="Ethi" typeface="Nyala"/>
         <a:font script="Beng" typeface="Vrinda"/>
         <a:font script="Gujr" typeface="Shruti"/>
@@ -4976,7 +4914,7 @@
         <a:font script="Uigh" typeface="Microsoft Uighur"/>
       </a:minorFont>
     </a:fontScheme>
-    <a:fmtScheme name="Deluxe">
+    <a:fmtScheme name="Office">
       <a:fillStyleLst>
         <a:solidFill>
           <a:schemeClr val="phClr"/>
@@ -4985,38 +4923,20 @@
           <a:gsLst>
             <a:gs pos="0">
               <a:schemeClr val="phClr">
-                <a:tint val="20000"/>
-                <a:satMod val="280000"/>
+                <a:tint val="50000"/>
+                <a:satMod val="300000"/>
               </a:schemeClr>
             </a:gs>
-            <a:gs pos="14000">
+            <a:gs pos="35000">
               <a:schemeClr val="phClr">
                 <a:tint val="37000"/>
-                <a:satMod val="250000"/>
-              </a:schemeClr>
-            </a:gs>
-            <a:gs pos="45000">
-              <a:schemeClr val="phClr">
-                <a:tint val="53000"/>
-                <a:satMod val="220000"/>
-              </a:schemeClr>
-            </a:gs>
-            <a:gs pos="65000">
-              <a:schemeClr val="phClr">
-                <a:tint val="53000"/>
-                <a:satMod val="220000"/>
-              </a:schemeClr>
-            </a:gs>
-            <a:gs pos="86000">
-              <a:schemeClr val="phClr">
-                <a:tint val="42000"/>
-                <a:satMod val="240000"/>
+                <a:satMod val="300000"/>
               </a:schemeClr>
             </a:gs>
             <a:gs pos="100000">
               <a:schemeClr val="phClr">
-                <a:tint val="20000"/>
-                <a:satMod val="230000"/>
+                <a:tint val="15000"/>
+                <a:satMod val="350000"/>
               </a:schemeClr>
             </a:gs>
           </a:gsLst>
@@ -5026,30 +4946,32 @@
           <a:gsLst>
             <a:gs pos="0">
               <a:schemeClr val="phClr">
-                <a:shade val="75000"/>
-                <a:satMod val="160000"/>
+                <a:shade val="51000"/>
+                <a:satMod val="130000"/>
               </a:schemeClr>
             </a:gs>
-            <a:gs pos="60000">
+            <a:gs pos="80000">
               <a:schemeClr val="phClr">
-                <a:satMod val="150000"/>
+                <a:shade val="93000"/>
+                <a:satMod val="130000"/>
               </a:schemeClr>
             </a:gs>
             <a:gs pos="100000">
               <a:schemeClr val="phClr">
-                <a:tint val="75000"/>
-                <a:satMod val="200000"/>
+                <a:shade val="94000"/>
+                <a:satMod val="135000"/>
               </a:schemeClr>
             </a:gs>
           </a:gsLst>
-          <a:lin ang="16200000" scaled="1"/>
+          <a:lin ang="16200000" scaled="0"/>
         </a:gradFill>
       </a:fillStyleLst>
       <a:lnStyleLst>
         <a:ln w="9525" cap="flat" cmpd="sng" algn="ctr">
           <a:solidFill>
             <a:schemeClr val="phClr">
-              <a:satMod val="140000"/>
+              <a:shade val="95000"/>
+              <a:satMod val="105000"/>
             </a:schemeClr>
           </a:solidFill>
           <a:prstDash val="solid"/>
@@ -5060,7 +4982,7 @@
           </a:solidFill>
           <a:prstDash val="solid"/>
         </a:ln>
-        <a:ln w="31750" cap="flat" cmpd="sng" algn="ctr">
+        <a:ln w="38100" cap="flat" cmpd="sng" algn="ctr">
           <a:solidFill>
             <a:schemeClr val="phClr"/>
           </a:solidFill>
@@ -5070,53 +4992,40 @@
       <a:effectStyleLst>
         <a:effectStyle>
           <a:effectLst>
-            <a:outerShdw blurRad="50800" dist="25400" dir="5400000" rotWithShape="0">
+            <a:outerShdw blurRad="40000" dist="20000" dir="5400000" rotWithShape="0">
               <a:srgbClr val="000000">
-                <a:alpha val="43137"/>
+                <a:alpha val="38000"/>
               </a:srgbClr>
             </a:outerShdw>
           </a:effectLst>
         </a:effectStyle>
         <a:effectStyle>
           <a:effectLst>
-            <a:outerShdw blurRad="50800" dist="25400" dir="5400000" rotWithShape="0">
+            <a:outerShdw blurRad="40000" dist="23000" dir="5400000" rotWithShape="0">
               <a:srgbClr val="000000">
-                <a:alpha val="43137"/>
+                <a:alpha val="35000"/>
+              </a:srgbClr>
+            </a:outerShdw>
+          </a:effectLst>
+        </a:effectStyle>
+        <a:effectStyle>
+          <a:effectLst>
+            <a:outerShdw blurRad="40000" dist="23000" dir="5400000" rotWithShape="0">
+              <a:srgbClr val="000000">
+                <a:alpha val="35000"/>
               </a:srgbClr>
             </a:outerShdw>
           </a:effectLst>
           <a:scene3d>
-            <a:camera prst="orthographicFront" fov="0">
+            <a:camera prst="orthographicFront">
               <a:rot lat="0" lon="0" rev="0"/>
             </a:camera>
-            <a:lightRig rig="contrasting" dir="t">
-              <a:rot lat="0" lon="0" rev="16500000"/>
+            <a:lightRig rig="threePt" dir="t">
+              <a:rot lat="0" lon="0" rev="1200000"/>
             </a:lightRig>
           </a:scene3d>
-          <a:sp3d prstMaterial="powder">
-            <a:bevelT w="152400"/>
-            <a:contourClr>
-              <a:schemeClr val="phClr"/>
-            </a:contourClr>
-          </a:sp3d>
-        </a:effectStyle>
-        <a:effectStyle>
-          <a:effectLst>
-            <a:reflection blurRad="12700" stA="26000" endPos="28000" dist="38100" dir="5400000" sy="-100000"/>
-          </a:effectLst>
-          <a:scene3d>
-            <a:camera prst="orthographicFront" fov="0">
-              <a:rot lat="0" lon="0" rev="0"/>
-            </a:camera>
-            <a:lightRig rig="contrasting" dir="t">
-              <a:rot lat="0" lon="0" rev="16500000"/>
-            </a:lightRig>
-          </a:scene3d>
-          <a:sp3d prstMaterial="powder">
-            <a:bevelT w="190500" h="101600"/>
-            <a:contourClr>
-              <a:schemeClr val="phClr"/>
-            </a:contourClr>
+          <a:sp3d>
+            <a:bevelT w="63500" h="25400"/>
           </a:sp3d>
         </a:effectStyle>
       </a:effectStyleLst>
@@ -5128,50 +5037,45 @@
           <a:gsLst>
             <a:gs pos="0">
               <a:schemeClr val="phClr">
-                <a:tint val="43000"/>
-                <a:satMod val="1550000"/>
+                <a:tint val="40000"/>
+                <a:satMod val="350000"/>
               </a:schemeClr>
             </a:gs>
-            <a:gs pos="1000">
+            <a:gs pos="40000">
               <a:schemeClr val="phClr">
-                <a:tint val="48000"/>
-                <a:satMod val="1550000"/>
+                <a:tint val="45000"/>
+                <a:shade val="99000"/>
+                <a:satMod val="350000"/>
               </a:schemeClr>
             </a:gs>
-            <a:gs pos="90000">
+            <a:gs pos="100000">
               <a:schemeClr val="phClr">
-                <a:shade val="18000"/>
-                <a:satMod val="275000"/>
+                <a:shade val="20000"/>
+                <a:satMod val="255000"/>
               </a:schemeClr>
             </a:gs>
           </a:gsLst>
           <a:path path="circle">
-            <a:fillToRect r="210000" b="300000"/>
+            <a:fillToRect l="50000" t="-80000" r="50000" b="180000"/>
           </a:path>
         </a:gradFill>
         <a:gradFill rotWithShape="1">
           <a:gsLst>
-            <a:gs pos="5000">
+            <a:gs pos="0">
               <a:schemeClr val="phClr">
-                <a:tint val="38000"/>
-                <a:satMod val="1800000"/>
+                <a:tint val="80000"/>
+                <a:satMod val="300000"/>
               </a:schemeClr>
             </a:gs>
-            <a:gs pos="5000">
+            <a:gs pos="100000">
               <a:schemeClr val="phClr">
-                <a:tint val="40000"/>
-                <a:satMod val="1800000"/>
-              </a:schemeClr>
-            </a:gs>
-            <a:gs pos="90000">
-              <a:schemeClr val="phClr">
-                <a:shade val="18000"/>
-                <a:satMod val="275000"/>
+                <a:shade val="30000"/>
+                <a:satMod val="200000"/>
               </a:schemeClr>
             </a:gs>
           </a:gsLst>
           <a:path path="circle">
-            <a:fillToRect l="20000" t="30000" r="135000" b="100000"/>
+            <a:fillToRect l="50000" t="50000" r="50000" b="50000"/>
           </a:path>
         </a:gradFill>
       </a:bgFillStyleLst>
@@ -5179,5 +5083,10 @@
   </a:themeElements>
   <a:objectDefaults/>
   <a:extraClrSchemeLst/>
+  <a:extLst>
+    <a:ext uri="{05A4C25C-085E-4340-85A3-A5531E510DB2}">
+      <thm15:themeFamily xmlns:thm15="http://schemas.microsoft.com/office/thememl/2012/main" name="Theme1" id="{384ED68F-161E-4EC5-AA47-8343C2AC128D}" vid="{FD3E678D-D6FA-4147-A139-1A6315ADEDC3}"/>
+    </a:ext>
+  </a:extLst>
 </a:theme>
 </file>